--- a/5. AI/Slides.pptx
+++ b/5. AI/Slides.pptx
@@ -6,7 +6,7 @@
     <p:sldMasterId id="2147483685" r:id="rId5"/>
   </p:sldMasterIdLst>
   <p:notesMasterIdLst>
-    <p:notesMasterId r:id="rId26"/>
+    <p:notesMasterId r:id="rId25"/>
   </p:notesMasterIdLst>
   <p:sldIdLst>
     <p:sldId id="1460" r:id="rId6"/>
@@ -27,28 +27,27 @@
     <p:sldId id="298" r:id="rId21"/>
     <p:sldId id="299" r:id="rId22"/>
     <p:sldId id="278" r:id="rId23"/>
-    <p:sldId id="300" r:id="rId24"/>
-    <p:sldId id="304" r:id="rId25"/>
+    <p:sldId id="304" r:id="rId24"/>
   </p:sldIdLst>
   <p:sldSz cx="9144000" cy="5143500" type="screen16x9"/>
   <p:notesSz cx="6858000" cy="9144000"/>
   <p:embeddedFontLst>
     <p:embeddedFont>
-      <p:font typeface="Assistant" panose="020B0604020202020204" charset="-79"/>
-      <p:regular r:id="rId27"/>
-      <p:bold r:id="rId28"/>
+      <p:font typeface="Assistant" pitchFamily="2" charset="-79"/>
+      <p:regular r:id="rId26"/>
+      <p:bold r:id="rId27"/>
     </p:embeddedFont>
     <p:embeddedFont>
-      <p:font typeface="Century Gothic" panose="020B0604020202020204" charset="0"/>
-      <p:regular r:id="rId29"/>
-      <p:bold r:id="rId30"/>
-      <p:italic r:id="rId31"/>
-      <p:boldItalic r:id="rId32"/>
+      <p:font typeface="Century Gothic" panose="020B0502020202020204" pitchFamily="34" charset="0"/>
+      <p:regular r:id="rId28"/>
+      <p:bold r:id="rId29"/>
+      <p:italic r:id="rId30"/>
+      <p:boldItalic r:id="rId31"/>
     </p:embeddedFont>
     <p:embeddedFont>
       <p:font typeface="Orbitron" panose="020B0604020202020204" charset="0"/>
-      <p:regular r:id="rId33"/>
-      <p:bold r:id="rId34"/>
+      <p:regular r:id="rId32"/>
+      <p:bold r:id="rId33"/>
     </p:embeddedFont>
   </p:embeddedFontLst>
   <p:defaultTextStyle>
@@ -2590,7 +2589,6 @@
     </c:plotArea>
     <c:plotVisOnly val="1"/>
     <c:dispBlanksAs val="gap"/>
-    <c:showDLblsOverMax val="0"/>
     <c:extLst>
       <c:ext xmlns:c16r3="http://schemas.microsoft.com/office/drawing/2017/03/chart" uri="{56B9EC1D-385E-4148-901F-78D8002777C0}">
         <c16r3:dataDisplayOptions16>
@@ -2598,6 +2596,7 @@
         </c16r3:dataDisplayOptions16>
       </c:ext>
     </c:extLst>
+    <c:showDLblsOverMax val="0"/>
   </c:chart>
   <c:spPr>
     <a:noFill/>
@@ -6274,2085 +6273,6 @@
 </file>
 
 <file path=ppt/slideLayouts/slideLayout10.xml><?xml version="1.0" encoding="utf-8"?>
-<p:sldLayout xmlns:a="http://schemas.openxmlformats.org/drawingml/2006/main" xmlns:r="http://schemas.openxmlformats.org/officeDocument/2006/relationships" xmlns:p="http://schemas.openxmlformats.org/presentationml/2006/main" matchingName="Background 1">
-  <p:cSld name="CUSTOM_9_1">
-    <p:spTree>
-      <p:nvGrpSpPr>
-        <p:cNvPr id="1" name="Shape 393"/>
-        <p:cNvGrpSpPr/>
-        <p:nvPr/>
-      </p:nvGrpSpPr>
-      <p:grpSpPr>
-        <a:xfrm>
-          <a:off x="0" y="0"/>
-          <a:ext cx="0" cy="0"/>
-          <a:chOff x="0" y="0"/>
-          <a:chExt cx="0" cy="0"/>
-        </a:xfrm>
-      </p:grpSpPr>
-      <p:grpSp>
-        <p:nvGrpSpPr>
-          <p:cNvPr id="394" name="Google Shape;394;p33"/>
-          <p:cNvGrpSpPr/>
-          <p:nvPr/>
-        </p:nvGrpSpPr>
-        <p:grpSpPr>
-          <a:xfrm>
-            <a:off x="351128" y="228595"/>
-            <a:ext cx="8430000" cy="4686251"/>
-            <a:chOff x="351128" y="228595"/>
-            <a:chExt cx="8430000" cy="4686251"/>
-          </a:xfrm>
-        </p:grpSpPr>
-        <p:sp>
-          <p:nvSpPr>
-            <p:cNvPr id="395" name="Google Shape;395;p33"/>
-            <p:cNvSpPr/>
-            <p:nvPr/>
-          </p:nvSpPr>
-          <p:spPr>
-            <a:xfrm>
-              <a:off x="351128" y="238644"/>
-              <a:ext cx="8430000" cy="4666200"/>
-            </a:xfrm>
-            <a:prstGeom prst="roundRect">
-              <a:avLst>
-                <a:gd name="adj" fmla="val 4973"/>
-              </a:avLst>
-            </a:prstGeom>
-            <a:noFill/>
-            <a:ln w="28575" cap="flat" cmpd="sng">
-              <a:solidFill>
-                <a:schemeClr val="lt2"/>
-              </a:solidFill>
-              <a:prstDash val="solid"/>
-              <a:round/>
-              <a:headEnd type="none" w="sm" len="sm"/>
-              <a:tailEnd type="none" w="sm" len="sm"/>
-            </a:ln>
-          </p:spPr>
-          <p:txBody>
-            <a:bodyPr spcFirstLastPara="1" wrap="square" lIns="91425" tIns="91425" rIns="91425" bIns="91425" anchor="ctr" anchorCtr="0">
-              <a:noAutofit/>
-            </a:bodyPr>
-            <a:lstStyle/>
-            <a:p>
-              <a:pPr marL="0" lvl="0" indent="0" algn="l" rtl="0">
-                <a:spcBef>
-                  <a:spcPts val="0"/>
-                </a:spcBef>
-                <a:spcAft>
-                  <a:spcPts val="0"/>
-                </a:spcAft>
-                <a:buNone/>
-              </a:pPr>
-              <a:endParaRPr/>
-            </a:p>
-          </p:txBody>
-        </p:sp>
-        <p:grpSp>
-          <p:nvGrpSpPr>
-            <p:cNvPr id="396" name="Google Shape;396;p33"/>
-            <p:cNvGrpSpPr/>
-            <p:nvPr/>
-          </p:nvGrpSpPr>
-          <p:grpSpPr>
-            <a:xfrm>
-              <a:off x="713171" y="228595"/>
-              <a:ext cx="7717725" cy="4686251"/>
-              <a:chOff x="713175" y="432300"/>
-              <a:chExt cx="7717725" cy="4278900"/>
-            </a:xfrm>
-          </p:grpSpPr>
-          <p:cxnSp>
-            <p:nvCxnSpPr>
-              <p:cNvPr id="397" name="Google Shape;397;p33"/>
-              <p:cNvCxnSpPr/>
-              <p:nvPr/>
-            </p:nvCxnSpPr>
-            <p:spPr>
-              <a:xfrm>
-                <a:off x="713175" y="453850"/>
-                <a:ext cx="0" cy="4242000"/>
-              </a:xfrm>
-              <a:prstGeom prst="straightConnector1">
-                <a:avLst/>
-              </a:prstGeom>
-              <a:noFill/>
-              <a:ln w="28575" cap="flat" cmpd="sng">
-                <a:solidFill>
-                  <a:schemeClr val="lt2"/>
-                </a:solidFill>
-                <a:prstDash val="solid"/>
-                <a:round/>
-                <a:headEnd type="none" w="med" len="med"/>
-                <a:tailEnd type="none" w="med" len="med"/>
-              </a:ln>
-            </p:spPr>
-          </p:cxnSp>
-          <p:cxnSp>
-            <p:nvCxnSpPr>
-              <p:cNvPr id="398" name="Google Shape;398;p33"/>
-              <p:cNvCxnSpPr/>
-              <p:nvPr/>
-            </p:nvCxnSpPr>
-            <p:spPr>
-              <a:xfrm>
-                <a:off x="8430900" y="432300"/>
-                <a:ext cx="0" cy="4278900"/>
-              </a:xfrm>
-              <a:prstGeom prst="straightConnector1">
-                <a:avLst/>
-              </a:prstGeom>
-              <a:noFill/>
-              <a:ln w="28575" cap="flat" cmpd="sng">
-                <a:solidFill>
-                  <a:schemeClr val="lt2"/>
-                </a:solidFill>
-                <a:prstDash val="solid"/>
-                <a:round/>
-                <a:headEnd type="none" w="med" len="med"/>
-                <a:tailEnd type="none" w="med" len="med"/>
-              </a:ln>
-            </p:spPr>
-          </p:cxnSp>
-        </p:grpSp>
-      </p:grpSp>
-      <p:sp>
-        <p:nvSpPr>
-          <p:cNvPr id="399" name="Google Shape;399;p33"/>
-          <p:cNvSpPr/>
-          <p:nvPr/>
-        </p:nvSpPr>
-        <p:spPr>
-          <a:xfrm>
-            <a:off x="6744573" y="3029250"/>
-            <a:ext cx="1523400" cy="1523400"/>
-          </a:xfrm>
-          <a:prstGeom prst="roundRect">
-            <a:avLst>
-              <a:gd name="adj" fmla="val 16667"/>
-            </a:avLst>
-          </a:prstGeom>
-          <a:noFill/>
-          <a:ln w="28575" cap="flat" cmpd="sng">
-            <a:solidFill>
-              <a:schemeClr val="lt2"/>
-            </a:solidFill>
-            <a:prstDash val="solid"/>
-            <a:round/>
-            <a:headEnd type="none" w="sm" len="sm"/>
-            <a:tailEnd type="none" w="sm" len="sm"/>
-          </a:ln>
-        </p:spPr>
-        <p:txBody>
-          <a:bodyPr spcFirstLastPara="1" wrap="square" lIns="91425" tIns="91425" rIns="91425" bIns="91425" anchor="ctr" anchorCtr="0">
-            <a:noAutofit/>
-          </a:bodyPr>
-          <a:lstStyle/>
-          <a:p>
-            <a:pPr marL="0" lvl="0" indent="0" algn="l" rtl="0">
-              <a:spcBef>
-                <a:spcPts val="0"/>
-              </a:spcBef>
-              <a:spcAft>
-                <a:spcPts val="0"/>
-              </a:spcAft>
-              <a:buNone/>
-            </a:pPr>
-            <a:endParaRPr/>
-          </a:p>
-        </p:txBody>
-      </p:sp>
-      <p:grpSp>
-        <p:nvGrpSpPr>
-          <p:cNvPr id="400" name="Google Shape;400;p33"/>
-          <p:cNvGrpSpPr/>
-          <p:nvPr/>
-        </p:nvGrpSpPr>
-        <p:grpSpPr>
-          <a:xfrm>
-            <a:off x="7177923" y="3462608"/>
-            <a:ext cx="656700" cy="656686"/>
-            <a:chOff x="8030050" y="2613550"/>
-            <a:chExt cx="1147475" cy="1147450"/>
-          </a:xfrm>
-        </p:grpSpPr>
-        <p:sp>
-          <p:nvSpPr>
-            <p:cNvPr id="401" name="Google Shape;401;p33"/>
-            <p:cNvSpPr/>
-            <p:nvPr/>
-          </p:nvSpPr>
-          <p:spPr>
-            <a:xfrm>
-              <a:off x="8030050" y="2613550"/>
-              <a:ext cx="1147475" cy="1147450"/>
-            </a:xfrm>
-            <a:custGeom>
-              <a:avLst/>
-              <a:gdLst/>
-              <a:ahLst/>
-              <a:cxnLst/>
-              <a:rect l="l" t="t" r="r" b="b"/>
-              <a:pathLst>
-                <a:path w="45899" h="45898" extrusionOk="0">
-                  <a:moveTo>
-                    <a:pt x="22949" y="45898"/>
-                  </a:moveTo>
-                  <a:cubicBezTo>
-                    <a:pt x="10305" y="45898"/>
-                    <a:pt x="1" y="35594"/>
-                    <a:pt x="1" y="22949"/>
-                  </a:cubicBezTo>
-                  <a:cubicBezTo>
-                    <a:pt x="1" y="10305"/>
-                    <a:pt x="10305" y="1"/>
-                    <a:pt x="22949" y="1"/>
-                  </a:cubicBezTo>
-                  <a:cubicBezTo>
-                    <a:pt x="35594" y="1"/>
-                    <a:pt x="45898" y="10305"/>
-                    <a:pt x="45898" y="22949"/>
-                  </a:cubicBezTo>
-                  <a:cubicBezTo>
-                    <a:pt x="45898" y="35594"/>
-                    <a:pt x="35594" y="45898"/>
-                    <a:pt x="22949" y="45898"/>
-                  </a:cubicBezTo>
-                  <a:close/>
-                  <a:moveTo>
-                    <a:pt x="22949" y="396"/>
-                  </a:moveTo>
-                  <a:cubicBezTo>
-                    <a:pt x="10517" y="396"/>
-                    <a:pt x="365" y="10487"/>
-                    <a:pt x="365" y="22949"/>
-                  </a:cubicBezTo>
-                  <a:cubicBezTo>
-                    <a:pt x="365" y="35381"/>
-                    <a:pt x="10487" y="45533"/>
-                    <a:pt x="22949" y="45533"/>
-                  </a:cubicBezTo>
-                  <a:cubicBezTo>
-                    <a:pt x="35381" y="45533"/>
-                    <a:pt x="45503" y="35411"/>
-                    <a:pt x="45503" y="22949"/>
-                  </a:cubicBezTo>
-                  <a:cubicBezTo>
-                    <a:pt x="45503" y="10517"/>
-                    <a:pt x="35412" y="396"/>
-                    <a:pt x="22949" y="396"/>
-                  </a:cubicBezTo>
-                  <a:close/>
-                </a:path>
-              </a:pathLst>
-            </a:custGeom>
-            <a:solidFill>
-              <a:schemeClr val="dk2"/>
-            </a:solidFill>
-            <a:ln w="9525" cap="flat" cmpd="sng">
-              <a:solidFill>
-                <a:schemeClr val="dk2"/>
-              </a:solidFill>
-              <a:prstDash val="solid"/>
-              <a:round/>
-              <a:headEnd type="none" w="sm" len="sm"/>
-              <a:tailEnd type="none" w="sm" len="sm"/>
-            </a:ln>
-          </p:spPr>
-          <p:txBody>
-            <a:bodyPr spcFirstLastPara="1" wrap="square" lIns="91425" tIns="91425" rIns="91425" bIns="91425" anchor="ctr" anchorCtr="0">
-              <a:noAutofit/>
-            </a:bodyPr>
-            <a:lstStyle/>
-            <a:p>
-              <a:pPr marL="0" lvl="0" indent="0" algn="l" rtl="0">
-                <a:spcBef>
-                  <a:spcPts val="0"/>
-                </a:spcBef>
-                <a:spcAft>
-                  <a:spcPts val="0"/>
-                </a:spcAft>
-                <a:buNone/>
-              </a:pPr>
-              <a:endParaRPr/>
-            </a:p>
-          </p:txBody>
-        </p:sp>
-        <p:sp>
-          <p:nvSpPr>
-            <p:cNvPr id="402" name="Google Shape;402;p33"/>
-            <p:cNvSpPr/>
-            <p:nvPr/>
-          </p:nvSpPr>
-          <p:spPr>
-            <a:xfrm>
-              <a:off x="8030050" y="2613550"/>
-              <a:ext cx="1147475" cy="1147450"/>
-            </a:xfrm>
-            <a:custGeom>
-              <a:avLst/>
-              <a:gdLst/>
-              <a:ahLst/>
-              <a:cxnLst/>
-              <a:rect l="l" t="t" r="r" b="b"/>
-              <a:pathLst>
-                <a:path w="45899" h="45898" extrusionOk="0">
-                  <a:moveTo>
-                    <a:pt x="22949" y="45898"/>
-                  </a:moveTo>
-                  <a:cubicBezTo>
-                    <a:pt x="10305" y="45898"/>
-                    <a:pt x="1" y="35594"/>
-                    <a:pt x="1" y="22949"/>
-                  </a:cubicBezTo>
-                  <a:cubicBezTo>
-                    <a:pt x="1" y="10305"/>
-                    <a:pt x="10305" y="1"/>
-                    <a:pt x="22949" y="1"/>
-                  </a:cubicBezTo>
-                  <a:cubicBezTo>
-                    <a:pt x="35594" y="1"/>
-                    <a:pt x="45898" y="10305"/>
-                    <a:pt x="45898" y="22949"/>
-                  </a:cubicBezTo>
-                  <a:cubicBezTo>
-                    <a:pt x="45898" y="35594"/>
-                    <a:pt x="35594" y="45898"/>
-                    <a:pt x="22949" y="45898"/>
-                  </a:cubicBezTo>
-                  <a:close/>
-                  <a:moveTo>
-                    <a:pt x="22949" y="396"/>
-                  </a:moveTo>
-                  <a:cubicBezTo>
-                    <a:pt x="10517" y="396"/>
-                    <a:pt x="365" y="10487"/>
-                    <a:pt x="365" y="22949"/>
-                  </a:cubicBezTo>
-                  <a:cubicBezTo>
-                    <a:pt x="365" y="35381"/>
-                    <a:pt x="10487" y="45533"/>
-                    <a:pt x="22949" y="45533"/>
-                  </a:cubicBezTo>
-                  <a:cubicBezTo>
-                    <a:pt x="35381" y="45533"/>
-                    <a:pt x="45503" y="35411"/>
-                    <a:pt x="45503" y="22949"/>
-                  </a:cubicBezTo>
-                  <a:cubicBezTo>
-                    <a:pt x="45503" y="10517"/>
-                    <a:pt x="35412" y="396"/>
-                    <a:pt x="22949" y="396"/>
-                  </a:cubicBezTo>
-                  <a:close/>
-                </a:path>
-              </a:pathLst>
-            </a:custGeom>
-            <a:solidFill>
-              <a:schemeClr val="dk2"/>
-            </a:solidFill>
-            <a:ln w="9525" cap="flat" cmpd="sng">
-              <a:solidFill>
-                <a:schemeClr val="dk2"/>
-              </a:solidFill>
-              <a:prstDash val="solid"/>
-              <a:round/>
-              <a:headEnd type="none" w="sm" len="sm"/>
-              <a:tailEnd type="none" w="sm" len="sm"/>
-            </a:ln>
-          </p:spPr>
-          <p:txBody>
-            <a:bodyPr spcFirstLastPara="1" wrap="square" lIns="91425" tIns="91425" rIns="91425" bIns="91425" anchor="ctr" anchorCtr="0">
-              <a:noAutofit/>
-            </a:bodyPr>
-            <a:lstStyle/>
-            <a:p>
-              <a:pPr marL="0" lvl="0" indent="0" algn="l" rtl="0">
-                <a:spcBef>
-                  <a:spcPts val="0"/>
-                </a:spcBef>
-                <a:spcAft>
-                  <a:spcPts val="0"/>
-                </a:spcAft>
-                <a:buNone/>
-              </a:pPr>
-              <a:endParaRPr/>
-            </a:p>
-          </p:txBody>
-        </p:sp>
-        <p:sp>
-          <p:nvSpPr>
-            <p:cNvPr id="403" name="Google Shape;403;p33"/>
-            <p:cNvSpPr/>
-            <p:nvPr/>
-          </p:nvSpPr>
-          <p:spPr>
-            <a:xfrm>
-              <a:off x="8143275" y="2613550"/>
-              <a:ext cx="923300" cy="1147450"/>
-            </a:xfrm>
-            <a:custGeom>
-              <a:avLst/>
-              <a:gdLst/>
-              <a:ahLst/>
-              <a:cxnLst/>
-              <a:rect l="l" t="t" r="r" b="b"/>
-              <a:pathLst>
-                <a:path w="36932" h="45898" extrusionOk="0">
-                  <a:moveTo>
-                    <a:pt x="18451" y="45898"/>
-                  </a:moveTo>
-                  <a:cubicBezTo>
-                    <a:pt x="8268" y="45898"/>
-                    <a:pt x="1" y="35594"/>
-                    <a:pt x="1" y="22949"/>
-                  </a:cubicBezTo>
-                  <a:cubicBezTo>
-                    <a:pt x="1" y="10305"/>
-                    <a:pt x="8268" y="1"/>
-                    <a:pt x="18451" y="1"/>
-                  </a:cubicBezTo>
-                  <a:cubicBezTo>
-                    <a:pt x="28633" y="1"/>
-                    <a:pt x="36931" y="10305"/>
-                    <a:pt x="36931" y="22949"/>
-                  </a:cubicBezTo>
-                  <a:cubicBezTo>
-                    <a:pt x="36931" y="35594"/>
-                    <a:pt x="28633" y="45898"/>
-                    <a:pt x="18451" y="45898"/>
-                  </a:cubicBezTo>
-                  <a:close/>
-                  <a:moveTo>
-                    <a:pt x="18451" y="396"/>
-                  </a:moveTo>
-                  <a:cubicBezTo>
-                    <a:pt x="8481" y="396"/>
-                    <a:pt x="365" y="10487"/>
-                    <a:pt x="365" y="22949"/>
-                  </a:cubicBezTo>
-                  <a:cubicBezTo>
-                    <a:pt x="365" y="35381"/>
-                    <a:pt x="8451" y="45533"/>
-                    <a:pt x="18451" y="45533"/>
-                  </a:cubicBezTo>
-                  <a:cubicBezTo>
-                    <a:pt x="28420" y="45533"/>
-                    <a:pt x="36536" y="35411"/>
-                    <a:pt x="36536" y="22949"/>
-                  </a:cubicBezTo>
-                  <a:cubicBezTo>
-                    <a:pt x="36506" y="10517"/>
-                    <a:pt x="28420" y="396"/>
-                    <a:pt x="18451" y="396"/>
-                  </a:cubicBezTo>
-                  <a:close/>
-                </a:path>
-              </a:pathLst>
-            </a:custGeom>
-            <a:solidFill>
-              <a:schemeClr val="dk2"/>
-            </a:solidFill>
-            <a:ln w="9525" cap="flat" cmpd="sng">
-              <a:solidFill>
-                <a:schemeClr val="dk2"/>
-              </a:solidFill>
-              <a:prstDash val="solid"/>
-              <a:round/>
-              <a:headEnd type="none" w="sm" len="sm"/>
-              <a:tailEnd type="none" w="sm" len="sm"/>
-            </a:ln>
-          </p:spPr>
-          <p:txBody>
-            <a:bodyPr spcFirstLastPara="1" wrap="square" lIns="91425" tIns="91425" rIns="91425" bIns="91425" anchor="ctr" anchorCtr="0">
-              <a:noAutofit/>
-            </a:bodyPr>
-            <a:lstStyle/>
-            <a:p>
-              <a:pPr marL="0" lvl="0" indent="0" algn="l" rtl="0">
-                <a:spcBef>
-                  <a:spcPts val="0"/>
-                </a:spcBef>
-                <a:spcAft>
-                  <a:spcPts val="0"/>
-                </a:spcAft>
-                <a:buNone/>
-              </a:pPr>
-              <a:endParaRPr/>
-            </a:p>
-          </p:txBody>
-        </p:sp>
-        <p:sp>
-          <p:nvSpPr>
-            <p:cNvPr id="404" name="Google Shape;404;p33"/>
-            <p:cNvSpPr/>
-            <p:nvPr/>
-          </p:nvSpPr>
-          <p:spPr>
-            <a:xfrm>
-              <a:off x="8242825" y="2613550"/>
-              <a:ext cx="724950" cy="1147450"/>
-            </a:xfrm>
-            <a:custGeom>
-              <a:avLst/>
-              <a:gdLst/>
-              <a:ahLst/>
-              <a:cxnLst/>
-              <a:rect l="l" t="t" r="r" b="b"/>
-              <a:pathLst>
-                <a:path w="28998" h="45898" extrusionOk="0">
-                  <a:moveTo>
-                    <a:pt x="14469" y="45898"/>
-                  </a:moveTo>
-                  <a:cubicBezTo>
-                    <a:pt x="6505" y="45898"/>
-                    <a:pt x="0" y="35594"/>
-                    <a:pt x="0" y="22949"/>
-                  </a:cubicBezTo>
-                  <a:cubicBezTo>
-                    <a:pt x="0" y="10305"/>
-                    <a:pt x="6505" y="1"/>
-                    <a:pt x="14469" y="1"/>
-                  </a:cubicBezTo>
-                  <a:cubicBezTo>
-                    <a:pt x="22463" y="1"/>
-                    <a:pt x="28937" y="10305"/>
-                    <a:pt x="28937" y="22949"/>
-                  </a:cubicBezTo>
-                  <a:cubicBezTo>
-                    <a:pt x="28998" y="35594"/>
-                    <a:pt x="22493" y="45898"/>
-                    <a:pt x="14469" y="45898"/>
-                  </a:cubicBezTo>
-                  <a:close/>
-                  <a:moveTo>
-                    <a:pt x="14469" y="396"/>
-                  </a:moveTo>
-                  <a:cubicBezTo>
-                    <a:pt x="6687" y="396"/>
-                    <a:pt x="365" y="10487"/>
-                    <a:pt x="365" y="22949"/>
-                  </a:cubicBezTo>
-                  <a:cubicBezTo>
-                    <a:pt x="365" y="35381"/>
-                    <a:pt x="6687" y="45533"/>
-                    <a:pt x="14469" y="45533"/>
-                  </a:cubicBezTo>
-                  <a:cubicBezTo>
-                    <a:pt x="22250" y="45533"/>
-                    <a:pt x="28572" y="35411"/>
-                    <a:pt x="28572" y="22949"/>
-                  </a:cubicBezTo>
-                  <a:cubicBezTo>
-                    <a:pt x="28603" y="10517"/>
-                    <a:pt x="22250" y="396"/>
-                    <a:pt x="14469" y="396"/>
-                  </a:cubicBezTo>
-                  <a:close/>
-                </a:path>
-              </a:pathLst>
-            </a:custGeom>
-            <a:solidFill>
-              <a:schemeClr val="dk2"/>
-            </a:solidFill>
-            <a:ln w="9525" cap="flat" cmpd="sng">
-              <a:solidFill>
-                <a:schemeClr val="dk2"/>
-              </a:solidFill>
-              <a:prstDash val="solid"/>
-              <a:round/>
-              <a:headEnd type="none" w="sm" len="sm"/>
-              <a:tailEnd type="none" w="sm" len="sm"/>
-            </a:ln>
-          </p:spPr>
-          <p:txBody>
-            <a:bodyPr spcFirstLastPara="1" wrap="square" lIns="91425" tIns="91425" rIns="91425" bIns="91425" anchor="ctr" anchorCtr="0">
-              <a:noAutofit/>
-            </a:bodyPr>
-            <a:lstStyle/>
-            <a:p>
-              <a:pPr marL="0" lvl="0" indent="0" algn="l" rtl="0">
-                <a:spcBef>
-                  <a:spcPts val="0"/>
-                </a:spcBef>
-                <a:spcAft>
-                  <a:spcPts val="0"/>
-                </a:spcAft>
-                <a:buNone/>
-              </a:pPr>
-              <a:endParaRPr/>
-            </a:p>
-          </p:txBody>
-        </p:sp>
-        <p:sp>
-          <p:nvSpPr>
-            <p:cNvPr id="405" name="Google Shape;405;p33"/>
-            <p:cNvSpPr/>
-            <p:nvPr/>
-          </p:nvSpPr>
-          <p:spPr>
-            <a:xfrm>
-              <a:off x="8327175" y="2613550"/>
-              <a:ext cx="558550" cy="1147450"/>
-            </a:xfrm>
-            <a:custGeom>
-              <a:avLst/>
-              <a:gdLst/>
-              <a:ahLst/>
-              <a:cxnLst/>
-              <a:rect l="l" t="t" r="r" b="b"/>
-              <a:pathLst>
-                <a:path w="22342" h="45898" extrusionOk="0">
-                  <a:moveTo>
-                    <a:pt x="11186" y="45898"/>
-                  </a:moveTo>
-                  <a:cubicBezTo>
-                    <a:pt x="5016" y="45898"/>
-                    <a:pt x="0" y="35594"/>
-                    <a:pt x="0" y="22949"/>
-                  </a:cubicBezTo>
-                  <a:cubicBezTo>
-                    <a:pt x="0" y="10305"/>
-                    <a:pt x="5016" y="1"/>
-                    <a:pt x="11186" y="1"/>
-                  </a:cubicBezTo>
-                  <a:cubicBezTo>
-                    <a:pt x="17326" y="1"/>
-                    <a:pt x="22341" y="10305"/>
-                    <a:pt x="22341" y="22949"/>
-                  </a:cubicBezTo>
-                  <a:cubicBezTo>
-                    <a:pt x="22341" y="35594"/>
-                    <a:pt x="17326" y="45898"/>
-                    <a:pt x="11186" y="45898"/>
-                  </a:cubicBezTo>
-                  <a:close/>
-                  <a:moveTo>
-                    <a:pt x="11186" y="396"/>
-                  </a:moveTo>
-                  <a:cubicBezTo>
-                    <a:pt x="5259" y="396"/>
-                    <a:pt x="426" y="10487"/>
-                    <a:pt x="426" y="22949"/>
-                  </a:cubicBezTo>
-                  <a:cubicBezTo>
-                    <a:pt x="426" y="35381"/>
-                    <a:pt x="5259" y="45533"/>
-                    <a:pt x="11186" y="45533"/>
-                  </a:cubicBezTo>
-                  <a:cubicBezTo>
-                    <a:pt x="17113" y="45533"/>
-                    <a:pt x="21916" y="35411"/>
-                    <a:pt x="21916" y="22949"/>
-                  </a:cubicBezTo>
-                  <a:cubicBezTo>
-                    <a:pt x="21916" y="10517"/>
-                    <a:pt x="17113" y="396"/>
-                    <a:pt x="11186" y="396"/>
-                  </a:cubicBezTo>
-                  <a:close/>
-                </a:path>
-              </a:pathLst>
-            </a:custGeom>
-            <a:solidFill>
-              <a:schemeClr val="dk2"/>
-            </a:solidFill>
-            <a:ln w="9525" cap="flat" cmpd="sng">
-              <a:solidFill>
-                <a:schemeClr val="dk2"/>
-              </a:solidFill>
-              <a:prstDash val="solid"/>
-              <a:round/>
-              <a:headEnd type="none" w="sm" len="sm"/>
-              <a:tailEnd type="none" w="sm" len="sm"/>
-            </a:ln>
-          </p:spPr>
-          <p:txBody>
-            <a:bodyPr spcFirstLastPara="1" wrap="square" lIns="91425" tIns="91425" rIns="91425" bIns="91425" anchor="ctr" anchorCtr="0">
-              <a:noAutofit/>
-            </a:bodyPr>
-            <a:lstStyle/>
-            <a:p>
-              <a:pPr marL="0" lvl="0" indent="0" algn="l" rtl="0">
-                <a:spcBef>
-                  <a:spcPts val="0"/>
-                </a:spcBef>
-                <a:spcAft>
-                  <a:spcPts val="0"/>
-                </a:spcAft>
-                <a:buNone/>
-              </a:pPr>
-              <a:endParaRPr/>
-            </a:p>
-          </p:txBody>
-        </p:sp>
-        <p:sp>
-          <p:nvSpPr>
-            <p:cNvPr id="406" name="Google Shape;406;p33"/>
-            <p:cNvSpPr/>
-            <p:nvPr/>
-          </p:nvSpPr>
-          <p:spPr>
-            <a:xfrm>
-              <a:off x="8420625" y="2613550"/>
-              <a:ext cx="376950" cy="1147450"/>
-            </a:xfrm>
-            <a:custGeom>
-              <a:avLst/>
-              <a:gdLst/>
-              <a:ahLst/>
-              <a:cxnLst/>
-              <a:rect l="l" t="t" r="r" b="b"/>
-              <a:pathLst>
-                <a:path w="15078" h="45898" extrusionOk="0">
-                  <a:moveTo>
-                    <a:pt x="7509" y="45898"/>
-                  </a:moveTo>
-                  <a:cubicBezTo>
-                    <a:pt x="3284" y="45898"/>
-                    <a:pt x="1" y="35837"/>
-                    <a:pt x="1" y="22949"/>
-                  </a:cubicBezTo>
-                  <a:cubicBezTo>
-                    <a:pt x="1" y="10061"/>
-                    <a:pt x="3284" y="1"/>
-                    <a:pt x="7509" y="1"/>
-                  </a:cubicBezTo>
-                  <a:cubicBezTo>
-                    <a:pt x="11734" y="1"/>
-                    <a:pt x="15047" y="10061"/>
-                    <a:pt x="15047" y="22949"/>
-                  </a:cubicBezTo>
-                  <a:cubicBezTo>
-                    <a:pt x="15077" y="35837"/>
-                    <a:pt x="11734" y="45898"/>
-                    <a:pt x="7509" y="45898"/>
-                  </a:cubicBezTo>
-                  <a:close/>
-                  <a:moveTo>
-                    <a:pt x="7509" y="396"/>
-                  </a:moveTo>
-                  <a:cubicBezTo>
-                    <a:pt x="3557" y="396"/>
-                    <a:pt x="366" y="10487"/>
-                    <a:pt x="366" y="22949"/>
-                  </a:cubicBezTo>
-                  <a:cubicBezTo>
-                    <a:pt x="366" y="35381"/>
-                    <a:pt x="3557" y="45533"/>
-                    <a:pt x="7509" y="45533"/>
-                  </a:cubicBezTo>
-                  <a:cubicBezTo>
-                    <a:pt x="11460" y="45533"/>
-                    <a:pt x="14652" y="35411"/>
-                    <a:pt x="14652" y="22949"/>
-                  </a:cubicBezTo>
-                  <a:cubicBezTo>
-                    <a:pt x="14652" y="10517"/>
-                    <a:pt x="11460" y="396"/>
-                    <a:pt x="7509" y="396"/>
-                  </a:cubicBezTo>
-                  <a:close/>
-                </a:path>
-              </a:pathLst>
-            </a:custGeom>
-            <a:solidFill>
-              <a:schemeClr val="dk2"/>
-            </a:solidFill>
-            <a:ln w="9525" cap="flat" cmpd="sng">
-              <a:solidFill>
-                <a:schemeClr val="dk2"/>
-              </a:solidFill>
-              <a:prstDash val="solid"/>
-              <a:round/>
-              <a:headEnd type="none" w="sm" len="sm"/>
-              <a:tailEnd type="none" w="sm" len="sm"/>
-            </a:ln>
-          </p:spPr>
-          <p:txBody>
-            <a:bodyPr spcFirstLastPara="1" wrap="square" lIns="91425" tIns="91425" rIns="91425" bIns="91425" anchor="ctr" anchorCtr="0">
-              <a:noAutofit/>
-            </a:bodyPr>
-            <a:lstStyle/>
-            <a:p>
-              <a:pPr marL="0" lvl="0" indent="0" algn="l" rtl="0">
-                <a:spcBef>
-                  <a:spcPts val="0"/>
-                </a:spcBef>
-                <a:spcAft>
-                  <a:spcPts val="0"/>
-                </a:spcAft>
-                <a:buNone/>
-              </a:pPr>
-              <a:endParaRPr/>
-            </a:p>
-          </p:txBody>
-        </p:sp>
-        <p:sp>
-          <p:nvSpPr>
-            <p:cNvPr id="407" name="Google Shape;407;p33"/>
-            <p:cNvSpPr/>
-            <p:nvPr/>
-          </p:nvSpPr>
-          <p:spPr>
-            <a:xfrm>
-              <a:off x="8519425" y="2613550"/>
-              <a:ext cx="183925" cy="1147450"/>
-            </a:xfrm>
-            <a:custGeom>
-              <a:avLst/>
-              <a:gdLst/>
-              <a:ahLst/>
-              <a:cxnLst/>
-              <a:rect l="l" t="t" r="r" b="b"/>
-              <a:pathLst>
-                <a:path w="7357" h="45898" extrusionOk="0">
-                  <a:moveTo>
-                    <a:pt x="3678" y="45898"/>
-                  </a:moveTo>
-                  <a:cubicBezTo>
-                    <a:pt x="1277" y="45898"/>
-                    <a:pt x="0" y="34074"/>
-                    <a:pt x="0" y="22949"/>
-                  </a:cubicBezTo>
-                  <a:cubicBezTo>
-                    <a:pt x="0" y="11824"/>
-                    <a:pt x="1277" y="1"/>
-                    <a:pt x="3678" y="1"/>
-                  </a:cubicBezTo>
-                  <a:cubicBezTo>
-                    <a:pt x="6080" y="1"/>
-                    <a:pt x="7356" y="11824"/>
-                    <a:pt x="7356" y="22949"/>
-                  </a:cubicBezTo>
-                  <a:cubicBezTo>
-                    <a:pt x="7356" y="34074"/>
-                    <a:pt x="6019" y="45898"/>
-                    <a:pt x="3678" y="45898"/>
-                  </a:cubicBezTo>
-                  <a:close/>
-                  <a:moveTo>
-                    <a:pt x="3678" y="396"/>
-                  </a:moveTo>
-                  <a:cubicBezTo>
-                    <a:pt x="2128" y="396"/>
-                    <a:pt x="396" y="9666"/>
-                    <a:pt x="396" y="22949"/>
-                  </a:cubicBezTo>
-                  <a:cubicBezTo>
-                    <a:pt x="396" y="36262"/>
-                    <a:pt x="2158" y="45533"/>
-                    <a:pt x="3678" y="45533"/>
-                  </a:cubicBezTo>
-                  <a:cubicBezTo>
-                    <a:pt x="5198" y="45533"/>
-                    <a:pt x="6931" y="36262"/>
-                    <a:pt x="6931" y="22949"/>
-                  </a:cubicBezTo>
-                  <a:cubicBezTo>
-                    <a:pt x="6931" y="9666"/>
-                    <a:pt x="5198" y="396"/>
-                    <a:pt x="3678" y="396"/>
-                  </a:cubicBezTo>
-                  <a:close/>
-                </a:path>
-              </a:pathLst>
-            </a:custGeom>
-            <a:solidFill>
-              <a:schemeClr val="dk2"/>
-            </a:solidFill>
-            <a:ln w="9525" cap="flat" cmpd="sng">
-              <a:solidFill>
-                <a:schemeClr val="dk2"/>
-              </a:solidFill>
-              <a:prstDash val="solid"/>
-              <a:round/>
-              <a:headEnd type="none" w="sm" len="sm"/>
-              <a:tailEnd type="none" w="sm" len="sm"/>
-            </a:ln>
-          </p:spPr>
-          <p:txBody>
-            <a:bodyPr spcFirstLastPara="1" wrap="square" lIns="91425" tIns="91425" rIns="91425" bIns="91425" anchor="ctr" anchorCtr="0">
-              <a:noAutofit/>
-            </a:bodyPr>
-            <a:lstStyle/>
-            <a:p>
-              <a:pPr marL="0" lvl="0" indent="0" algn="l" rtl="0">
-                <a:spcBef>
-                  <a:spcPts val="0"/>
-                </a:spcBef>
-                <a:spcAft>
-                  <a:spcPts val="0"/>
-                </a:spcAft>
-                <a:buNone/>
-              </a:pPr>
-              <a:endParaRPr/>
-            </a:p>
-          </p:txBody>
-        </p:sp>
-        <p:sp>
-          <p:nvSpPr>
-            <p:cNvPr id="408" name="Google Shape;408;p33"/>
-            <p:cNvSpPr/>
-            <p:nvPr/>
-          </p:nvSpPr>
-          <p:spPr>
-            <a:xfrm>
-              <a:off x="8599200" y="2618100"/>
-              <a:ext cx="9150" cy="1138350"/>
-            </a:xfrm>
-            <a:custGeom>
-              <a:avLst/>
-              <a:gdLst/>
-              <a:ahLst/>
-              <a:cxnLst/>
-              <a:rect l="l" t="t" r="r" b="b"/>
-              <a:pathLst>
-                <a:path w="366" h="45534" extrusionOk="0">
-                  <a:moveTo>
-                    <a:pt x="1" y="1"/>
-                  </a:moveTo>
-                  <a:lnTo>
-                    <a:pt x="366" y="1"/>
-                  </a:lnTo>
-                  <a:lnTo>
-                    <a:pt x="366" y="45533"/>
-                  </a:lnTo>
-                  <a:lnTo>
-                    <a:pt x="1" y="45533"/>
-                  </a:lnTo>
-                  <a:close/>
-                </a:path>
-              </a:pathLst>
-            </a:custGeom>
-            <a:solidFill>
-              <a:schemeClr val="dk2"/>
-            </a:solidFill>
-            <a:ln w="9525" cap="flat" cmpd="sng">
-              <a:solidFill>
-                <a:schemeClr val="dk2"/>
-              </a:solidFill>
-              <a:prstDash val="solid"/>
-              <a:round/>
-              <a:headEnd type="none" w="sm" len="sm"/>
-              <a:tailEnd type="none" w="sm" len="sm"/>
-            </a:ln>
-          </p:spPr>
-          <p:txBody>
-            <a:bodyPr spcFirstLastPara="1" wrap="square" lIns="91425" tIns="91425" rIns="91425" bIns="91425" anchor="ctr" anchorCtr="0">
-              <a:noAutofit/>
-            </a:bodyPr>
-            <a:lstStyle/>
-            <a:p>
-              <a:pPr marL="0" lvl="0" indent="0" algn="l" rtl="0">
-                <a:spcBef>
-                  <a:spcPts val="0"/>
-                </a:spcBef>
-                <a:spcAft>
-                  <a:spcPts val="0"/>
-                </a:spcAft>
-                <a:buNone/>
-              </a:pPr>
-              <a:endParaRPr/>
-            </a:p>
-          </p:txBody>
-        </p:sp>
-        <p:sp>
-          <p:nvSpPr>
-            <p:cNvPr id="409" name="Google Shape;409;p33"/>
-            <p:cNvSpPr/>
-            <p:nvPr/>
-          </p:nvSpPr>
-          <p:spPr>
-            <a:xfrm>
-              <a:off x="8045250" y="3270100"/>
-              <a:ext cx="1116300" cy="9150"/>
-            </a:xfrm>
-            <a:custGeom>
-              <a:avLst/>
-              <a:gdLst/>
-              <a:ahLst/>
-              <a:cxnLst/>
-              <a:rect l="l" t="t" r="r" b="b"/>
-              <a:pathLst>
-                <a:path w="44652" h="366" extrusionOk="0">
-                  <a:moveTo>
-                    <a:pt x="0" y="0"/>
-                  </a:moveTo>
-                  <a:lnTo>
-                    <a:pt x="44652" y="0"/>
-                  </a:lnTo>
-                  <a:lnTo>
-                    <a:pt x="44652" y="365"/>
-                  </a:lnTo>
-                  <a:lnTo>
-                    <a:pt x="0" y="365"/>
-                  </a:lnTo>
-                  <a:close/>
-                </a:path>
-              </a:pathLst>
-            </a:custGeom>
-            <a:solidFill>
-              <a:schemeClr val="dk2"/>
-            </a:solidFill>
-            <a:ln w="9525" cap="flat" cmpd="sng">
-              <a:solidFill>
-                <a:schemeClr val="dk2"/>
-              </a:solidFill>
-              <a:prstDash val="solid"/>
-              <a:round/>
-              <a:headEnd type="none" w="sm" len="sm"/>
-              <a:tailEnd type="none" w="sm" len="sm"/>
-            </a:ln>
-          </p:spPr>
-          <p:txBody>
-            <a:bodyPr spcFirstLastPara="1" wrap="square" lIns="91425" tIns="91425" rIns="91425" bIns="91425" anchor="ctr" anchorCtr="0">
-              <a:noAutofit/>
-            </a:bodyPr>
-            <a:lstStyle/>
-            <a:p>
-              <a:pPr marL="0" lvl="0" indent="0" algn="l" rtl="0">
-                <a:spcBef>
-                  <a:spcPts val="0"/>
-                </a:spcBef>
-                <a:spcAft>
-                  <a:spcPts val="0"/>
-                </a:spcAft>
-                <a:buNone/>
-              </a:pPr>
-              <a:endParaRPr/>
-            </a:p>
-          </p:txBody>
-        </p:sp>
-        <p:sp>
-          <p:nvSpPr>
-            <p:cNvPr id="410" name="Google Shape;410;p33"/>
-            <p:cNvSpPr/>
-            <p:nvPr/>
-          </p:nvSpPr>
-          <p:spPr>
-            <a:xfrm>
-              <a:off x="8061200" y="3354450"/>
-              <a:ext cx="1086675" cy="9900"/>
-            </a:xfrm>
-            <a:custGeom>
-              <a:avLst/>
-              <a:gdLst/>
-              <a:ahLst/>
-              <a:cxnLst/>
-              <a:rect l="l" t="t" r="r" b="b"/>
-              <a:pathLst>
-                <a:path w="43467" h="396" extrusionOk="0">
-                  <a:moveTo>
-                    <a:pt x="1" y="0"/>
-                  </a:moveTo>
-                  <a:lnTo>
-                    <a:pt x="43467" y="0"/>
-                  </a:lnTo>
-                  <a:lnTo>
-                    <a:pt x="43467" y="395"/>
-                  </a:lnTo>
-                  <a:lnTo>
-                    <a:pt x="1" y="395"/>
-                  </a:lnTo>
-                  <a:close/>
-                </a:path>
-              </a:pathLst>
-            </a:custGeom>
-            <a:solidFill>
-              <a:schemeClr val="dk2"/>
-            </a:solidFill>
-            <a:ln w="9525" cap="flat" cmpd="sng">
-              <a:solidFill>
-                <a:schemeClr val="dk2"/>
-              </a:solidFill>
-              <a:prstDash val="solid"/>
-              <a:round/>
-              <a:headEnd type="none" w="sm" len="sm"/>
-              <a:tailEnd type="none" w="sm" len="sm"/>
-            </a:ln>
-          </p:spPr>
-          <p:txBody>
-            <a:bodyPr spcFirstLastPara="1" wrap="square" lIns="91425" tIns="91425" rIns="91425" bIns="91425" anchor="ctr" anchorCtr="0">
-              <a:noAutofit/>
-            </a:bodyPr>
-            <a:lstStyle/>
-            <a:p>
-              <a:pPr marL="0" lvl="0" indent="0" algn="l" rtl="0">
-                <a:spcBef>
-                  <a:spcPts val="0"/>
-                </a:spcBef>
-                <a:spcAft>
-                  <a:spcPts val="0"/>
-                </a:spcAft>
-                <a:buNone/>
-              </a:pPr>
-              <a:endParaRPr/>
-            </a:p>
-          </p:txBody>
-        </p:sp>
-        <p:sp>
-          <p:nvSpPr>
-            <p:cNvPr id="411" name="Google Shape;411;p33"/>
-            <p:cNvSpPr/>
-            <p:nvPr/>
-          </p:nvSpPr>
-          <p:spPr>
-            <a:xfrm>
-              <a:off x="8095400" y="3438800"/>
-              <a:ext cx="1014475" cy="9900"/>
-            </a:xfrm>
-            <a:custGeom>
-              <a:avLst/>
-              <a:gdLst/>
-              <a:ahLst/>
-              <a:cxnLst/>
-              <a:rect l="l" t="t" r="r" b="b"/>
-              <a:pathLst>
-                <a:path w="40579" h="396" extrusionOk="0">
-                  <a:moveTo>
-                    <a:pt x="1" y="0"/>
-                  </a:moveTo>
-                  <a:lnTo>
-                    <a:pt x="40579" y="0"/>
-                  </a:lnTo>
-                  <a:lnTo>
-                    <a:pt x="40579" y="395"/>
-                  </a:lnTo>
-                  <a:lnTo>
-                    <a:pt x="1" y="395"/>
-                  </a:lnTo>
-                  <a:close/>
-                </a:path>
-              </a:pathLst>
-            </a:custGeom>
-            <a:solidFill>
-              <a:schemeClr val="dk2"/>
-            </a:solidFill>
-            <a:ln w="9525" cap="flat" cmpd="sng">
-              <a:solidFill>
-                <a:schemeClr val="dk2"/>
-              </a:solidFill>
-              <a:prstDash val="solid"/>
-              <a:round/>
-              <a:headEnd type="none" w="sm" len="sm"/>
-              <a:tailEnd type="none" w="sm" len="sm"/>
-            </a:ln>
-          </p:spPr>
-          <p:txBody>
-            <a:bodyPr spcFirstLastPara="1" wrap="square" lIns="91425" tIns="91425" rIns="91425" bIns="91425" anchor="ctr" anchorCtr="0">
-              <a:noAutofit/>
-            </a:bodyPr>
-            <a:lstStyle/>
-            <a:p>
-              <a:pPr marL="0" lvl="0" indent="0" algn="l" rtl="0">
-                <a:spcBef>
-                  <a:spcPts val="0"/>
-                </a:spcBef>
-                <a:spcAft>
-                  <a:spcPts val="0"/>
-                </a:spcAft>
-                <a:buNone/>
-              </a:pPr>
-              <a:endParaRPr/>
-            </a:p>
-          </p:txBody>
-        </p:sp>
-        <p:sp>
-          <p:nvSpPr>
-            <p:cNvPr id="412" name="Google Shape;412;p33"/>
-            <p:cNvSpPr/>
-            <p:nvPr/>
-          </p:nvSpPr>
-          <p:spPr>
-            <a:xfrm>
-              <a:off x="8144025" y="3513250"/>
-              <a:ext cx="920275" cy="9150"/>
-            </a:xfrm>
-            <a:custGeom>
-              <a:avLst/>
-              <a:gdLst/>
-              <a:ahLst/>
-              <a:cxnLst/>
-              <a:rect l="l" t="t" r="r" b="b"/>
-              <a:pathLst>
-                <a:path w="36811" h="366" extrusionOk="0">
-                  <a:moveTo>
-                    <a:pt x="1" y="1"/>
-                  </a:moveTo>
-                  <a:lnTo>
-                    <a:pt x="36810" y="1"/>
-                  </a:lnTo>
-                  <a:lnTo>
-                    <a:pt x="36810" y="366"/>
-                  </a:lnTo>
-                  <a:lnTo>
-                    <a:pt x="1" y="366"/>
-                  </a:lnTo>
-                  <a:close/>
-                </a:path>
-              </a:pathLst>
-            </a:custGeom>
-            <a:solidFill>
-              <a:schemeClr val="dk2"/>
-            </a:solidFill>
-            <a:ln w="9525" cap="flat" cmpd="sng">
-              <a:solidFill>
-                <a:schemeClr val="dk2"/>
-              </a:solidFill>
-              <a:prstDash val="solid"/>
-              <a:round/>
-              <a:headEnd type="none" w="sm" len="sm"/>
-              <a:tailEnd type="none" w="sm" len="sm"/>
-            </a:ln>
-          </p:spPr>
-          <p:txBody>
-            <a:bodyPr spcFirstLastPara="1" wrap="square" lIns="91425" tIns="91425" rIns="91425" bIns="91425" anchor="ctr" anchorCtr="0">
-              <a:noAutofit/>
-            </a:bodyPr>
-            <a:lstStyle/>
-            <a:p>
-              <a:pPr marL="0" lvl="0" indent="0" algn="l" rtl="0">
-                <a:spcBef>
-                  <a:spcPts val="0"/>
-                </a:spcBef>
-                <a:spcAft>
-                  <a:spcPts val="0"/>
-                </a:spcAft>
-                <a:buNone/>
-              </a:pPr>
-              <a:endParaRPr/>
-            </a:p>
-          </p:txBody>
-        </p:sp>
-        <p:sp>
-          <p:nvSpPr>
-            <p:cNvPr id="413" name="Google Shape;413;p33"/>
-            <p:cNvSpPr/>
-            <p:nvPr/>
-          </p:nvSpPr>
-          <p:spPr>
-            <a:xfrm>
-              <a:off x="8201025" y="3581650"/>
-              <a:ext cx="804000" cy="9150"/>
-            </a:xfrm>
-            <a:custGeom>
-              <a:avLst/>
-              <a:gdLst/>
-              <a:ahLst/>
-              <a:cxnLst/>
-              <a:rect l="l" t="t" r="r" b="b"/>
-              <a:pathLst>
-                <a:path w="32160" h="366" extrusionOk="0">
-                  <a:moveTo>
-                    <a:pt x="1" y="0"/>
-                  </a:moveTo>
-                  <a:lnTo>
-                    <a:pt x="32159" y="0"/>
-                  </a:lnTo>
-                  <a:lnTo>
-                    <a:pt x="32159" y="365"/>
-                  </a:lnTo>
-                  <a:lnTo>
-                    <a:pt x="1" y="365"/>
-                  </a:lnTo>
-                  <a:close/>
-                </a:path>
-              </a:pathLst>
-            </a:custGeom>
-            <a:solidFill>
-              <a:schemeClr val="dk2"/>
-            </a:solidFill>
-            <a:ln w="9525" cap="flat" cmpd="sng">
-              <a:solidFill>
-                <a:schemeClr val="dk2"/>
-              </a:solidFill>
-              <a:prstDash val="solid"/>
-              <a:round/>
-              <a:headEnd type="none" w="sm" len="sm"/>
-              <a:tailEnd type="none" w="sm" len="sm"/>
-            </a:ln>
-          </p:spPr>
-          <p:txBody>
-            <a:bodyPr spcFirstLastPara="1" wrap="square" lIns="91425" tIns="91425" rIns="91425" bIns="91425" anchor="ctr" anchorCtr="0">
-              <a:noAutofit/>
-            </a:bodyPr>
-            <a:lstStyle/>
-            <a:p>
-              <a:pPr marL="0" lvl="0" indent="0" algn="l" rtl="0">
-                <a:spcBef>
-                  <a:spcPts val="0"/>
-                </a:spcBef>
-                <a:spcAft>
-                  <a:spcPts val="0"/>
-                </a:spcAft>
-                <a:buNone/>
-              </a:pPr>
-              <a:endParaRPr/>
-            </a:p>
-          </p:txBody>
-        </p:sp>
-        <p:sp>
-          <p:nvSpPr>
-            <p:cNvPr id="414" name="Google Shape;414;p33"/>
-            <p:cNvSpPr/>
-            <p:nvPr/>
-          </p:nvSpPr>
-          <p:spPr>
-            <a:xfrm>
-              <a:off x="8270925" y="3643200"/>
-              <a:ext cx="663425" cy="9900"/>
-            </a:xfrm>
-            <a:custGeom>
-              <a:avLst/>
-              <a:gdLst/>
-              <a:ahLst/>
-              <a:cxnLst/>
-              <a:rect l="l" t="t" r="r" b="b"/>
-              <a:pathLst>
-                <a:path w="26537" h="396" extrusionOk="0">
-                  <a:moveTo>
-                    <a:pt x="1" y="1"/>
-                  </a:moveTo>
-                  <a:lnTo>
-                    <a:pt x="26536" y="1"/>
-                  </a:lnTo>
-                  <a:lnTo>
-                    <a:pt x="26536" y="396"/>
-                  </a:lnTo>
-                  <a:lnTo>
-                    <a:pt x="1" y="396"/>
-                  </a:lnTo>
-                  <a:close/>
-                </a:path>
-              </a:pathLst>
-            </a:custGeom>
-            <a:solidFill>
-              <a:schemeClr val="dk2"/>
-            </a:solidFill>
-            <a:ln w="9525" cap="flat" cmpd="sng">
-              <a:solidFill>
-                <a:schemeClr val="dk2"/>
-              </a:solidFill>
-              <a:prstDash val="solid"/>
-              <a:round/>
-              <a:headEnd type="none" w="sm" len="sm"/>
-              <a:tailEnd type="none" w="sm" len="sm"/>
-            </a:ln>
-          </p:spPr>
-          <p:txBody>
-            <a:bodyPr spcFirstLastPara="1" wrap="square" lIns="91425" tIns="91425" rIns="91425" bIns="91425" anchor="ctr" anchorCtr="0">
-              <a:noAutofit/>
-            </a:bodyPr>
-            <a:lstStyle/>
-            <a:p>
-              <a:pPr marL="0" lvl="0" indent="0" algn="l" rtl="0">
-                <a:spcBef>
-                  <a:spcPts val="0"/>
-                </a:spcBef>
-                <a:spcAft>
-                  <a:spcPts val="0"/>
-                </a:spcAft>
-                <a:buNone/>
-              </a:pPr>
-              <a:endParaRPr/>
-            </a:p>
-          </p:txBody>
-        </p:sp>
-        <p:sp>
-          <p:nvSpPr>
-            <p:cNvPr id="415" name="Google Shape;415;p33"/>
-            <p:cNvSpPr/>
-            <p:nvPr/>
-          </p:nvSpPr>
-          <p:spPr>
-            <a:xfrm>
-              <a:off x="8349200" y="3691075"/>
-              <a:ext cx="509150" cy="9150"/>
-            </a:xfrm>
-            <a:custGeom>
-              <a:avLst/>
-              <a:gdLst/>
-              <a:ahLst/>
-              <a:cxnLst/>
-              <a:rect l="l" t="t" r="r" b="b"/>
-              <a:pathLst>
-                <a:path w="20366" h="366" extrusionOk="0">
-                  <a:moveTo>
-                    <a:pt x="1" y="0"/>
-                  </a:moveTo>
-                  <a:lnTo>
-                    <a:pt x="20366" y="0"/>
-                  </a:lnTo>
-                  <a:lnTo>
-                    <a:pt x="20366" y="365"/>
-                  </a:lnTo>
-                  <a:lnTo>
-                    <a:pt x="1" y="365"/>
-                  </a:lnTo>
-                  <a:close/>
-                </a:path>
-              </a:pathLst>
-            </a:custGeom>
-            <a:solidFill>
-              <a:schemeClr val="dk2"/>
-            </a:solidFill>
-            <a:ln w="9525" cap="flat" cmpd="sng">
-              <a:solidFill>
-                <a:schemeClr val="dk2"/>
-              </a:solidFill>
-              <a:prstDash val="solid"/>
-              <a:round/>
-              <a:headEnd type="none" w="sm" len="sm"/>
-              <a:tailEnd type="none" w="sm" len="sm"/>
-            </a:ln>
-          </p:spPr>
-          <p:txBody>
-            <a:bodyPr spcFirstLastPara="1" wrap="square" lIns="91425" tIns="91425" rIns="91425" bIns="91425" anchor="ctr" anchorCtr="0">
-              <a:noAutofit/>
-            </a:bodyPr>
-            <a:lstStyle/>
-            <a:p>
-              <a:pPr marL="0" lvl="0" indent="0" algn="l" rtl="0">
-                <a:spcBef>
-                  <a:spcPts val="0"/>
-                </a:spcBef>
-                <a:spcAft>
-                  <a:spcPts val="0"/>
-                </a:spcAft>
-                <a:buNone/>
-              </a:pPr>
-              <a:endParaRPr/>
-            </a:p>
-          </p:txBody>
-        </p:sp>
-        <p:sp>
-          <p:nvSpPr>
-            <p:cNvPr id="416" name="Google Shape;416;p33"/>
-            <p:cNvSpPr/>
-            <p:nvPr/>
-          </p:nvSpPr>
-          <p:spPr>
-            <a:xfrm>
-              <a:off x="8034600" y="3189550"/>
-              <a:ext cx="1140625" cy="9150"/>
-            </a:xfrm>
-            <a:custGeom>
-              <a:avLst/>
-              <a:gdLst/>
-              <a:ahLst/>
-              <a:cxnLst/>
-              <a:rect l="l" t="t" r="r" b="b"/>
-              <a:pathLst>
-                <a:path w="45625" h="366" extrusionOk="0">
-                  <a:moveTo>
-                    <a:pt x="1" y="0"/>
-                  </a:moveTo>
-                  <a:lnTo>
-                    <a:pt x="45625" y="0"/>
-                  </a:lnTo>
-                  <a:lnTo>
-                    <a:pt x="45625" y="365"/>
-                  </a:lnTo>
-                  <a:lnTo>
-                    <a:pt x="1" y="365"/>
-                  </a:lnTo>
-                  <a:close/>
-                </a:path>
-              </a:pathLst>
-            </a:custGeom>
-            <a:solidFill>
-              <a:schemeClr val="dk2"/>
-            </a:solidFill>
-            <a:ln w="9525" cap="flat" cmpd="sng">
-              <a:solidFill>
-                <a:schemeClr val="dk2"/>
-              </a:solidFill>
-              <a:prstDash val="solid"/>
-              <a:round/>
-              <a:headEnd type="none" w="sm" len="sm"/>
-              <a:tailEnd type="none" w="sm" len="sm"/>
-            </a:ln>
-          </p:spPr>
-          <p:txBody>
-            <a:bodyPr spcFirstLastPara="1" wrap="square" lIns="91425" tIns="91425" rIns="91425" bIns="91425" anchor="ctr" anchorCtr="0">
-              <a:noAutofit/>
-            </a:bodyPr>
-            <a:lstStyle/>
-            <a:p>
-              <a:pPr marL="0" lvl="0" indent="0" algn="l" rtl="0">
-                <a:spcBef>
-                  <a:spcPts val="0"/>
-                </a:spcBef>
-                <a:spcAft>
-                  <a:spcPts val="0"/>
-                </a:spcAft>
-                <a:buNone/>
-              </a:pPr>
-              <a:endParaRPr/>
-            </a:p>
-          </p:txBody>
-        </p:sp>
-        <p:sp>
-          <p:nvSpPr>
-            <p:cNvPr id="417" name="Google Shape;417;p33"/>
-            <p:cNvSpPr/>
-            <p:nvPr/>
-          </p:nvSpPr>
-          <p:spPr>
-            <a:xfrm>
-              <a:off x="8045250" y="3102150"/>
-              <a:ext cx="1116300" cy="9150"/>
-            </a:xfrm>
-            <a:custGeom>
-              <a:avLst/>
-              <a:gdLst/>
-              <a:ahLst/>
-              <a:cxnLst/>
-              <a:rect l="l" t="t" r="r" b="b"/>
-              <a:pathLst>
-                <a:path w="44652" h="366" extrusionOk="0">
-                  <a:moveTo>
-                    <a:pt x="0" y="1"/>
-                  </a:moveTo>
-                  <a:lnTo>
-                    <a:pt x="44652" y="1"/>
-                  </a:lnTo>
-                  <a:lnTo>
-                    <a:pt x="44652" y="366"/>
-                  </a:lnTo>
-                  <a:lnTo>
-                    <a:pt x="0" y="366"/>
-                  </a:lnTo>
-                  <a:close/>
-                </a:path>
-              </a:pathLst>
-            </a:custGeom>
-            <a:solidFill>
-              <a:schemeClr val="dk2"/>
-            </a:solidFill>
-            <a:ln w="9525" cap="flat" cmpd="sng">
-              <a:solidFill>
-                <a:schemeClr val="dk2"/>
-              </a:solidFill>
-              <a:prstDash val="solid"/>
-              <a:round/>
-              <a:headEnd type="none" w="sm" len="sm"/>
-              <a:tailEnd type="none" w="sm" len="sm"/>
-            </a:ln>
-          </p:spPr>
-          <p:txBody>
-            <a:bodyPr spcFirstLastPara="1" wrap="square" lIns="91425" tIns="91425" rIns="91425" bIns="91425" anchor="ctr" anchorCtr="0">
-              <a:noAutofit/>
-            </a:bodyPr>
-            <a:lstStyle/>
-            <a:p>
-              <a:pPr marL="0" lvl="0" indent="0" algn="l" rtl="0">
-                <a:spcBef>
-                  <a:spcPts val="0"/>
-                </a:spcBef>
-                <a:spcAft>
-                  <a:spcPts val="0"/>
-                </a:spcAft>
-                <a:buNone/>
-              </a:pPr>
-              <a:endParaRPr/>
-            </a:p>
-          </p:txBody>
-        </p:sp>
-        <p:sp>
-          <p:nvSpPr>
-            <p:cNvPr id="418" name="Google Shape;418;p33"/>
-            <p:cNvSpPr/>
-            <p:nvPr/>
-          </p:nvSpPr>
-          <p:spPr>
-            <a:xfrm>
-              <a:off x="8061200" y="3017050"/>
-              <a:ext cx="1086675" cy="9900"/>
-            </a:xfrm>
-            <a:custGeom>
-              <a:avLst/>
-              <a:gdLst/>
-              <a:ahLst/>
-              <a:cxnLst/>
-              <a:rect l="l" t="t" r="r" b="b"/>
-              <a:pathLst>
-                <a:path w="43467" h="396" extrusionOk="0">
-                  <a:moveTo>
-                    <a:pt x="1" y="1"/>
-                  </a:moveTo>
-                  <a:lnTo>
-                    <a:pt x="43467" y="1"/>
-                  </a:lnTo>
-                  <a:lnTo>
-                    <a:pt x="43467" y="396"/>
-                  </a:lnTo>
-                  <a:lnTo>
-                    <a:pt x="1" y="396"/>
-                  </a:lnTo>
-                  <a:close/>
-                </a:path>
-              </a:pathLst>
-            </a:custGeom>
-            <a:solidFill>
-              <a:schemeClr val="dk2"/>
-            </a:solidFill>
-            <a:ln w="9525" cap="flat" cmpd="sng">
-              <a:solidFill>
-                <a:schemeClr val="dk2"/>
-              </a:solidFill>
-              <a:prstDash val="solid"/>
-              <a:round/>
-              <a:headEnd type="none" w="sm" len="sm"/>
-              <a:tailEnd type="none" w="sm" len="sm"/>
-            </a:ln>
-          </p:spPr>
-          <p:txBody>
-            <a:bodyPr spcFirstLastPara="1" wrap="square" lIns="91425" tIns="91425" rIns="91425" bIns="91425" anchor="ctr" anchorCtr="0">
-              <a:noAutofit/>
-            </a:bodyPr>
-            <a:lstStyle/>
-            <a:p>
-              <a:pPr marL="0" lvl="0" indent="0" algn="l" rtl="0">
-                <a:spcBef>
-                  <a:spcPts val="0"/>
-                </a:spcBef>
-                <a:spcAft>
-                  <a:spcPts val="0"/>
-                </a:spcAft>
-                <a:buNone/>
-              </a:pPr>
-              <a:endParaRPr/>
-            </a:p>
-          </p:txBody>
-        </p:sp>
-        <p:sp>
-          <p:nvSpPr>
-            <p:cNvPr id="419" name="Google Shape;419;p33"/>
-            <p:cNvSpPr/>
-            <p:nvPr/>
-          </p:nvSpPr>
-          <p:spPr>
-            <a:xfrm>
-              <a:off x="8095400" y="2932700"/>
-              <a:ext cx="1014475" cy="9900"/>
-            </a:xfrm>
-            <a:custGeom>
-              <a:avLst/>
-              <a:gdLst/>
-              <a:ahLst/>
-              <a:cxnLst/>
-              <a:rect l="l" t="t" r="r" b="b"/>
-              <a:pathLst>
-                <a:path w="40579" h="396" extrusionOk="0">
-                  <a:moveTo>
-                    <a:pt x="1" y="1"/>
-                  </a:moveTo>
-                  <a:lnTo>
-                    <a:pt x="40579" y="1"/>
-                  </a:lnTo>
-                  <a:lnTo>
-                    <a:pt x="40579" y="396"/>
-                  </a:lnTo>
-                  <a:lnTo>
-                    <a:pt x="1" y="396"/>
-                  </a:lnTo>
-                  <a:close/>
-                </a:path>
-              </a:pathLst>
-            </a:custGeom>
-            <a:solidFill>
-              <a:schemeClr val="dk2"/>
-            </a:solidFill>
-            <a:ln w="9525" cap="flat" cmpd="sng">
-              <a:solidFill>
-                <a:schemeClr val="dk2"/>
-              </a:solidFill>
-              <a:prstDash val="solid"/>
-              <a:round/>
-              <a:headEnd type="none" w="sm" len="sm"/>
-              <a:tailEnd type="none" w="sm" len="sm"/>
-            </a:ln>
-          </p:spPr>
-          <p:txBody>
-            <a:bodyPr spcFirstLastPara="1" wrap="square" lIns="91425" tIns="91425" rIns="91425" bIns="91425" anchor="ctr" anchorCtr="0">
-              <a:noAutofit/>
-            </a:bodyPr>
-            <a:lstStyle/>
-            <a:p>
-              <a:pPr marL="0" lvl="0" indent="0" algn="l" rtl="0">
-                <a:spcBef>
-                  <a:spcPts val="0"/>
-                </a:spcBef>
-                <a:spcAft>
-                  <a:spcPts val="0"/>
-                </a:spcAft>
-                <a:buNone/>
-              </a:pPr>
-              <a:endParaRPr/>
-            </a:p>
-          </p:txBody>
-        </p:sp>
-        <p:sp>
-          <p:nvSpPr>
-            <p:cNvPr id="420" name="Google Shape;420;p33"/>
-            <p:cNvSpPr/>
-            <p:nvPr/>
-          </p:nvSpPr>
-          <p:spPr>
-            <a:xfrm>
-              <a:off x="8144025" y="2858225"/>
-              <a:ext cx="920275" cy="9925"/>
-            </a:xfrm>
-            <a:custGeom>
-              <a:avLst/>
-              <a:gdLst/>
-              <a:ahLst/>
-              <a:cxnLst/>
-              <a:rect l="l" t="t" r="r" b="b"/>
-              <a:pathLst>
-                <a:path w="36811" h="397" extrusionOk="0">
-                  <a:moveTo>
-                    <a:pt x="1" y="1"/>
-                  </a:moveTo>
-                  <a:lnTo>
-                    <a:pt x="36810" y="1"/>
-                  </a:lnTo>
-                  <a:lnTo>
-                    <a:pt x="36810" y="396"/>
-                  </a:lnTo>
-                  <a:lnTo>
-                    <a:pt x="1" y="396"/>
-                  </a:lnTo>
-                  <a:close/>
-                </a:path>
-              </a:pathLst>
-            </a:custGeom>
-            <a:solidFill>
-              <a:schemeClr val="dk2"/>
-            </a:solidFill>
-            <a:ln w="9525" cap="flat" cmpd="sng">
-              <a:solidFill>
-                <a:schemeClr val="dk2"/>
-              </a:solidFill>
-              <a:prstDash val="solid"/>
-              <a:round/>
-              <a:headEnd type="none" w="sm" len="sm"/>
-              <a:tailEnd type="none" w="sm" len="sm"/>
-            </a:ln>
-          </p:spPr>
-          <p:txBody>
-            <a:bodyPr spcFirstLastPara="1" wrap="square" lIns="91425" tIns="91425" rIns="91425" bIns="91425" anchor="ctr" anchorCtr="0">
-              <a:noAutofit/>
-            </a:bodyPr>
-            <a:lstStyle/>
-            <a:p>
-              <a:pPr marL="0" lvl="0" indent="0" algn="l" rtl="0">
-                <a:spcBef>
-                  <a:spcPts val="0"/>
-                </a:spcBef>
-                <a:spcAft>
-                  <a:spcPts val="0"/>
-                </a:spcAft>
-                <a:buNone/>
-              </a:pPr>
-              <a:endParaRPr/>
-            </a:p>
-          </p:txBody>
-        </p:sp>
-        <p:sp>
-          <p:nvSpPr>
-            <p:cNvPr id="421" name="Google Shape;421;p33"/>
-            <p:cNvSpPr/>
-            <p:nvPr/>
-          </p:nvSpPr>
-          <p:spPr>
-            <a:xfrm>
-              <a:off x="8201025" y="2789850"/>
-              <a:ext cx="804000" cy="9900"/>
-            </a:xfrm>
-            <a:custGeom>
-              <a:avLst/>
-              <a:gdLst/>
-              <a:ahLst/>
-              <a:cxnLst/>
-              <a:rect l="l" t="t" r="r" b="b"/>
-              <a:pathLst>
-                <a:path w="32160" h="396" extrusionOk="0">
-                  <a:moveTo>
-                    <a:pt x="1" y="0"/>
-                  </a:moveTo>
-                  <a:lnTo>
-                    <a:pt x="32159" y="0"/>
-                  </a:lnTo>
-                  <a:lnTo>
-                    <a:pt x="32159" y="395"/>
-                  </a:lnTo>
-                  <a:lnTo>
-                    <a:pt x="1" y="395"/>
-                  </a:lnTo>
-                  <a:close/>
-                </a:path>
-              </a:pathLst>
-            </a:custGeom>
-            <a:solidFill>
-              <a:schemeClr val="dk2"/>
-            </a:solidFill>
-            <a:ln w="9525" cap="flat" cmpd="sng">
-              <a:solidFill>
-                <a:schemeClr val="dk2"/>
-              </a:solidFill>
-              <a:prstDash val="solid"/>
-              <a:round/>
-              <a:headEnd type="none" w="sm" len="sm"/>
-              <a:tailEnd type="none" w="sm" len="sm"/>
-            </a:ln>
-          </p:spPr>
-          <p:txBody>
-            <a:bodyPr spcFirstLastPara="1" wrap="square" lIns="91425" tIns="91425" rIns="91425" bIns="91425" anchor="ctr" anchorCtr="0">
-              <a:noAutofit/>
-            </a:bodyPr>
-            <a:lstStyle/>
-            <a:p>
-              <a:pPr marL="0" lvl="0" indent="0" algn="l" rtl="0">
-                <a:spcBef>
-                  <a:spcPts val="0"/>
-                </a:spcBef>
-                <a:spcAft>
-                  <a:spcPts val="0"/>
-                </a:spcAft>
-                <a:buNone/>
-              </a:pPr>
-              <a:endParaRPr/>
-            </a:p>
-          </p:txBody>
-        </p:sp>
-        <p:sp>
-          <p:nvSpPr>
-            <p:cNvPr id="422" name="Google Shape;422;p33"/>
-            <p:cNvSpPr/>
-            <p:nvPr/>
-          </p:nvSpPr>
-          <p:spPr>
-            <a:xfrm>
-              <a:off x="8270925" y="2728300"/>
-              <a:ext cx="663425" cy="9900"/>
-            </a:xfrm>
-            <a:custGeom>
-              <a:avLst/>
-              <a:gdLst/>
-              <a:ahLst/>
-              <a:cxnLst/>
-              <a:rect l="l" t="t" r="r" b="b"/>
-              <a:pathLst>
-                <a:path w="26537" h="396" extrusionOk="0">
-                  <a:moveTo>
-                    <a:pt x="1" y="0"/>
-                  </a:moveTo>
-                  <a:lnTo>
-                    <a:pt x="26536" y="0"/>
-                  </a:lnTo>
-                  <a:lnTo>
-                    <a:pt x="26536" y="395"/>
-                  </a:lnTo>
-                  <a:lnTo>
-                    <a:pt x="1" y="395"/>
-                  </a:lnTo>
-                  <a:close/>
-                </a:path>
-              </a:pathLst>
-            </a:custGeom>
-            <a:solidFill>
-              <a:schemeClr val="dk2"/>
-            </a:solidFill>
-            <a:ln w="9525" cap="flat" cmpd="sng">
-              <a:solidFill>
-                <a:schemeClr val="dk2"/>
-              </a:solidFill>
-              <a:prstDash val="solid"/>
-              <a:round/>
-              <a:headEnd type="none" w="sm" len="sm"/>
-              <a:tailEnd type="none" w="sm" len="sm"/>
-            </a:ln>
-          </p:spPr>
-          <p:txBody>
-            <a:bodyPr spcFirstLastPara="1" wrap="square" lIns="91425" tIns="91425" rIns="91425" bIns="91425" anchor="ctr" anchorCtr="0">
-              <a:noAutofit/>
-            </a:bodyPr>
-            <a:lstStyle/>
-            <a:p>
-              <a:pPr marL="0" lvl="0" indent="0" algn="l" rtl="0">
-                <a:spcBef>
-                  <a:spcPts val="0"/>
-                </a:spcBef>
-                <a:spcAft>
-                  <a:spcPts val="0"/>
-                </a:spcAft>
-                <a:buNone/>
-              </a:pPr>
-              <a:endParaRPr/>
-            </a:p>
-          </p:txBody>
-        </p:sp>
-        <p:sp>
-          <p:nvSpPr>
-            <p:cNvPr id="423" name="Google Shape;423;p33"/>
-            <p:cNvSpPr/>
-            <p:nvPr/>
-          </p:nvSpPr>
-          <p:spPr>
-            <a:xfrm>
-              <a:off x="8349200" y="2681175"/>
-              <a:ext cx="509150" cy="9150"/>
-            </a:xfrm>
-            <a:custGeom>
-              <a:avLst/>
-              <a:gdLst/>
-              <a:ahLst/>
-              <a:cxnLst/>
-              <a:rect l="l" t="t" r="r" b="b"/>
-              <a:pathLst>
-                <a:path w="20366" h="366" extrusionOk="0">
-                  <a:moveTo>
-                    <a:pt x="1" y="1"/>
-                  </a:moveTo>
-                  <a:lnTo>
-                    <a:pt x="20366" y="1"/>
-                  </a:lnTo>
-                  <a:lnTo>
-                    <a:pt x="20366" y="365"/>
-                  </a:lnTo>
-                  <a:lnTo>
-                    <a:pt x="1" y="365"/>
-                  </a:lnTo>
-                  <a:close/>
-                </a:path>
-              </a:pathLst>
-            </a:custGeom>
-            <a:solidFill>
-              <a:schemeClr val="dk2"/>
-            </a:solidFill>
-            <a:ln w="9525" cap="flat" cmpd="sng">
-              <a:solidFill>
-                <a:schemeClr val="dk2"/>
-              </a:solidFill>
-              <a:prstDash val="solid"/>
-              <a:round/>
-              <a:headEnd type="none" w="sm" len="sm"/>
-              <a:tailEnd type="none" w="sm" len="sm"/>
-            </a:ln>
-          </p:spPr>
-          <p:txBody>
-            <a:bodyPr spcFirstLastPara="1" wrap="square" lIns="91425" tIns="91425" rIns="91425" bIns="91425" anchor="ctr" anchorCtr="0">
-              <a:noAutofit/>
-            </a:bodyPr>
-            <a:lstStyle/>
-            <a:p>
-              <a:pPr marL="0" lvl="0" indent="0" algn="l" rtl="0">
-                <a:spcBef>
-                  <a:spcPts val="0"/>
-                </a:spcBef>
-                <a:spcAft>
-                  <a:spcPts val="0"/>
-                </a:spcAft>
-                <a:buNone/>
-              </a:pPr>
-              <a:endParaRPr/>
-            </a:p>
-          </p:txBody>
-        </p:sp>
-      </p:grpSp>
-      <p:sp>
-        <p:nvSpPr>
-          <p:cNvPr id="424" name="Google Shape;424;p33"/>
-          <p:cNvSpPr/>
-          <p:nvPr/>
-        </p:nvSpPr>
-        <p:spPr>
-          <a:xfrm>
-            <a:off x="5216513" y="3898775"/>
-            <a:ext cx="301828" cy="338622"/>
-          </a:xfrm>
-          <a:custGeom>
-            <a:avLst/>
-            <a:gdLst/>
-            <a:ahLst/>
-            <a:cxnLst/>
-            <a:rect l="l" t="t" r="r" b="b"/>
-            <a:pathLst>
-              <a:path w="22575" h="25327" extrusionOk="0">
-                <a:moveTo>
-                  <a:pt x="10186" y="0"/>
-                </a:moveTo>
-                <a:lnTo>
-                  <a:pt x="8259" y="1927"/>
-                </a:lnTo>
-                <a:lnTo>
-                  <a:pt x="17344" y="11012"/>
-                </a:lnTo>
-                <a:lnTo>
-                  <a:pt x="0" y="11012"/>
-                </a:lnTo>
-                <a:lnTo>
-                  <a:pt x="0" y="13764"/>
-                </a:lnTo>
-                <a:lnTo>
-                  <a:pt x="17344" y="13764"/>
-                </a:lnTo>
-                <a:lnTo>
-                  <a:pt x="8259" y="23124"/>
-                </a:lnTo>
-                <a:lnTo>
-                  <a:pt x="10186" y="25327"/>
-                </a:lnTo>
-                <a:lnTo>
-                  <a:pt x="22574" y="12388"/>
-                </a:lnTo>
-                <a:lnTo>
-                  <a:pt x="10186" y="0"/>
-                </a:lnTo>
-                <a:close/>
-              </a:path>
-            </a:pathLst>
-          </a:custGeom>
-          <a:solidFill>
-            <a:schemeClr val="dk2"/>
-          </a:solidFill>
-          <a:ln>
-            <a:noFill/>
-          </a:ln>
-        </p:spPr>
-        <p:txBody>
-          <a:bodyPr spcFirstLastPara="1" wrap="square" lIns="91425" tIns="91425" rIns="91425" bIns="91425" anchor="ctr" anchorCtr="0">
-            <a:noAutofit/>
-          </a:bodyPr>
-          <a:lstStyle/>
-          <a:p>
-            <a:pPr marL="0" lvl="0" indent="0" algn="l" rtl="0">
-              <a:spcBef>
-                <a:spcPts val="0"/>
-              </a:spcBef>
-              <a:spcAft>
-                <a:spcPts val="0"/>
-              </a:spcAft>
-              <a:buNone/>
-            </a:pPr>
-            <a:endParaRPr/>
-          </a:p>
-        </p:txBody>
-      </p:sp>
-    </p:spTree>
-  </p:cSld>
-  <p:clrMapOvr>
-    <a:masterClrMapping/>
-  </p:clrMapOvr>
-</p:sldLayout>
-</file>
-
-<file path=ppt/slideLayouts/slideLayout11.xml><?xml version="1.0" encoding="utf-8"?>
 <p:sldLayout xmlns:a="http://schemas.openxmlformats.org/drawingml/2006/main" xmlns:r="http://schemas.openxmlformats.org/officeDocument/2006/relationships" xmlns:p="http://schemas.openxmlformats.org/presentationml/2006/main" matchingName="Background 2">
   <p:cSld name="CUSTOM_9_1_1">
     <p:bg>
@@ -8814,7 +6734,7 @@
 </p:sldLayout>
 </file>
 
-<file path=ppt/slideLayouts/slideLayout12.xml><?xml version="1.0" encoding="utf-8"?>
+<file path=ppt/slideLayouts/slideLayout11.xml><?xml version="1.0" encoding="utf-8"?>
 <p:sldLayout xmlns:a="http://schemas.openxmlformats.org/drawingml/2006/main" xmlns:r="http://schemas.openxmlformats.org/officeDocument/2006/relationships" xmlns:p="http://schemas.openxmlformats.org/presentationml/2006/main" preserve="1" userDrawn="1">
   <p:cSld name="Title Slide">
     <p:spTree>
@@ -11542,614 +9462,6 @@
 </file>
 
 <file path=ppt/slideLayouts/slideLayout7.xml><?xml version="1.0" encoding="utf-8"?>
-<p:sldLayout xmlns:a="http://schemas.openxmlformats.org/drawingml/2006/main" xmlns:r="http://schemas.openxmlformats.org/officeDocument/2006/relationships" xmlns:p="http://schemas.openxmlformats.org/presentationml/2006/main" matchingName="Title and text 3">
-  <p:cSld name="CUSTOM_4_1">
-    <p:spTree>
-      <p:nvGrpSpPr>
-        <p:cNvPr id="1" name="Shape 189"/>
-        <p:cNvGrpSpPr/>
-        <p:nvPr/>
-      </p:nvGrpSpPr>
-      <p:grpSpPr>
-        <a:xfrm>
-          <a:off x="0" y="0"/>
-          <a:ext cx="0" cy="0"/>
-          <a:chOff x="0" y="0"/>
-          <a:chExt cx="0" cy="0"/>
-        </a:xfrm>
-      </p:grpSpPr>
-      <p:sp>
-        <p:nvSpPr>
-          <p:cNvPr id="190" name="Google Shape;190;p20"/>
-          <p:cNvSpPr txBox="1">
-            <a:spLocks noGrp="1"/>
-          </p:cNvSpPr>
-          <p:nvPr>
-            <p:ph type="title"/>
-          </p:nvPr>
-        </p:nvSpPr>
-        <p:spPr>
-          <a:xfrm>
-            <a:off x="4615223" y="2205483"/>
-            <a:ext cx="3267900" cy="603600"/>
-          </a:xfrm>
-          <a:prstGeom prst="rect">
-            <a:avLst/>
-          </a:prstGeom>
-          <a:ln w="28575" cap="flat" cmpd="sng">
-            <a:solidFill>
-              <a:schemeClr val="lt1"/>
-            </a:solidFill>
-            <a:prstDash val="solid"/>
-            <a:round/>
-            <a:headEnd type="none" w="sm" len="sm"/>
-            <a:tailEnd type="none" w="sm" len="sm"/>
-          </a:ln>
-        </p:spPr>
-        <p:txBody>
-          <a:bodyPr spcFirstLastPara="1" wrap="square" lIns="91425" tIns="91425" rIns="91425" bIns="91425" anchor="ctr" anchorCtr="0">
-            <a:noAutofit/>
-          </a:bodyPr>
-          <a:lstStyle>
-            <a:lvl1pPr lvl="0" algn="l" rtl="0">
-              <a:spcBef>
-                <a:spcPts val="0"/>
-              </a:spcBef>
-              <a:spcAft>
-                <a:spcPts val="0"/>
-              </a:spcAft>
-              <a:buSzPts val="3200"/>
-              <a:buNone/>
-              <a:defRPr/>
-            </a:lvl1pPr>
-            <a:lvl2pPr lvl="1" rtl="0">
-              <a:spcBef>
-                <a:spcPts val="0"/>
-              </a:spcBef>
-              <a:spcAft>
-                <a:spcPts val="0"/>
-              </a:spcAft>
-              <a:buSzPts val="3500"/>
-              <a:buNone/>
-              <a:defRPr/>
-            </a:lvl2pPr>
-            <a:lvl3pPr lvl="2" rtl="0">
-              <a:spcBef>
-                <a:spcPts val="0"/>
-              </a:spcBef>
-              <a:spcAft>
-                <a:spcPts val="0"/>
-              </a:spcAft>
-              <a:buSzPts val="3500"/>
-              <a:buNone/>
-              <a:defRPr/>
-            </a:lvl3pPr>
-            <a:lvl4pPr lvl="3" rtl="0">
-              <a:spcBef>
-                <a:spcPts val="0"/>
-              </a:spcBef>
-              <a:spcAft>
-                <a:spcPts val="0"/>
-              </a:spcAft>
-              <a:buSzPts val="3500"/>
-              <a:buNone/>
-              <a:defRPr/>
-            </a:lvl4pPr>
-            <a:lvl5pPr lvl="4" rtl="0">
-              <a:spcBef>
-                <a:spcPts val="0"/>
-              </a:spcBef>
-              <a:spcAft>
-                <a:spcPts val="0"/>
-              </a:spcAft>
-              <a:buSzPts val="3500"/>
-              <a:buNone/>
-              <a:defRPr/>
-            </a:lvl5pPr>
-            <a:lvl6pPr lvl="5" rtl="0">
-              <a:spcBef>
-                <a:spcPts val="0"/>
-              </a:spcBef>
-              <a:spcAft>
-                <a:spcPts val="0"/>
-              </a:spcAft>
-              <a:buSzPts val="3500"/>
-              <a:buNone/>
-              <a:defRPr/>
-            </a:lvl6pPr>
-            <a:lvl7pPr lvl="6" rtl="0">
-              <a:spcBef>
-                <a:spcPts val="0"/>
-              </a:spcBef>
-              <a:spcAft>
-                <a:spcPts val="0"/>
-              </a:spcAft>
-              <a:buSzPts val="3500"/>
-              <a:buNone/>
-              <a:defRPr/>
-            </a:lvl7pPr>
-            <a:lvl8pPr lvl="7" rtl="0">
-              <a:spcBef>
-                <a:spcPts val="0"/>
-              </a:spcBef>
-              <a:spcAft>
-                <a:spcPts val="0"/>
-              </a:spcAft>
-              <a:buSzPts val="3500"/>
-              <a:buNone/>
-              <a:defRPr/>
-            </a:lvl8pPr>
-            <a:lvl9pPr lvl="8" rtl="0">
-              <a:spcBef>
-                <a:spcPts val="0"/>
-              </a:spcBef>
-              <a:spcAft>
-                <a:spcPts val="0"/>
-              </a:spcAft>
-              <a:buSzPts val="3500"/>
-              <a:buNone/>
-              <a:defRPr/>
-            </a:lvl9pPr>
-          </a:lstStyle>
-          <a:p>
-            <a:endParaRPr/>
-          </a:p>
-        </p:txBody>
-      </p:sp>
-      <p:sp>
-        <p:nvSpPr>
-          <p:cNvPr id="191" name="Google Shape;191;p20"/>
-          <p:cNvSpPr txBox="1">
-            <a:spLocks noGrp="1"/>
-          </p:cNvSpPr>
-          <p:nvPr>
-            <p:ph type="subTitle" idx="1"/>
-          </p:nvPr>
-        </p:nvSpPr>
-        <p:spPr>
-          <a:xfrm>
-            <a:off x="4615223" y="2809083"/>
-            <a:ext cx="3267900" cy="1158300"/>
-          </a:xfrm>
-          <a:prstGeom prst="rect">
-            <a:avLst/>
-          </a:prstGeom>
-          <a:ln w="28575" cap="flat" cmpd="sng">
-            <a:solidFill>
-              <a:schemeClr val="lt1"/>
-            </a:solidFill>
-            <a:prstDash val="solid"/>
-            <a:round/>
-            <a:headEnd type="none" w="sm" len="sm"/>
-            <a:tailEnd type="none" w="sm" len="sm"/>
-          </a:ln>
-        </p:spPr>
-        <p:txBody>
-          <a:bodyPr spcFirstLastPara="1" wrap="square" lIns="91425" tIns="91425" rIns="91425" bIns="91425" anchor="ctr" anchorCtr="0">
-            <a:noAutofit/>
-          </a:bodyPr>
-          <a:lstStyle>
-            <a:lvl1pPr lvl="0" rtl="0">
-              <a:lnSpc>
-                <a:spcPct val="100000"/>
-              </a:lnSpc>
-              <a:spcBef>
-                <a:spcPts val="0"/>
-              </a:spcBef>
-              <a:spcAft>
-                <a:spcPts val="0"/>
-              </a:spcAft>
-              <a:buSzPts val="1400"/>
-              <a:buNone/>
-              <a:defRPr/>
-            </a:lvl1pPr>
-            <a:lvl2pPr lvl="1" algn="ctr" rtl="0">
-              <a:lnSpc>
-                <a:spcPct val="100000"/>
-              </a:lnSpc>
-              <a:spcBef>
-                <a:spcPts val="0"/>
-              </a:spcBef>
-              <a:spcAft>
-                <a:spcPts val="0"/>
-              </a:spcAft>
-              <a:buSzPts val="1400"/>
-              <a:buNone/>
-              <a:defRPr/>
-            </a:lvl2pPr>
-            <a:lvl3pPr lvl="2" algn="ctr" rtl="0">
-              <a:lnSpc>
-                <a:spcPct val="100000"/>
-              </a:lnSpc>
-              <a:spcBef>
-                <a:spcPts val="0"/>
-              </a:spcBef>
-              <a:spcAft>
-                <a:spcPts val="0"/>
-              </a:spcAft>
-              <a:buSzPts val="1400"/>
-              <a:buNone/>
-              <a:defRPr/>
-            </a:lvl3pPr>
-            <a:lvl4pPr lvl="3" algn="ctr" rtl="0">
-              <a:lnSpc>
-                <a:spcPct val="100000"/>
-              </a:lnSpc>
-              <a:spcBef>
-                <a:spcPts val="0"/>
-              </a:spcBef>
-              <a:spcAft>
-                <a:spcPts val="0"/>
-              </a:spcAft>
-              <a:buSzPts val="1400"/>
-              <a:buNone/>
-              <a:defRPr/>
-            </a:lvl4pPr>
-            <a:lvl5pPr lvl="4" algn="ctr" rtl="0">
-              <a:lnSpc>
-                <a:spcPct val="100000"/>
-              </a:lnSpc>
-              <a:spcBef>
-                <a:spcPts val="0"/>
-              </a:spcBef>
-              <a:spcAft>
-                <a:spcPts val="0"/>
-              </a:spcAft>
-              <a:buSzPts val="1400"/>
-              <a:buNone/>
-              <a:defRPr/>
-            </a:lvl5pPr>
-            <a:lvl6pPr lvl="5" algn="ctr" rtl="0">
-              <a:lnSpc>
-                <a:spcPct val="100000"/>
-              </a:lnSpc>
-              <a:spcBef>
-                <a:spcPts val="0"/>
-              </a:spcBef>
-              <a:spcAft>
-                <a:spcPts val="0"/>
-              </a:spcAft>
-              <a:buSzPts val="1400"/>
-              <a:buNone/>
-              <a:defRPr/>
-            </a:lvl6pPr>
-            <a:lvl7pPr lvl="6" algn="ctr" rtl="0">
-              <a:lnSpc>
-                <a:spcPct val="100000"/>
-              </a:lnSpc>
-              <a:spcBef>
-                <a:spcPts val="0"/>
-              </a:spcBef>
-              <a:spcAft>
-                <a:spcPts val="0"/>
-              </a:spcAft>
-              <a:buSzPts val="1400"/>
-              <a:buNone/>
-              <a:defRPr/>
-            </a:lvl7pPr>
-            <a:lvl8pPr lvl="7" algn="ctr" rtl="0">
-              <a:lnSpc>
-                <a:spcPct val="100000"/>
-              </a:lnSpc>
-              <a:spcBef>
-                <a:spcPts val="0"/>
-              </a:spcBef>
-              <a:spcAft>
-                <a:spcPts val="0"/>
-              </a:spcAft>
-              <a:buSzPts val="1400"/>
-              <a:buNone/>
-              <a:defRPr/>
-            </a:lvl8pPr>
-            <a:lvl9pPr lvl="8" algn="ctr" rtl="0">
-              <a:lnSpc>
-                <a:spcPct val="100000"/>
-              </a:lnSpc>
-              <a:spcBef>
-                <a:spcPts val="0"/>
-              </a:spcBef>
-              <a:spcAft>
-                <a:spcPts val="0"/>
-              </a:spcAft>
-              <a:buSzPts val="1400"/>
-              <a:buNone/>
-              <a:defRPr/>
-            </a:lvl9pPr>
-          </a:lstStyle>
-          <a:p>
-            <a:endParaRPr/>
-          </a:p>
-        </p:txBody>
-      </p:sp>
-      <p:grpSp>
-        <p:nvGrpSpPr>
-          <p:cNvPr id="192" name="Google Shape;192;p20"/>
-          <p:cNvGrpSpPr/>
-          <p:nvPr/>
-        </p:nvGrpSpPr>
-        <p:grpSpPr>
-          <a:xfrm>
-            <a:off x="338575" y="238644"/>
-            <a:ext cx="8457300" cy="4666200"/>
-            <a:chOff x="338575" y="238644"/>
-            <a:chExt cx="8457300" cy="4666200"/>
-          </a:xfrm>
-        </p:grpSpPr>
-        <p:sp>
-          <p:nvSpPr>
-            <p:cNvPr id="193" name="Google Shape;193;p20"/>
-            <p:cNvSpPr/>
-            <p:nvPr/>
-          </p:nvSpPr>
-          <p:spPr>
-            <a:xfrm>
-              <a:off x="351128" y="238644"/>
-              <a:ext cx="8430000" cy="4666200"/>
-            </a:xfrm>
-            <a:prstGeom prst="roundRect">
-              <a:avLst>
-                <a:gd name="adj" fmla="val 4973"/>
-              </a:avLst>
-            </a:prstGeom>
-            <a:noFill/>
-            <a:ln w="28575" cap="flat" cmpd="sng">
-              <a:solidFill>
-                <a:schemeClr val="lt2"/>
-              </a:solidFill>
-              <a:prstDash val="solid"/>
-              <a:round/>
-              <a:headEnd type="none" w="sm" len="sm"/>
-              <a:tailEnd type="none" w="sm" len="sm"/>
-            </a:ln>
-          </p:spPr>
-          <p:txBody>
-            <a:bodyPr spcFirstLastPara="1" wrap="square" lIns="91425" tIns="91425" rIns="91425" bIns="91425" anchor="ctr" anchorCtr="0">
-              <a:noAutofit/>
-            </a:bodyPr>
-            <a:lstStyle/>
-            <a:p>
-              <a:pPr marL="0" lvl="0" indent="0" algn="l" rtl="0">
-                <a:spcBef>
-                  <a:spcPts val="0"/>
-                </a:spcBef>
-                <a:spcAft>
-                  <a:spcPts val="0"/>
-                </a:spcAft>
-                <a:buNone/>
-              </a:pPr>
-              <a:endParaRPr/>
-            </a:p>
-          </p:txBody>
-        </p:sp>
-        <p:cxnSp>
-          <p:nvCxnSpPr>
-            <p:cNvPr id="194" name="Google Shape;194;p20"/>
-            <p:cNvCxnSpPr/>
-            <p:nvPr/>
-          </p:nvCxnSpPr>
-          <p:spPr>
-            <a:xfrm>
-              <a:off x="338575" y="972500"/>
-              <a:ext cx="8457300" cy="0"/>
-            </a:xfrm>
-            <a:prstGeom prst="straightConnector1">
-              <a:avLst/>
-            </a:prstGeom>
-            <a:noFill/>
-            <a:ln w="28575" cap="flat" cmpd="sng">
-              <a:solidFill>
-                <a:schemeClr val="lt2"/>
-              </a:solidFill>
-              <a:prstDash val="solid"/>
-              <a:round/>
-              <a:headEnd type="none" w="med" len="med"/>
-              <a:tailEnd type="none" w="med" len="med"/>
-            </a:ln>
-          </p:spPr>
-        </p:cxnSp>
-      </p:grpSp>
-      <p:grpSp>
-        <p:nvGrpSpPr>
-          <p:cNvPr id="195" name="Google Shape;195;p20"/>
-          <p:cNvGrpSpPr/>
-          <p:nvPr/>
-        </p:nvGrpSpPr>
-        <p:grpSpPr>
-          <a:xfrm>
-            <a:off x="713100" y="445025"/>
-            <a:ext cx="590726" cy="108000"/>
-            <a:chOff x="713175" y="723975"/>
-            <a:chExt cx="590726" cy="108000"/>
-          </a:xfrm>
-        </p:grpSpPr>
-        <p:sp>
-          <p:nvSpPr>
-            <p:cNvPr id="196" name="Google Shape;196;p20"/>
-            <p:cNvSpPr/>
-            <p:nvPr/>
-          </p:nvSpPr>
-          <p:spPr>
-            <a:xfrm>
-              <a:off x="713175" y="723975"/>
-              <a:ext cx="108000" cy="108000"/>
-            </a:xfrm>
-            <a:prstGeom prst="rect">
-              <a:avLst/>
-            </a:prstGeom>
-            <a:solidFill>
-              <a:schemeClr val="lt2"/>
-            </a:solidFill>
-            <a:ln w="19050" cap="flat" cmpd="sng">
-              <a:solidFill>
-                <a:schemeClr val="lt2"/>
-              </a:solidFill>
-              <a:prstDash val="solid"/>
-              <a:round/>
-              <a:headEnd type="none" w="sm" len="sm"/>
-              <a:tailEnd type="none" w="sm" len="sm"/>
-            </a:ln>
-          </p:spPr>
-          <p:txBody>
-            <a:bodyPr spcFirstLastPara="1" wrap="square" lIns="91425" tIns="91425" rIns="91425" bIns="91425" anchor="ctr" anchorCtr="0">
-              <a:noAutofit/>
-            </a:bodyPr>
-            <a:lstStyle/>
-            <a:p>
-              <a:pPr marL="0" lvl="0" indent="0" algn="l" rtl="0">
-                <a:spcBef>
-                  <a:spcPts val="0"/>
-                </a:spcBef>
-                <a:spcAft>
-                  <a:spcPts val="0"/>
-                </a:spcAft>
-                <a:buNone/>
-              </a:pPr>
-              <a:endParaRPr/>
-            </a:p>
-          </p:txBody>
-        </p:sp>
-        <p:sp>
-          <p:nvSpPr>
-            <p:cNvPr id="197" name="Google Shape;197;p20"/>
-            <p:cNvSpPr/>
-            <p:nvPr/>
-          </p:nvSpPr>
-          <p:spPr>
-            <a:xfrm>
-              <a:off x="874084" y="723975"/>
-              <a:ext cx="108000" cy="108000"/>
-            </a:xfrm>
-            <a:prstGeom prst="rect">
-              <a:avLst/>
-            </a:prstGeom>
-            <a:noFill/>
-            <a:ln w="19050" cap="flat" cmpd="sng">
-              <a:solidFill>
-                <a:schemeClr val="lt2"/>
-              </a:solidFill>
-              <a:prstDash val="solid"/>
-              <a:round/>
-              <a:headEnd type="none" w="sm" len="sm"/>
-              <a:tailEnd type="none" w="sm" len="sm"/>
-            </a:ln>
-          </p:spPr>
-          <p:txBody>
-            <a:bodyPr spcFirstLastPara="1" wrap="square" lIns="91425" tIns="91425" rIns="91425" bIns="91425" anchor="ctr" anchorCtr="0">
-              <a:noAutofit/>
-            </a:bodyPr>
-            <a:lstStyle/>
-            <a:p>
-              <a:pPr marL="0" lvl="0" indent="0" algn="l" rtl="0">
-                <a:spcBef>
-                  <a:spcPts val="0"/>
-                </a:spcBef>
-                <a:spcAft>
-                  <a:spcPts val="0"/>
-                </a:spcAft>
-                <a:buNone/>
-              </a:pPr>
-              <a:endParaRPr/>
-            </a:p>
-          </p:txBody>
-        </p:sp>
-        <p:sp>
-          <p:nvSpPr>
-            <p:cNvPr id="198" name="Google Shape;198;p20"/>
-            <p:cNvSpPr/>
-            <p:nvPr/>
-          </p:nvSpPr>
-          <p:spPr>
-            <a:xfrm>
-              <a:off x="1034992" y="723975"/>
-              <a:ext cx="108000" cy="108000"/>
-            </a:xfrm>
-            <a:prstGeom prst="rect">
-              <a:avLst/>
-            </a:prstGeom>
-            <a:noFill/>
-            <a:ln w="19050" cap="flat" cmpd="sng">
-              <a:solidFill>
-                <a:schemeClr val="lt2"/>
-              </a:solidFill>
-              <a:prstDash val="solid"/>
-              <a:round/>
-              <a:headEnd type="none" w="sm" len="sm"/>
-              <a:tailEnd type="none" w="sm" len="sm"/>
-            </a:ln>
-          </p:spPr>
-          <p:txBody>
-            <a:bodyPr spcFirstLastPara="1" wrap="square" lIns="91425" tIns="91425" rIns="91425" bIns="91425" anchor="ctr" anchorCtr="0">
-              <a:noAutofit/>
-            </a:bodyPr>
-            <a:lstStyle/>
-            <a:p>
-              <a:pPr marL="0" lvl="0" indent="0" algn="l" rtl="0">
-                <a:spcBef>
-                  <a:spcPts val="0"/>
-                </a:spcBef>
-                <a:spcAft>
-                  <a:spcPts val="0"/>
-                </a:spcAft>
-                <a:buNone/>
-              </a:pPr>
-              <a:endParaRPr/>
-            </a:p>
-          </p:txBody>
-        </p:sp>
-        <p:sp>
-          <p:nvSpPr>
-            <p:cNvPr id="199" name="Google Shape;199;p20"/>
-            <p:cNvSpPr/>
-            <p:nvPr/>
-          </p:nvSpPr>
-          <p:spPr>
-            <a:xfrm>
-              <a:off x="1195901" y="723975"/>
-              <a:ext cx="108000" cy="108000"/>
-            </a:xfrm>
-            <a:prstGeom prst="rect">
-              <a:avLst/>
-            </a:prstGeom>
-            <a:noFill/>
-            <a:ln w="19050" cap="flat" cmpd="sng">
-              <a:solidFill>
-                <a:schemeClr val="lt2"/>
-              </a:solidFill>
-              <a:prstDash val="solid"/>
-              <a:round/>
-              <a:headEnd type="none" w="sm" len="sm"/>
-              <a:tailEnd type="none" w="sm" len="sm"/>
-            </a:ln>
-          </p:spPr>
-          <p:txBody>
-            <a:bodyPr spcFirstLastPara="1" wrap="square" lIns="91425" tIns="91425" rIns="91425" bIns="91425" anchor="ctr" anchorCtr="0">
-              <a:noAutofit/>
-            </a:bodyPr>
-            <a:lstStyle/>
-            <a:p>
-              <a:pPr marL="0" lvl="0" indent="0" algn="l" rtl="0">
-                <a:spcBef>
-                  <a:spcPts val="0"/>
-                </a:spcBef>
-                <a:spcAft>
-                  <a:spcPts val="0"/>
-                </a:spcAft>
-                <a:buNone/>
-              </a:pPr>
-              <a:endParaRPr/>
-            </a:p>
-          </p:txBody>
-        </p:sp>
-      </p:grpSp>
-    </p:spTree>
-  </p:cSld>
-  <p:clrMapOvr>
-    <a:masterClrMapping/>
-  </p:clrMapOvr>
-</p:sldLayout>
-</file>
-
-<file path=ppt/slideLayouts/slideLayout8.xml><?xml version="1.0" encoding="utf-8"?>
 <p:sldLayout xmlns:a="http://schemas.openxmlformats.org/drawingml/2006/main" xmlns:r="http://schemas.openxmlformats.org/officeDocument/2006/relationships" xmlns:p="http://schemas.openxmlformats.org/presentationml/2006/main" matchingName="Title and text 5">
   <p:cSld name="CUSTOM_4_1_1_1">
     <p:spTree>
@@ -12748,7 +10060,7 @@
 </p:sldLayout>
 </file>
 
-<file path=ppt/slideLayouts/slideLayout9.xml><?xml version="1.0" encoding="utf-8"?>
+<file path=ppt/slideLayouts/slideLayout8.xml><?xml version="1.0" encoding="utf-8"?>
 <p:sldLayout xmlns:a="http://schemas.openxmlformats.org/drawingml/2006/main" xmlns:r="http://schemas.openxmlformats.org/officeDocument/2006/relationships" xmlns:p="http://schemas.openxmlformats.org/presentationml/2006/main" matchingName="Background">
   <p:cSld name="CUSTOM_9">
     <p:spTree>
@@ -15118,6 +12430,2085 @@
 </p:sldLayout>
 </file>
 
+<file path=ppt/slideLayouts/slideLayout9.xml><?xml version="1.0" encoding="utf-8"?>
+<p:sldLayout xmlns:a="http://schemas.openxmlformats.org/drawingml/2006/main" xmlns:r="http://schemas.openxmlformats.org/officeDocument/2006/relationships" xmlns:p="http://schemas.openxmlformats.org/presentationml/2006/main" matchingName="Background 1">
+  <p:cSld name="CUSTOM_9_1">
+    <p:spTree>
+      <p:nvGrpSpPr>
+        <p:cNvPr id="1" name="Shape 393"/>
+        <p:cNvGrpSpPr/>
+        <p:nvPr/>
+      </p:nvGrpSpPr>
+      <p:grpSpPr>
+        <a:xfrm>
+          <a:off x="0" y="0"/>
+          <a:ext cx="0" cy="0"/>
+          <a:chOff x="0" y="0"/>
+          <a:chExt cx="0" cy="0"/>
+        </a:xfrm>
+      </p:grpSpPr>
+      <p:grpSp>
+        <p:nvGrpSpPr>
+          <p:cNvPr id="394" name="Google Shape;394;p33"/>
+          <p:cNvGrpSpPr/>
+          <p:nvPr/>
+        </p:nvGrpSpPr>
+        <p:grpSpPr>
+          <a:xfrm>
+            <a:off x="351128" y="228595"/>
+            <a:ext cx="8430000" cy="4686251"/>
+            <a:chOff x="351128" y="228595"/>
+            <a:chExt cx="8430000" cy="4686251"/>
+          </a:xfrm>
+        </p:grpSpPr>
+        <p:sp>
+          <p:nvSpPr>
+            <p:cNvPr id="395" name="Google Shape;395;p33"/>
+            <p:cNvSpPr/>
+            <p:nvPr/>
+          </p:nvSpPr>
+          <p:spPr>
+            <a:xfrm>
+              <a:off x="351128" y="238644"/>
+              <a:ext cx="8430000" cy="4666200"/>
+            </a:xfrm>
+            <a:prstGeom prst="roundRect">
+              <a:avLst>
+                <a:gd name="adj" fmla="val 4973"/>
+              </a:avLst>
+            </a:prstGeom>
+            <a:noFill/>
+            <a:ln w="28575" cap="flat" cmpd="sng">
+              <a:solidFill>
+                <a:schemeClr val="lt2"/>
+              </a:solidFill>
+              <a:prstDash val="solid"/>
+              <a:round/>
+              <a:headEnd type="none" w="sm" len="sm"/>
+              <a:tailEnd type="none" w="sm" len="sm"/>
+            </a:ln>
+          </p:spPr>
+          <p:txBody>
+            <a:bodyPr spcFirstLastPara="1" wrap="square" lIns="91425" tIns="91425" rIns="91425" bIns="91425" anchor="ctr" anchorCtr="0">
+              <a:noAutofit/>
+            </a:bodyPr>
+            <a:lstStyle/>
+            <a:p>
+              <a:pPr marL="0" lvl="0" indent="0" algn="l" rtl="0">
+                <a:spcBef>
+                  <a:spcPts val="0"/>
+                </a:spcBef>
+                <a:spcAft>
+                  <a:spcPts val="0"/>
+                </a:spcAft>
+                <a:buNone/>
+              </a:pPr>
+              <a:endParaRPr/>
+            </a:p>
+          </p:txBody>
+        </p:sp>
+        <p:grpSp>
+          <p:nvGrpSpPr>
+            <p:cNvPr id="396" name="Google Shape;396;p33"/>
+            <p:cNvGrpSpPr/>
+            <p:nvPr/>
+          </p:nvGrpSpPr>
+          <p:grpSpPr>
+            <a:xfrm>
+              <a:off x="713171" y="228595"/>
+              <a:ext cx="7717725" cy="4686251"/>
+              <a:chOff x="713175" y="432300"/>
+              <a:chExt cx="7717725" cy="4278900"/>
+            </a:xfrm>
+          </p:grpSpPr>
+          <p:cxnSp>
+            <p:nvCxnSpPr>
+              <p:cNvPr id="397" name="Google Shape;397;p33"/>
+              <p:cNvCxnSpPr/>
+              <p:nvPr/>
+            </p:nvCxnSpPr>
+            <p:spPr>
+              <a:xfrm>
+                <a:off x="713175" y="453850"/>
+                <a:ext cx="0" cy="4242000"/>
+              </a:xfrm>
+              <a:prstGeom prst="straightConnector1">
+                <a:avLst/>
+              </a:prstGeom>
+              <a:noFill/>
+              <a:ln w="28575" cap="flat" cmpd="sng">
+                <a:solidFill>
+                  <a:schemeClr val="lt2"/>
+                </a:solidFill>
+                <a:prstDash val="solid"/>
+                <a:round/>
+                <a:headEnd type="none" w="med" len="med"/>
+                <a:tailEnd type="none" w="med" len="med"/>
+              </a:ln>
+            </p:spPr>
+          </p:cxnSp>
+          <p:cxnSp>
+            <p:nvCxnSpPr>
+              <p:cNvPr id="398" name="Google Shape;398;p33"/>
+              <p:cNvCxnSpPr/>
+              <p:nvPr/>
+            </p:nvCxnSpPr>
+            <p:spPr>
+              <a:xfrm>
+                <a:off x="8430900" y="432300"/>
+                <a:ext cx="0" cy="4278900"/>
+              </a:xfrm>
+              <a:prstGeom prst="straightConnector1">
+                <a:avLst/>
+              </a:prstGeom>
+              <a:noFill/>
+              <a:ln w="28575" cap="flat" cmpd="sng">
+                <a:solidFill>
+                  <a:schemeClr val="lt2"/>
+                </a:solidFill>
+                <a:prstDash val="solid"/>
+                <a:round/>
+                <a:headEnd type="none" w="med" len="med"/>
+                <a:tailEnd type="none" w="med" len="med"/>
+              </a:ln>
+            </p:spPr>
+          </p:cxnSp>
+        </p:grpSp>
+      </p:grpSp>
+      <p:sp>
+        <p:nvSpPr>
+          <p:cNvPr id="399" name="Google Shape;399;p33"/>
+          <p:cNvSpPr/>
+          <p:nvPr/>
+        </p:nvSpPr>
+        <p:spPr>
+          <a:xfrm>
+            <a:off x="6744573" y="3029250"/>
+            <a:ext cx="1523400" cy="1523400"/>
+          </a:xfrm>
+          <a:prstGeom prst="roundRect">
+            <a:avLst>
+              <a:gd name="adj" fmla="val 16667"/>
+            </a:avLst>
+          </a:prstGeom>
+          <a:noFill/>
+          <a:ln w="28575" cap="flat" cmpd="sng">
+            <a:solidFill>
+              <a:schemeClr val="lt2"/>
+            </a:solidFill>
+            <a:prstDash val="solid"/>
+            <a:round/>
+            <a:headEnd type="none" w="sm" len="sm"/>
+            <a:tailEnd type="none" w="sm" len="sm"/>
+          </a:ln>
+        </p:spPr>
+        <p:txBody>
+          <a:bodyPr spcFirstLastPara="1" wrap="square" lIns="91425" tIns="91425" rIns="91425" bIns="91425" anchor="ctr" anchorCtr="0">
+            <a:noAutofit/>
+          </a:bodyPr>
+          <a:lstStyle/>
+          <a:p>
+            <a:pPr marL="0" lvl="0" indent="0" algn="l" rtl="0">
+              <a:spcBef>
+                <a:spcPts val="0"/>
+              </a:spcBef>
+              <a:spcAft>
+                <a:spcPts val="0"/>
+              </a:spcAft>
+              <a:buNone/>
+            </a:pPr>
+            <a:endParaRPr/>
+          </a:p>
+        </p:txBody>
+      </p:sp>
+      <p:grpSp>
+        <p:nvGrpSpPr>
+          <p:cNvPr id="400" name="Google Shape;400;p33"/>
+          <p:cNvGrpSpPr/>
+          <p:nvPr/>
+        </p:nvGrpSpPr>
+        <p:grpSpPr>
+          <a:xfrm>
+            <a:off x="7177923" y="3462608"/>
+            <a:ext cx="656700" cy="656686"/>
+            <a:chOff x="8030050" y="2613550"/>
+            <a:chExt cx="1147475" cy="1147450"/>
+          </a:xfrm>
+        </p:grpSpPr>
+        <p:sp>
+          <p:nvSpPr>
+            <p:cNvPr id="401" name="Google Shape;401;p33"/>
+            <p:cNvSpPr/>
+            <p:nvPr/>
+          </p:nvSpPr>
+          <p:spPr>
+            <a:xfrm>
+              <a:off x="8030050" y="2613550"/>
+              <a:ext cx="1147475" cy="1147450"/>
+            </a:xfrm>
+            <a:custGeom>
+              <a:avLst/>
+              <a:gdLst/>
+              <a:ahLst/>
+              <a:cxnLst/>
+              <a:rect l="l" t="t" r="r" b="b"/>
+              <a:pathLst>
+                <a:path w="45899" h="45898" extrusionOk="0">
+                  <a:moveTo>
+                    <a:pt x="22949" y="45898"/>
+                  </a:moveTo>
+                  <a:cubicBezTo>
+                    <a:pt x="10305" y="45898"/>
+                    <a:pt x="1" y="35594"/>
+                    <a:pt x="1" y="22949"/>
+                  </a:cubicBezTo>
+                  <a:cubicBezTo>
+                    <a:pt x="1" y="10305"/>
+                    <a:pt x="10305" y="1"/>
+                    <a:pt x="22949" y="1"/>
+                  </a:cubicBezTo>
+                  <a:cubicBezTo>
+                    <a:pt x="35594" y="1"/>
+                    <a:pt x="45898" y="10305"/>
+                    <a:pt x="45898" y="22949"/>
+                  </a:cubicBezTo>
+                  <a:cubicBezTo>
+                    <a:pt x="45898" y="35594"/>
+                    <a:pt x="35594" y="45898"/>
+                    <a:pt x="22949" y="45898"/>
+                  </a:cubicBezTo>
+                  <a:close/>
+                  <a:moveTo>
+                    <a:pt x="22949" y="396"/>
+                  </a:moveTo>
+                  <a:cubicBezTo>
+                    <a:pt x="10517" y="396"/>
+                    <a:pt x="365" y="10487"/>
+                    <a:pt x="365" y="22949"/>
+                  </a:cubicBezTo>
+                  <a:cubicBezTo>
+                    <a:pt x="365" y="35381"/>
+                    <a:pt x="10487" y="45533"/>
+                    <a:pt x="22949" y="45533"/>
+                  </a:cubicBezTo>
+                  <a:cubicBezTo>
+                    <a:pt x="35381" y="45533"/>
+                    <a:pt x="45503" y="35411"/>
+                    <a:pt x="45503" y="22949"/>
+                  </a:cubicBezTo>
+                  <a:cubicBezTo>
+                    <a:pt x="45503" y="10517"/>
+                    <a:pt x="35412" y="396"/>
+                    <a:pt x="22949" y="396"/>
+                  </a:cubicBezTo>
+                  <a:close/>
+                </a:path>
+              </a:pathLst>
+            </a:custGeom>
+            <a:solidFill>
+              <a:schemeClr val="dk2"/>
+            </a:solidFill>
+            <a:ln w="9525" cap="flat" cmpd="sng">
+              <a:solidFill>
+                <a:schemeClr val="dk2"/>
+              </a:solidFill>
+              <a:prstDash val="solid"/>
+              <a:round/>
+              <a:headEnd type="none" w="sm" len="sm"/>
+              <a:tailEnd type="none" w="sm" len="sm"/>
+            </a:ln>
+          </p:spPr>
+          <p:txBody>
+            <a:bodyPr spcFirstLastPara="1" wrap="square" lIns="91425" tIns="91425" rIns="91425" bIns="91425" anchor="ctr" anchorCtr="0">
+              <a:noAutofit/>
+            </a:bodyPr>
+            <a:lstStyle/>
+            <a:p>
+              <a:pPr marL="0" lvl="0" indent="0" algn="l" rtl="0">
+                <a:spcBef>
+                  <a:spcPts val="0"/>
+                </a:spcBef>
+                <a:spcAft>
+                  <a:spcPts val="0"/>
+                </a:spcAft>
+                <a:buNone/>
+              </a:pPr>
+              <a:endParaRPr/>
+            </a:p>
+          </p:txBody>
+        </p:sp>
+        <p:sp>
+          <p:nvSpPr>
+            <p:cNvPr id="402" name="Google Shape;402;p33"/>
+            <p:cNvSpPr/>
+            <p:nvPr/>
+          </p:nvSpPr>
+          <p:spPr>
+            <a:xfrm>
+              <a:off x="8030050" y="2613550"/>
+              <a:ext cx="1147475" cy="1147450"/>
+            </a:xfrm>
+            <a:custGeom>
+              <a:avLst/>
+              <a:gdLst/>
+              <a:ahLst/>
+              <a:cxnLst/>
+              <a:rect l="l" t="t" r="r" b="b"/>
+              <a:pathLst>
+                <a:path w="45899" h="45898" extrusionOk="0">
+                  <a:moveTo>
+                    <a:pt x="22949" y="45898"/>
+                  </a:moveTo>
+                  <a:cubicBezTo>
+                    <a:pt x="10305" y="45898"/>
+                    <a:pt x="1" y="35594"/>
+                    <a:pt x="1" y="22949"/>
+                  </a:cubicBezTo>
+                  <a:cubicBezTo>
+                    <a:pt x="1" y="10305"/>
+                    <a:pt x="10305" y="1"/>
+                    <a:pt x="22949" y="1"/>
+                  </a:cubicBezTo>
+                  <a:cubicBezTo>
+                    <a:pt x="35594" y="1"/>
+                    <a:pt x="45898" y="10305"/>
+                    <a:pt x="45898" y="22949"/>
+                  </a:cubicBezTo>
+                  <a:cubicBezTo>
+                    <a:pt x="45898" y="35594"/>
+                    <a:pt x="35594" y="45898"/>
+                    <a:pt x="22949" y="45898"/>
+                  </a:cubicBezTo>
+                  <a:close/>
+                  <a:moveTo>
+                    <a:pt x="22949" y="396"/>
+                  </a:moveTo>
+                  <a:cubicBezTo>
+                    <a:pt x="10517" y="396"/>
+                    <a:pt x="365" y="10487"/>
+                    <a:pt x="365" y="22949"/>
+                  </a:cubicBezTo>
+                  <a:cubicBezTo>
+                    <a:pt x="365" y="35381"/>
+                    <a:pt x="10487" y="45533"/>
+                    <a:pt x="22949" y="45533"/>
+                  </a:cubicBezTo>
+                  <a:cubicBezTo>
+                    <a:pt x="35381" y="45533"/>
+                    <a:pt x="45503" y="35411"/>
+                    <a:pt x="45503" y="22949"/>
+                  </a:cubicBezTo>
+                  <a:cubicBezTo>
+                    <a:pt x="45503" y="10517"/>
+                    <a:pt x="35412" y="396"/>
+                    <a:pt x="22949" y="396"/>
+                  </a:cubicBezTo>
+                  <a:close/>
+                </a:path>
+              </a:pathLst>
+            </a:custGeom>
+            <a:solidFill>
+              <a:schemeClr val="dk2"/>
+            </a:solidFill>
+            <a:ln w="9525" cap="flat" cmpd="sng">
+              <a:solidFill>
+                <a:schemeClr val="dk2"/>
+              </a:solidFill>
+              <a:prstDash val="solid"/>
+              <a:round/>
+              <a:headEnd type="none" w="sm" len="sm"/>
+              <a:tailEnd type="none" w="sm" len="sm"/>
+            </a:ln>
+          </p:spPr>
+          <p:txBody>
+            <a:bodyPr spcFirstLastPara="1" wrap="square" lIns="91425" tIns="91425" rIns="91425" bIns="91425" anchor="ctr" anchorCtr="0">
+              <a:noAutofit/>
+            </a:bodyPr>
+            <a:lstStyle/>
+            <a:p>
+              <a:pPr marL="0" lvl="0" indent="0" algn="l" rtl="0">
+                <a:spcBef>
+                  <a:spcPts val="0"/>
+                </a:spcBef>
+                <a:spcAft>
+                  <a:spcPts val="0"/>
+                </a:spcAft>
+                <a:buNone/>
+              </a:pPr>
+              <a:endParaRPr/>
+            </a:p>
+          </p:txBody>
+        </p:sp>
+        <p:sp>
+          <p:nvSpPr>
+            <p:cNvPr id="403" name="Google Shape;403;p33"/>
+            <p:cNvSpPr/>
+            <p:nvPr/>
+          </p:nvSpPr>
+          <p:spPr>
+            <a:xfrm>
+              <a:off x="8143275" y="2613550"/>
+              <a:ext cx="923300" cy="1147450"/>
+            </a:xfrm>
+            <a:custGeom>
+              <a:avLst/>
+              <a:gdLst/>
+              <a:ahLst/>
+              <a:cxnLst/>
+              <a:rect l="l" t="t" r="r" b="b"/>
+              <a:pathLst>
+                <a:path w="36932" h="45898" extrusionOk="0">
+                  <a:moveTo>
+                    <a:pt x="18451" y="45898"/>
+                  </a:moveTo>
+                  <a:cubicBezTo>
+                    <a:pt x="8268" y="45898"/>
+                    <a:pt x="1" y="35594"/>
+                    <a:pt x="1" y="22949"/>
+                  </a:cubicBezTo>
+                  <a:cubicBezTo>
+                    <a:pt x="1" y="10305"/>
+                    <a:pt x="8268" y="1"/>
+                    <a:pt x="18451" y="1"/>
+                  </a:cubicBezTo>
+                  <a:cubicBezTo>
+                    <a:pt x="28633" y="1"/>
+                    <a:pt x="36931" y="10305"/>
+                    <a:pt x="36931" y="22949"/>
+                  </a:cubicBezTo>
+                  <a:cubicBezTo>
+                    <a:pt x="36931" y="35594"/>
+                    <a:pt x="28633" y="45898"/>
+                    <a:pt x="18451" y="45898"/>
+                  </a:cubicBezTo>
+                  <a:close/>
+                  <a:moveTo>
+                    <a:pt x="18451" y="396"/>
+                  </a:moveTo>
+                  <a:cubicBezTo>
+                    <a:pt x="8481" y="396"/>
+                    <a:pt x="365" y="10487"/>
+                    <a:pt x="365" y="22949"/>
+                  </a:cubicBezTo>
+                  <a:cubicBezTo>
+                    <a:pt x="365" y="35381"/>
+                    <a:pt x="8451" y="45533"/>
+                    <a:pt x="18451" y="45533"/>
+                  </a:cubicBezTo>
+                  <a:cubicBezTo>
+                    <a:pt x="28420" y="45533"/>
+                    <a:pt x="36536" y="35411"/>
+                    <a:pt x="36536" y="22949"/>
+                  </a:cubicBezTo>
+                  <a:cubicBezTo>
+                    <a:pt x="36506" y="10517"/>
+                    <a:pt x="28420" y="396"/>
+                    <a:pt x="18451" y="396"/>
+                  </a:cubicBezTo>
+                  <a:close/>
+                </a:path>
+              </a:pathLst>
+            </a:custGeom>
+            <a:solidFill>
+              <a:schemeClr val="dk2"/>
+            </a:solidFill>
+            <a:ln w="9525" cap="flat" cmpd="sng">
+              <a:solidFill>
+                <a:schemeClr val="dk2"/>
+              </a:solidFill>
+              <a:prstDash val="solid"/>
+              <a:round/>
+              <a:headEnd type="none" w="sm" len="sm"/>
+              <a:tailEnd type="none" w="sm" len="sm"/>
+            </a:ln>
+          </p:spPr>
+          <p:txBody>
+            <a:bodyPr spcFirstLastPara="1" wrap="square" lIns="91425" tIns="91425" rIns="91425" bIns="91425" anchor="ctr" anchorCtr="0">
+              <a:noAutofit/>
+            </a:bodyPr>
+            <a:lstStyle/>
+            <a:p>
+              <a:pPr marL="0" lvl="0" indent="0" algn="l" rtl="0">
+                <a:spcBef>
+                  <a:spcPts val="0"/>
+                </a:spcBef>
+                <a:spcAft>
+                  <a:spcPts val="0"/>
+                </a:spcAft>
+                <a:buNone/>
+              </a:pPr>
+              <a:endParaRPr/>
+            </a:p>
+          </p:txBody>
+        </p:sp>
+        <p:sp>
+          <p:nvSpPr>
+            <p:cNvPr id="404" name="Google Shape;404;p33"/>
+            <p:cNvSpPr/>
+            <p:nvPr/>
+          </p:nvSpPr>
+          <p:spPr>
+            <a:xfrm>
+              <a:off x="8242825" y="2613550"/>
+              <a:ext cx="724950" cy="1147450"/>
+            </a:xfrm>
+            <a:custGeom>
+              <a:avLst/>
+              <a:gdLst/>
+              <a:ahLst/>
+              <a:cxnLst/>
+              <a:rect l="l" t="t" r="r" b="b"/>
+              <a:pathLst>
+                <a:path w="28998" h="45898" extrusionOk="0">
+                  <a:moveTo>
+                    <a:pt x="14469" y="45898"/>
+                  </a:moveTo>
+                  <a:cubicBezTo>
+                    <a:pt x="6505" y="45898"/>
+                    <a:pt x="0" y="35594"/>
+                    <a:pt x="0" y="22949"/>
+                  </a:cubicBezTo>
+                  <a:cubicBezTo>
+                    <a:pt x="0" y="10305"/>
+                    <a:pt x="6505" y="1"/>
+                    <a:pt x="14469" y="1"/>
+                  </a:cubicBezTo>
+                  <a:cubicBezTo>
+                    <a:pt x="22463" y="1"/>
+                    <a:pt x="28937" y="10305"/>
+                    <a:pt x="28937" y="22949"/>
+                  </a:cubicBezTo>
+                  <a:cubicBezTo>
+                    <a:pt x="28998" y="35594"/>
+                    <a:pt x="22493" y="45898"/>
+                    <a:pt x="14469" y="45898"/>
+                  </a:cubicBezTo>
+                  <a:close/>
+                  <a:moveTo>
+                    <a:pt x="14469" y="396"/>
+                  </a:moveTo>
+                  <a:cubicBezTo>
+                    <a:pt x="6687" y="396"/>
+                    <a:pt x="365" y="10487"/>
+                    <a:pt x="365" y="22949"/>
+                  </a:cubicBezTo>
+                  <a:cubicBezTo>
+                    <a:pt x="365" y="35381"/>
+                    <a:pt x="6687" y="45533"/>
+                    <a:pt x="14469" y="45533"/>
+                  </a:cubicBezTo>
+                  <a:cubicBezTo>
+                    <a:pt x="22250" y="45533"/>
+                    <a:pt x="28572" y="35411"/>
+                    <a:pt x="28572" y="22949"/>
+                  </a:cubicBezTo>
+                  <a:cubicBezTo>
+                    <a:pt x="28603" y="10517"/>
+                    <a:pt x="22250" y="396"/>
+                    <a:pt x="14469" y="396"/>
+                  </a:cubicBezTo>
+                  <a:close/>
+                </a:path>
+              </a:pathLst>
+            </a:custGeom>
+            <a:solidFill>
+              <a:schemeClr val="dk2"/>
+            </a:solidFill>
+            <a:ln w="9525" cap="flat" cmpd="sng">
+              <a:solidFill>
+                <a:schemeClr val="dk2"/>
+              </a:solidFill>
+              <a:prstDash val="solid"/>
+              <a:round/>
+              <a:headEnd type="none" w="sm" len="sm"/>
+              <a:tailEnd type="none" w="sm" len="sm"/>
+            </a:ln>
+          </p:spPr>
+          <p:txBody>
+            <a:bodyPr spcFirstLastPara="1" wrap="square" lIns="91425" tIns="91425" rIns="91425" bIns="91425" anchor="ctr" anchorCtr="0">
+              <a:noAutofit/>
+            </a:bodyPr>
+            <a:lstStyle/>
+            <a:p>
+              <a:pPr marL="0" lvl="0" indent="0" algn="l" rtl="0">
+                <a:spcBef>
+                  <a:spcPts val="0"/>
+                </a:spcBef>
+                <a:spcAft>
+                  <a:spcPts val="0"/>
+                </a:spcAft>
+                <a:buNone/>
+              </a:pPr>
+              <a:endParaRPr/>
+            </a:p>
+          </p:txBody>
+        </p:sp>
+        <p:sp>
+          <p:nvSpPr>
+            <p:cNvPr id="405" name="Google Shape;405;p33"/>
+            <p:cNvSpPr/>
+            <p:nvPr/>
+          </p:nvSpPr>
+          <p:spPr>
+            <a:xfrm>
+              <a:off x="8327175" y="2613550"/>
+              <a:ext cx="558550" cy="1147450"/>
+            </a:xfrm>
+            <a:custGeom>
+              <a:avLst/>
+              <a:gdLst/>
+              <a:ahLst/>
+              <a:cxnLst/>
+              <a:rect l="l" t="t" r="r" b="b"/>
+              <a:pathLst>
+                <a:path w="22342" h="45898" extrusionOk="0">
+                  <a:moveTo>
+                    <a:pt x="11186" y="45898"/>
+                  </a:moveTo>
+                  <a:cubicBezTo>
+                    <a:pt x="5016" y="45898"/>
+                    <a:pt x="0" y="35594"/>
+                    <a:pt x="0" y="22949"/>
+                  </a:cubicBezTo>
+                  <a:cubicBezTo>
+                    <a:pt x="0" y="10305"/>
+                    <a:pt x="5016" y="1"/>
+                    <a:pt x="11186" y="1"/>
+                  </a:cubicBezTo>
+                  <a:cubicBezTo>
+                    <a:pt x="17326" y="1"/>
+                    <a:pt x="22341" y="10305"/>
+                    <a:pt x="22341" y="22949"/>
+                  </a:cubicBezTo>
+                  <a:cubicBezTo>
+                    <a:pt x="22341" y="35594"/>
+                    <a:pt x="17326" y="45898"/>
+                    <a:pt x="11186" y="45898"/>
+                  </a:cubicBezTo>
+                  <a:close/>
+                  <a:moveTo>
+                    <a:pt x="11186" y="396"/>
+                  </a:moveTo>
+                  <a:cubicBezTo>
+                    <a:pt x="5259" y="396"/>
+                    <a:pt x="426" y="10487"/>
+                    <a:pt x="426" y="22949"/>
+                  </a:cubicBezTo>
+                  <a:cubicBezTo>
+                    <a:pt x="426" y="35381"/>
+                    <a:pt x="5259" y="45533"/>
+                    <a:pt x="11186" y="45533"/>
+                  </a:cubicBezTo>
+                  <a:cubicBezTo>
+                    <a:pt x="17113" y="45533"/>
+                    <a:pt x="21916" y="35411"/>
+                    <a:pt x="21916" y="22949"/>
+                  </a:cubicBezTo>
+                  <a:cubicBezTo>
+                    <a:pt x="21916" y="10517"/>
+                    <a:pt x="17113" y="396"/>
+                    <a:pt x="11186" y="396"/>
+                  </a:cubicBezTo>
+                  <a:close/>
+                </a:path>
+              </a:pathLst>
+            </a:custGeom>
+            <a:solidFill>
+              <a:schemeClr val="dk2"/>
+            </a:solidFill>
+            <a:ln w="9525" cap="flat" cmpd="sng">
+              <a:solidFill>
+                <a:schemeClr val="dk2"/>
+              </a:solidFill>
+              <a:prstDash val="solid"/>
+              <a:round/>
+              <a:headEnd type="none" w="sm" len="sm"/>
+              <a:tailEnd type="none" w="sm" len="sm"/>
+            </a:ln>
+          </p:spPr>
+          <p:txBody>
+            <a:bodyPr spcFirstLastPara="1" wrap="square" lIns="91425" tIns="91425" rIns="91425" bIns="91425" anchor="ctr" anchorCtr="0">
+              <a:noAutofit/>
+            </a:bodyPr>
+            <a:lstStyle/>
+            <a:p>
+              <a:pPr marL="0" lvl="0" indent="0" algn="l" rtl="0">
+                <a:spcBef>
+                  <a:spcPts val="0"/>
+                </a:spcBef>
+                <a:spcAft>
+                  <a:spcPts val="0"/>
+                </a:spcAft>
+                <a:buNone/>
+              </a:pPr>
+              <a:endParaRPr/>
+            </a:p>
+          </p:txBody>
+        </p:sp>
+        <p:sp>
+          <p:nvSpPr>
+            <p:cNvPr id="406" name="Google Shape;406;p33"/>
+            <p:cNvSpPr/>
+            <p:nvPr/>
+          </p:nvSpPr>
+          <p:spPr>
+            <a:xfrm>
+              <a:off x="8420625" y="2613550"/>
+              <a:ext cx="376950" cy="1147450"/>
+            </a:xfrm>
+            <a:custGeom>
+              <a:avLst/>
+              <a:gdLst/>
+              <a:ahLst/>
+              <a:cxnLst/>
+              <a:rect l="l" t="t" r="r" b="b"/>
+              <a:pathLst>
+                <a:path w="15078" h="45898" extrusionOk="0">
+                  <a:moveTo>
+                    <a:pt x="7509" y="45898"/>
+                  </a:moveTo>
+                  <a:cubicBezTo>
+                    <a:pt x="3284" y="45898"/>
+                    <a:pt x="1" y="35837"/>
+                    <a:pt x="1" y="22949"/>
+                  </a:cubicBezTo>
+                  <a:cubicBezTo>
+                    <a:pt x="1" y="10061"/>
+                    <a:pt x="3284" y="1"/>
+                    <a:pt x="7509" y="1"/>
+                  </a:cubicBezTo>
+                  <a:cubicBezTo>
+                    <a:pt x="11734" y="1"/>
+                    <a:pt x="15047" y="10061"/>
+                    <a:pt x="15047" y="22949"/>
+                  </a:cubicBezTo>
+                  <a:cubicBezTo>
+                    <a:pt x="15077" y="35837"/>
+                    <a:pt x="11734" y="45898"/>
+                    <a:pt x="7509" y="45898"/>
+                  </a:cubicBezTo>
+                  <a:close/>
+                  <a:moveTo>
+                    <a:pt x="7509" y="396"/>
+                  </a:moveTo>
+                  <a:cubicBezTo>
+                    <a:pt x="3557" y="396"/>
+                    <a:pt x="366" y="10487"/>
+                    <a:pt x="366" y="22949"/>
+                  </a:cubicBezTo>
+                  <a:cubicBezTo>
+                    <a:pt x="366" y="35381"/>
+                    <a:pt x="3557" y="45533"/>
+                    <a:pt x="7509" y="45533"/>
+                  </a:cubicBezTo>
+                  <a:cubicBezTo>
+                    <a:pt x="11460" y="45533"/>
+                    <a:pt x="14652" y="35411"/>
+                    <a:pt x="14652" y="22949"/>
+                  </a:cubicBezTo>
+                  <a:cubicBezTo>
+                    <a:pt x="14652" y="10517"/>
+                    <a:pt x="11460" y="396"/>
+                    <a:pt x="7509" y="396"/>
+                  </a:cubicBezTo>
+                  <a:close/>
+                </a:path>
+              </a:pathLst>
+            </a:custGeom>
+            <a:solidFill>
+              <a:schemeClr val="dk2"/>
+            </a:solidFill>
+            <a:ln w="9525" cap="flat" cmpd="sng">
+              <a:solidFill>
+                <a:schemeClr val="dk2"/>
+              </a:solidFill>
+              <a:prstDash val="solid"/>
+              <a:round/>
+              <a:headEnd type="none" w="sm" len="sm"/>
+              <a:tailEnd type="none" w="sm" len="sm"/>
+            </a:ln>
+          </p:spPr>
+          <p:txBody>
+            <a:bodyPr spcFirstLastPara="1" wrap="square" lIns="91425" tIns="91425" rIns="91425" bIns="91425" anchor="ctr" anchorCtr="0">
+              <a:noAutofit/>
+            </a:bodyPr>
+            <a:lstStyle/>
+            <a:p>
+              <a:pPr marL="0" lvl="0" indent="0" algn="l" rtl="0">
+                <a:spcBef>
+                  <a:spcPts val="0"/>
+                </a:spcBef>
+                <a:spcAft>
+                  <a:spcPts val="0"/>
+                </a:spcAft>
+                <a:buNone/>
+              </a:pPr>
+              <a:endParaRPr/>
+            </a:p>
+          </p:txBody>
+        </p:sp>
+        <p:sp>
+          <p:nvSpPr>
+            <p:cNvPr id="407" name="Google Shape;407;p33"/>
+            <p:cNvSpPr/>
+            <p:nvPr/>
+          </p:nvSpPr>
+          <p:spPr>
+            <a:xfrm>
+              <a:off x="8519425" y="2613550"/>
+              <a:ext cx="183925" cy="1147450"/>
+            </a:xfrm>
+            <a:custGeom>
+              <a:avLst/>
+              <a:gdLst/>
+              <a:ahLst/>
+              <a:cxnLst/>
+              <a:rect l="l" t="t" r="r" b="b"/>
+              <a:pathLst>
+                <a:path w="7357" h="45898" extrusionOk="0">
+                  <a:moveTo>
+                    <a:pt x="3678" y="45898"/>
+                  </a:moveTo>
+                  <a:cubicBezTo>
+                    <a:pt x="1277" y="45898"/>
+                    <a:pt x="0" y="34074"/>
+                    <a:pt x="0" y="22949"/>
+                  </a:cubicBezTo>
+                  <a:cubicBezTo>
+                    <a:pt x="0" y="11824"/>
+                    <a:pt x="1277" y="1"/>
+                    <a:pt x="3678" y="1"/>
+                  </a:cubicBezTo>
+                  <a:cubicBezTo>
+                    <a:pt x="6080" y="1"/>
+                    <a:pt x="7356" y="11824"/>
+                    <a:pt x="7356" y="22949"/>
+                  </a:cubicBezTo>
+                  <a:cubicBezTo>
+                    <a:pt x="7356" y="34074"/>
+                    <a:pt x="6019" y="45898"/>
+                    <a:pt x="3678" y="45898"/>
+                  </a:cubicBezTo>
+                  <a:close/>
+                  <a:moveTo>
+                    <a:pt x="3678" y="396"/>
+                  </a:moveTo>
+                  <a:cubicBezTo>
+                    <a:pt x="2128" y="396"/>
+                    <a:pt x="396" y="9666"/>
+                    <a:pt x="396" y="22949"/>
+                  </a:cubicBezTo>
+                  <a:cubicBezTo>
+                    <a:pt x="396" y="36262"/>
+                    <a:pt x="2158" y="45533"/>
+                    <a:pt x="3678" y="45533"/>
+                  </a:cubicBezTo>
+                  <a:cubicBezTo>
+                    <a:pt x="5198" y="45533"/>
+                    <a:pt x="6931" y="36262"/>
+                    <a:pt x="6931" y="22949"/>
+                  </a:cubicBezTo>
+                  <a:cubicBezTo>
+                    <a:pt x="6931" y="9666"/>
+                    <a:pt x="5198" y="396"/>
+                    <a:pt x="3678" y="396"/>
+                  </a:cubicBezTo>
+                  <a:close/>
+                </a:path>
+              </a:pathLst>
+            </a:custGeom>
+            <a:solidFill>
+              <a:schemeClr val="dk2"/>
+            </a:solidFill>
+            <a:ln w="9525" cap="flat" cmpd="sng">
+              <a:solidFill>
+                <a:schemeClr val="dk2"/>
+              </a:solidFill>
+              <a:prstDash val="solid"/>
+              <a:round/>
+              <a:headEnd type="none" w="sm" len="sm"/>
+              <a:tailEnd type="none" w="sm" len="sm"/>
+            </a:ln>
+          </p:spPr>
+          <p:txBody>
+            <a:bodyPr spcFirstLastPara="1" wrap="square" lIns="91425" tIns="91425" rIns="91425" bIns="91425" anchor="ctr" anchorCtr="0">
+              <a:noAutofit/>
+            </a:bodyPr>
+            <a:lstStyle/>
+            <a:p>
+              <a:pPr marL="0" lvl="0" indent="0" algn="l" rtl="0">
+                <a:spcBef>
+                  <a:spcPts val="0"/>
+                </a:spcBef>
+                <a:spcAft>
+                  <a:spcPts val="0"/>
+                </a:spcAft>
+                <a:buNone/>
+              </a:pPr>
+              <a:endParaRPr/>
+            </a:p>
+          </p:txBody>
+        </p:sp>
+        <p:sp>
+          <p:nvSpPr>
+            <p:cNvPr id="408" name="Google Shape;408;p33"/>
+            <p:cNvSpPr/>
+            <p:nvPr/>
+          </p:nvSpPr>
+          <p:spPr>
+            <a:xfrm>
+              <a:off x="8599200" y="2618100"/>
+              <a:ext cx="9150" cy="1138350"/>
+            </a:xfrm>
+            <a:custGeom>
+              <a:avLst/>
+              <a:gdLst/>
+              <a:ahLst/>
+              <a:cxnLst/>
+              <a:rect l="l" t="t" r="r" b="b"/>
+              <a:pathLst>
+                <a:path w="366" h="45534" extrusionOk="0">
+                  <a:moveTo>
+                    <a:pt x="1" y="1"/>
+                  </a:moveTo>
+                  <a:lnTo>
+                    <a:pt x="366" y="1"/>
+                  </a:lnTo>
+                  <a:lnTo>
+                    <a:pt x="366" y="45533"/>
+                  </a:lnTo>
+                  <a:lnTo>
+                    <a:pt x="1" y="45533"/>
+                  </a:lnTo>
+                  <a:close/>
+                </a:path>
+              </a:pathLst>
+            </a:custGeom>
+            <a:solidFill>
+              <a:schemeClr val="dk2"/>
+            </a:solidFill>
+            <a:ln w="9525" cap="flat" cmpd="sng">
+              <a:solidFill>
+                <a:schemeClr val="dk2"/>
+              </a:solidFill>
+              <a:prstDash val="solid"/>
+              <a:round/>
+              <a:headEnd type="none" w="sm" len="sm"/>
+              <a:tailEnd type="none" w="sm" len="sm"/>
+            </a:ln>
+          </p:spPr>
+          <p:txBody>
+            <a:bodyPr spcFirstLastPara="1" wrap="square" lIns="91425" tIns="91425" rIns="91425" bIns="91425" anchor="ctr" anchorCtr="0">
+              <a:noAutofit/>
+            </a:bodyPr>
+            <a:lstStyle/>
+            <a:p>
+              <a:pPr marL="0" lvl="0" indent="0" algn="l" rtl="0">
+                <a:spcBef>
+                  <a:spcPts val="0"/>
+                </a:spcBef>
+                <a:spcAft>
+                  <a:spcPts val="0"/>
+                </a:spcAft>
+                <a:buNone/>
+              </a:pPr>
+              <a:endParaRPr/>
+            </a:p>
+          </p:txBody>
+        </p:sp>
+        <p:sp>
+          <p:nvSpPr>
+            <p:cNvPr id="409" name="Google Shape;409;p33"/>
+            <p:cNvSpPr/>
+            <p:nvPr/>
+          </p:nvSpPr>
+          <p:spPr>
+            <a:xfrm>
+              <a:off x="8045250" y="3270100"/>
+              <a:ext cx="1116300" cy="9150"/>
+            </a:xfrm>
+            <a:custGeom>
+              <a:avLst/>
+              <a:gdLst/>
+              <a:ahLst/>
+              <a:cxnLst/>
+              <a:rect l="l" t="t" r="r" b="b"/>
+              <a:pathLst>
+                <a:path w="44652" h="366" extrusionOk="0">
+                  <a:moveTo>
+                    <a:pt x="0" y="0"/>
+                  </a:moveTo>
+                  <a:lnTo>
+                    <a:pt x="44652" y="0"/>
+                  </a:lnTo>
+                  <a:lnTo>
+                    <a:pt x="44652" y="365"/>
+                  </a:lnTo>
+                  <a:lnTo>
+                    <a:pt x="0" y="365"/>
+                  </a:lnTo>
+                  <a:close/>
+                </a:path>
+              </a:pathLst>
+            </a:custGeom>
+            <a:solidFill>
+              <a:schemeClr val="dk2"/>
+            </a:solidFill>
+            <a:ln w="9525" cap="flat" cmpd="sng">
+              <a:solidFill>
+                <a:schemeClr val="dk2"/>
+              </a:solidFill>
+              <a:prstDash val="solid"/>
+              <a:round/>
+              <a:headEnd type="none" w="sm" len="sm"/>
+              <a:tailEnd type="none" w="sm" len="sm"/>
+            </a:ln>
+          </p:spPr>
+          <p:txBody>
+            <a:bodyPr spcFirstLastPara="1" wrap="square" lIns="91425" tIns="91425" rIns="91425" bIns="91425" anchor="ctr" anchorCtr="0">
+              <a:noAutofit/>
+            </a:bodyPr>
+            <a:lstStyle/>
+            <a:p>
+              <a:pPr marL="0" lvl="0" indent="0" algn="l" rtl="0">
+                <a:spcBef>
+                  <a:spcPts val="0"/>
+                </a:spcBef>
+                <a:spcAft>
+                  <a:spcPts val="0"/>
+                </a:spcAft>
+                <a:buNone/>
+              </a:pPr>
+              <a:endParaRPr/>
+            </a:p>
+          </p:txBody>
+        </p:sp>
+        <p:sp>
+          <p:nvSpPr>
+            <p:cNvPr id="410" name="Google Shape;410;p33"/>
+            <p:cNvSpPr/>
+            <p:nvPr/>
+          </p:nvSpPr>
+          <p:spPr>
+            <a:xfrm>
+              <a:off x="8061200" y="3354450"/>
+              <a:ext cx="1086675" cy="9900"/>
+            </a:xfrm>
+            <a:custGeom>
+              <a:avLst/>
+              <a:gdLst/>
+              <a:ahLst/>
+              <a:cxnLst/>
+              <a:rect l="l" t="t" r="r" b="b"/>
+              <a:pathLst>
+                <a:path w="43467" h="396" extrusionOk="0">
+                  <a:moveTo>
+                    <a:pt x="1" y="0"/>
+                  </a:moveTo>
+                  <a:lnTo>
+                    <a:pt x="43467" y="0"/>
+                  </a:lnTo>
+                  <a:lnTo>
+                    <a:pt x="43467" y="395"/>
+                  </a:lnTo>
+                  <a:lnTo>
+                    <a:pt x="1" y="395"/>
+                  </a:lnTo>
+                  <a:close/>
+                </a:path>
+              </a:pathLst>
+            </a:custGeom>
+            <a:solidFill>
+              <a:schemeClr val="dk2"/>
+            </a:solidFill>
+            <a:ln w="9525" cap="flat" cmpd="sng">
+              <a:solidFill>
+                <a:schemeClr val="dk2"/>
+              </a:solidFill>
+              <a:prstDash val="solid"/>
+              <a:round/>
+              <a:headEnd type="none" w="sm" len="sm"/>
+              <a:tailEnd type="none" w="sm" len="sm"/>
+            </a:ln>
+          </p:spPr>
+          <p:txBody>
+            <a:bodyPr spcFirstLastPara="1" wrap="square" lIns="91425" tIns="91425" rIns="91425" bIns="91425" anchor="ctr" anchorCtr="0">
+              <a:noAutofit/>
+            </a:bodyPr>
+            <a:lstStyle/>
+            <a:p>
+              <a:pPr marL="0" lvl="0" indent="0" algn="l" rtl="0">
+                <a:spcBef>
+                  <a:spcPts val="0"/>
+                </a:spcBef>
+                <a:spcAft>
+                  <a:spcPts val="0"/>
+                </a:spcAft>
+                <a:buNone/>
+              </a:pPr>
+              <a:endParaRPr/>
+            </a:p>
+          </p:txBody>
+        </p:sp>
+        <p:sp>
+          <p:nvSpPr>
+            <p:cNvPr id="411" name="Google Shape;411;p33"/>
+            <p:cNvSpPr/>
+            <p:nvPr/>
+          </p:nvSpPr>
+          <p:spPr>
+            <a:xfrm>
+              <a:off x="8095400" y="3438800"/>
+              <a:ext cx="1014475" cy="9900"/>
+            </a:xfrm>
+            <a:custGeom>
+              <a:avLst/>
+              <a:gdLst/>
+              <a:ahLst/>
+              <a:cxnLst/>
+              <a:rect l="l" t="t" r="r" b="b"/>
+              <a:pathLst>
+                <a:path w="40579" h="396" extrusionOk="0">
+                  <a:moveTo>
+                    <a:pt x="1" y="0"/>
+                  </a:moveTo>
+                  <a:lnTo>
+                    <a:pt x="40579" y="0"/>
+                  </a:lnTo>
+                  <a:lnTo>
+                    <a:pt x="40579" y="395"/>
+                  </a:lnTo>
+                  <a:lnTo>
+                    <a:pt x="1" y="395"/>
+                  </a:lnTo>
+                  <a:close/>
+                </a:path>
+              </a:pathLst>
+            </a:custGeom>
+            <a:solidFill>
+              <a:schemeClr val="dk2"/>
+            </a:solidFill>
+            <a:ln w="9525" cap="flat" cmpd="sng">
+              <a:solidFill>
+                <a:schemeClr val="dk2"/>
+              </a:solidFill>
+              <a:prstDash val="solid"/>
+              <a:round/>
+              <a:headEnd type="none" w="sm" len="sm"/>
+              <a:tailEnd type="none" w="sm" len="sm"/>
+            </a:ln>
+          </p:spPr>
+          <p:txBody>
+            <a:bodyPr spcFirstLastPara="1" wrap="square" lIns="91425" tIns="91425" rIns="91425" bIns="91425" anchor="ctr" anchorCtr="0">
+              <a:noAutofit/>
+            </a:bodyPr>
+            <a:lstStyle/>
+            <a:p>
+              <a:pPr marL="0" lvl="0" indent="0" algn="l" rtl="0">
+                <a:spcBef>
+                  <a:spcPts val="0"/>
+                </a:spcBef>
+                <a:spcAft>
+                  <a:spcPts val="0"/>
+                </a:spcAft>
+                <a:buNone/>
+              </a:pPr>
+              <a:endParaRPr/>
+            </a:p>
+          </p:txBody>
+        </p:sp>
+        <p:sp>
+          <p:nvSpPr>
+            <p:cNvPr id="412" name="Google Shape;412;p33"/>
+            <p:cNvSpPr/>
+            <p:nvPr/>
+          </p:nvSpPr>
+          <p:spPr>
+            <a:xfrm>
+              <a:off x="8144025" y="3513250"/>
+              <a:ext cx="920275" cy="9150"/>
+            </a:xfrm>
+            <a:custGeom>
+              <a:avLst/>
+              <a:gdLst/>
+              <a:ahLst/>
+              <a:cxnLst/>
+              <a:rect l="l" t="t" r="r" b="b"/>
+              <a:pathLst>
+                <a:path w="36811" h="366" extrusionOk="0">
+                  <a:moveTo>
+                    <a:pt x="1" y="1"/>
+                  </a:moveTo>
+                  <a:lnTo>
+                    <a:pt x="36810" y="1"/>
+                  </a:lnTo>
+                  <a:lnTo>
+                    <a:pt x="36810" y="366"/>
+                  </a:lnTo>
+                  <a:lnTo>
+                    <a:pt x="1" y="366"/>
+                  </a:lnTo>
+                  <a:close/>
+                </a:path>
+              </a:pathLst>
+            </a:custGeom>
+            <a:solidFill>
+              <a:schemeClr val="dk2"/>
+            </a:solidFill>
+            <a:ln w="9525" cap="flat" cmpd="sng">
+              <a:solidFill>
+                <a:schemeClr val="dk2"/>
+              </a:solidFill>
+              <a:prstDash val="solid"/>
+              <a:round/>
+              <a:headEnd type="none" w="sm" len="sm"/>
+              <a:tailEnd type="none" w="sm" len="sm"/>
+            </a:ln>
+          </p:spPr>
+          <p:txBody>
+            <a:bodyPr spcFirstLastPara="1" wrap="square" lIns="91425" tIns="91425" rIns="91425" bIns="91425" anchor="ctr" anchorCtr="0">
+              <a:noAutofit/>
+            </a:bodyPr>
+            <a:lstStyle/>
+            <a:p>
+              <a:pPr marL="0" lvl="0" indent="0" algn="l" rtl="0">
+                <a:spcBef>
+                  <a:spcPts val="0"/>
+                </a:spcBef>
+                <a:spcAft>
+                  <a:spcPts val="0"/>
+                </a:spcAft>
+                <a:buNone/>
+              </a:pPr>
+              <a:endParaRPr/>
+            </a:p>
+          </p:txBody>
+        </p:sp>
+        <p:sp>
+          <p:nvSpPr>
+            <p:cNvPr id="413" name="Google Shape;413;p33"/>
+            <p:cNvSpPr/>
+            <p:nvPr/>
+          </p:nvSpPr>
+          <p:spPr>
+            <a:xfrm>
+              <a:off x="8201025" y="3581650"/>
+              <a:ext cx="804000" cy="9150"/>
+            </a:xfrm>
+            <a:custGeom>
+              <a:avLst/>
+              <a:gdLst/>
+              <a:ahLst/>
+              <a:cxnLst/>
+              <a:rect l="l" t="t" r="r" b="b"/>
+              <a:pathLst>
+                <a:path w="32160" h="366" extrusionOk="0">
+                  <a:moveTo>
+                    <a:pt x="1" y="0"/>
+                  </a:moveTo>
+                  <a:lnTo>
+                    <a:pt x="32159" y="0"/>
+                  </a:lnTo>
+                  <a:lnTo>
+                    <a:pt x="32159" y="365"/>
+                  </a:lnTo>
+                  <a:lnTo>
+                    <a:pt x="1" y="365"/>
+                  </a:lnTo>
+                  <a:close/>
+                </a:path>
+              </a:pathLst>
+            </a:custGeom>
+            <a:solidFill>
+              <a:schemeClr val="dk2"/>
+            </a:solidFill>
+            <a:ln w="9525" cap="flat" cmpd="sng">
+              <a:solidFill>
+                <a:schemeClr val="dk2"/>
+              </a:solidFill>
+              <a:prstDash val="solid"/>
+              <a:round/>
+              <a:headEnd type="none" w="sm" len="sm"/>
+              <a:tailEnd type="none" w="sm" len="sm"/>
+            </a:ln>
+          </p:spPr>
+          <p:txBody>
+            <a:bodyPr spcFirstLastPara="1" wrap="square" lIns="91425" tIns="91425" rIns="91425" bIns="91425" anchor="ctr" anchorCtr="0">
+              <a:noAutofit/>
+            </a:bodyPr>
+            <a:lstStyle/>
+            <a:p>
+              <a:pPr marL="0" lvl="0" indent="0" algn="l" rtl="0">
+                <a:spcBef>
+                  <a:spcPts val="0"/>
+                </a:spcBef>
+                <a:spcAft>
+                  <a:spcPts val="0"/>
+                </a:spcAft>
+                <a:buNone/>
+              </a:pPr>
+              <a:endParaRPr/>
+            </a:p>
+          </p:txBody>
+        </p:sp>
+        <p:sp>
+          <p:nvSpPr>
+            <p:cNvPr id="414" name="Google Shape;414;p33"/>
+            <p:cNvSpPr/>
+            <p:nvPr/>
+          </p:nvSpPr>
+          <p:spPr>
+            <a:xfrm>
+              <a:off x="8270925" y="3643200"/>
+              <a:ext cx="663425" cy="9900"/>
+            </a:xfrm>
+            <a:custGeom>
+              <a:avLst/>
+              <a:gdLst/>
+              <a:ahLst/>
+              <a:cxnLst/>
+              <a:rect l="l" t="t" r="r" b="b"/>
+              <a:pathLst>
+                <a:path w="26537" h="396" extrusionOk="0">
+                  <a:moveTo>
+                    <a:pt x="1" y="1"/>
+                  </a:moveTo>
+                  <a:lnTo>
+                    <a:pt x="26536" y="1"/>
+                  </a:lnTo>
+                  <a:lnTo>
+                    <a:pt x="26536" y="396"/>
+                  </a:lnTo>
+                  <a:lnTo>
+                    <a:pt x="1" y="396"/>
+                  </a:lnTo>
+                  <a:close/>
+                </a:path>
+              </a:pathLst>
+            </a:custGeom>
+            <a:solidFill>
+              <a:schemeClr val="dk2"/>
+            </a:solidFill>
+            <a:ln w="9525" cap="flat" cmpd="sng">
+              <a:solidFill>
+                <a:schemeClr val="dk2"/>
+              </a:solidFill>
+              <a:prstDash val="solid"/>
+              <a:round/>
+              <a:headEnd type="none" w="sm" len="sm"/>
+              <a:tailEnd type="none" w="sm" len="sm"/>
+            </a:ln>
+          </p:spPr>
+          <p:txBody>
+            <a:bodyPr spcFirstLastPara="1" wrap="square" lIns="91425" tIns="91425" rIns="91425" bIns="91425" anchor="ctr" anchorCtr="0">
+              <a:noAutofit/>
+            </a:bodyPr>
+            <a:lstStyle/>
+            <a:p>
+              <a:pPr marL="0" lvl="0" indent="0" algn="l" rtl="0">
+                <a:spcBef>
+                  <a:spcPts val="0"/>
+                </a:spcBef>
+                <a:spcAft>
+                  <a:spcPts val="0"/>
+                </a:spcAft>
+                <a:buNone/>
+              </a:pPr>
+              <a:endParaRPr/>
+            </a:p>
+          </p:txBody>
+        </p:sp>
+        <p:sp>
+          <p:nvSpPr>
+            <p:cNvPr id="415" name="Google Shape;415;p33"/>
+            <p:cNvSpPr/>
+            <p:nvPr/>
+          </p:nvSpPr>
+          <p:spPr>
+            <a:xfrm>
+              <a:off x="8349200" y="3691075"/>
+              <a:ext cx="509150" cy="9150"/>
+            </a:xfrm>
+            <a:custGeom>
+              <a:avLst/>
+              <a:gdLst/>
+              <a:ahLst/>
+              <a:cxnLst/>
+              <a:rect l="l" t="t" r="r" b="b"/>
+              <a:pathLst>
+                <a:path w="20366" h="366" extrusionOk="0">
+                  <a:moveTo>
+                    <a:pt x="1" y="0"/>
+                  </a:moveTo>
+                  <a:lnTo>
+                    <a:pt x="20366" y="0"/>
+                  </a:lnTo>
+                  <a:lnTo>
+                    <a:pt x="20366" y="365"/>
+                  </a:lnTo>
+                  <a:lnTo>
+                    <a:pt x="1" y="365"/>
+                  </a:lnTo>
+                  <a:close/>
+                </a:path>
+              </a:pathLst>
+            </a:custGeom>
+            <a:solidFill>
+              <a:schemeClr val="dk2"/>
+            </a:solidFill>
+            <a:ln w="9525" cap="flat" cmpd="sng">
+              <a:solidFill>
+                <a:schemeClr val="dk2"/>
+              </a:solidFill>
+              <a:prstDash val="solid"/>
+              <a:round/>
+              <a:headEnd type="none" w="sm" len="sm"/>
+              <a:tailEnd type="none" w="sm" len="sm"/>
+            </a:ln>
+          </p:spPr>
+          <p:txBody>
+            <a:bodyPr spcFirstLastPara="1" wrap="square" lIns="91425" tIns="91425" rIns="91425" bIns="91425" anchor="ctr" anchorCtr="0">
+              <a:noAutofit/>
+            </a:bodyPr>
+            <a:lstStyle/>
+            <a:p>
+              <a:pPr marL="0" lvl="0" indent="0" algn="l" rtl="0">
+                <a:spcBef>
+                  <a:spcPts val="0"/>
+                </a:spcBef>
+                <a:spcAft>
+                  <a:spcPts val="0"/>
+                </a:spcAft>
+                <a:buNone/>
+              </a:pPr>
+              <a:endParaRPr/>
+            </a:p>
+          </p:txBody>
+        </p:sp>
+        <p:sp>
+          <p:nvSpPr>
+            <p:cNvPr id="416" name="Google Shape;416;p33"/>
+            <p:cNvSpPr/>
+            <p:nvPr/>
+          </p:nvSpPr>
+          <p:spPr>
+            <a:xfrm>
+              <a:off x="8034600" y="3189550"/>
+              <a:ext cx="1140625" cy="9150"/>
+            </a:xfrm>
+            <a:custGeom>
+              <a:avLst/>
+              <a:gdLst/>
+              <a:ahLst/>
+              <a:cxnLst/>
+              <a:rect l="l" t="t" r="r" b="b"/>
+              <a:pathLst>
+                <a:path w="45625" h="366" extrusionOk="0">
+                  <a:moveTo>
+                    <a:pt x="1" y="0"/>
+                  </a:moveTo>
+                  <a:lnTo>
+                    <a:pt x="45625" y="0"/>
+                  </a:lnTo>
+                  <a:lnTo>
+                    <a:pt x="45625" y="365"/>
+                  </a:lnTo>
+                  <a:lnTo>
+                    <a:pt x="1" y="365"/>
+                  </a:lnTo>
+                  <a:close/>
+                </a:path>
+              </a:pathLst>
+            </a:custGeom>
+            <a:solidFill>
+              <a:schemeClr val="dk2"/>
+            </a:solidFill>
+            <a:ln w="9525" cap="flat" cmpd="sng">
+              <a:solidFill>
+                <a:schemeClr val="dk2"/>
+              </a:solidFill>
+              <a:prstDash val="solid"/>
+              <a:round/>
+              <a:headEnd type="none" w="sm" len="sm"/>
+              <a:tailEnd type="none" w="sm" len="sm"/>
+            </a:ln>
+          </p:spPr>
+          <p:txBody>
+            <a:bodyPr spcFirstLastPara="1" wrap="square" lIns="91425" tIns="91425" rIns="91425" bIns="91425" anchor="ctr" anchorCtr="0">
+              <a:noAutofit/>
+            </a:bodyPr>
+            <a:lstStyle/>
+            <a:p>
+              <a:pPr marL="0" lvl="0" indent="0" algn="l" rtl="0">
+                <a:spcBef>
+                  <a:spcPts val="0"/>
+                </a:spcBef>
+                <a:spcAft>
+                  <a:spcPts val="0"/>
+                </a:spcAft>
+                <a:buNone/>
+              </a:pPr>
+              <a:endParaRPr/>
+            </a:p>
+          </p:txBody>
+        </p:sp>
+        <p:sp>
+          <p:nvSpPr>
+            <p:cNvPr id="417" name="Google Shape;417;p33"/>
+            <p:cNvSpPr/>
+            <p:nvPr/>
+          </p:nvSpPr>
+          <p:spPr>
+            <a:xfrm>
+              <a:off x="8045250" y="3102150"/>
+              <a:ext cx="1116300" cy="9150"/>
+            </a:xfrm>
+            <a:custGeom>
+              <a:avLst/>
+              <a:gdLst/>
+              <a:ahLst/>
+              <a:cxnLst/>
+              <a:rect l="l" t="t" r="r" b="b"/>
+              <a:pathLst>
+                <a:path w="44652" h="366" extrusionOk="0">
+                  <a:moveTo>
+                    <a:pt x="0" y="1"/>
+                  </a:moveTo>
+                  <a:lnTo>
+                    <a:pt x="44652" y="1"/>
+                  </a:lnTo>
+                  <a:lnTo>
+                    <a:pt x="44652" y="366"/>
+                  </a:lnTo>
+                  <a:lnTo>
+                    <a:pt x="0" y="366"/>
+                  </a:lnTo>
+                  <a:close/>
+                </a:path>
+              </a:pathLst>
+            </a:custGeom>
+            <a:solidFill>
+              <a:schemeClr val="dk2"/>
+            </a:solidFill>
+            <a:ln w="9525" cap="flat" cmpd="sng">
+              <a:solidFill>
+                <a:schemeClr val="dk2"/>
+              </a:solidFill>
+              <a:prstDash val="solid"/>
+              <a:round/>
+              <a:headEnd type="none" w="sm" len="sm"/>
+              <a:tailEnd type="none" w="sm" len="sm"/>
+            </a:ln>
+          </p:spPr>
+          <p:txBody>
+            <a:bodyPr spcFirstLastPara="1" wrap="square" lIns="91425" tIns="91425" rIns="91425" bIns="91425" anchor="ctr" anchorCtr="0">
+              <a:noAutofit/>
+            </a:bodyPr>
+            <a:lstStyle/>
+            <a:p>
+              <a:pPr marL="0" lvl="0" indent="0" algn="l" rtl="0">
+                <a:spcBef>
+                  <a:spcPts val="0"/>
+                </a:spcBef>
+                <a:spcAft>
+                  <a:spcPts val="0"/>
+                </a:spcAft>
+                <a:buNone/>
+              </a:pPr>
+              <a:endParaRPr/>
+            </a:p>
+          </p:txBody>
+        </p:sp>
+        <p:sp>
+          <p:nvSpPr>
+            <p:cNvPr id="418" name="Google Shape;418;p33"/>
+            <p:cNvSpPr/>
+            <p:nvPr/>
+          </p:nvSpPr>
+          <p:spPr>
+            <a:xfrm>
+              <a:off x="8061200" y="3017050"/>
+              <a:ext cx="1086675" cy="9900"/>
+            </a:xfrm>
+            <a:custGeom>
+              <a:avLst/>
+              <a:gdLst/>
+              <a:ahLst/>
+              <a:cxnLst/>
+              <a:rect l="l" t="t" r="r" b="b"/>
+              <a:pathLst>
+                <a:path w="43467" h="396" extrusionOk="0">
+                  <a:moveTo>
+                    <a:pt x="1" y="1"/>
+                  </a:moveTo>
+                  <a:lnTo>
+                    <a:pt x="43467" y="1"/>
+                  </a:lnTo>
+                  <a:lnTo>
+                    <a:pt x="43467" y="396"/>
+                  </a:lnTo>
+                  <a:lnTo>
+                    <a:pt x="1" y="396"/>
+                  </a:lnTo>
+                  <a:close/>
+                </a:path>
+              </a:pathLst>
+            </a:custGeom>
+            <a:solidFill>
+              <a:schemeClr val="dk2"/>
+            </a:solidFill>
+            <a:ln w="9525" cap="flat" cmpd="sng">
+              <a:solidFill>
+                <a:schemeClr val="dk2"/>
+              </a:solidFill>
+              <a:prstDash val="solid"/>
+              <a:round/>
+              <a:headEnd type="none" w="sm" len="sm"/>
+              <a:tailEnd type="none" w="sm" len="sm"/>
+            </a:ln>
+          </p:spPr>
+          <p:txBody>
+            <a:bodyPr spcFirstLastPara="1" wrap="square" lIns="91425" tIns="91425" rIns="91425" bIns="91425" anchor="ctr" anchorCtr="0">
+              <a:noAutofit/>
+            </a:bodyPr>
+            <a:lstStyle/>
+            <a:p>
+              <a:pPr marL="0" lvl="0" indent="0" algn="l" rtl="0">
+                <a:spcBef>
+                  <a:spcPts val="0"/>
+                </a:spcBef>
+                <a:spcAft>
+                  <a:spcPts val="0"/>
+                </a:spcAft>
+                <a:buNone/>
+              </a:pPr>
+              <a:endParaRPr/>
+            </a:p>
+          </p:txBody>
+        </p:sp>
+        <p:sp>
+          <p:nvSpPr>
+            <p:cNvPr id="419" name="Google Shape;419;p33"/>
+            <p:cNvSpPr/>
+            <p:nvPr/>
+          </p:nvSpPr>
+          <p:spPr>
+            <a:xfrm>
+              <a:off x="8095400" y="2932700"/>
+              <a:ext cx="1014475" cy="9900"/>
+            </a:xfrm>
+            <a:custGeom>
+              <a:avLst/>
+              <a:gdLst/>
+              <a:ahLst/>
+              <a:cxnLst/>
+              <a:rect l="l" t="t" r="r" b="b"/>
+              <a:pathLst>
+                <a:path w="40579" h="396" extrusionOk="0">
+                  <a:moveTo>
+                    <a:pt x="1" y="1"/>
+                  </a:moveTo>
+                  <a:lnTo>
+                    <a:pt x="40579" y="1"/>
+                  </a:lnTo>
+                  <a:lnTo>
+                    <a:pt x="40579" y="396"/>
+                  </a:lnTo>
+                  <a:lnTo>
+                    <a:pt x="1" y="396"/>
+                  </a:lnTo>
+                  <a:close/>
+                </a:path>
+              </a:pathLst>
+            </a:custGeom>
+            <a:solidFill>
+              <a:schemeClr val="dk2"/>
+            </a:solidFill>
+            <a:ln w="9525" cap="flat" cmpd="sng">
+              <a:solidFill>
+                <a:schemeClr val="dk2"/>
+              </a:solidFill>
+              <a:prstDash val="solid"/>
+              <a:round/>
+              <a:headEnd type="none" w="sm" len="sm"/>
+              <a:tailEnd type="none" w="sm" len="sm"/>
+            </a:ln>
+          </p:spPr>
+          <p:txBody>
+            <a:bodyPr spcFirstLastPara="1" wrap="square" lIns="91425" tIns="91425" rIns="91425" bIns="91425" anchor="ctr" anchorCtr="0">
+              <a:noAutofit/>
+            </a:bodyPr>
+            <a:lstStyle/>
+            <a:p>
+              <a:pPr marL="0" lvl="0" indent="0" algn="l" rtl="0">
+                <a:spcBef>
+                  <a:spcPts val="0"/>
+                </a:spcBef>
+                <a:spcAft>
+                  <a:spcPts val="0"/>
+                </a:spcAft>
+                <a:buNone/>
+              </a:pPr>
+              <a:endParaRPr/>
+            </a:p>
+          </p:txBody>
+        </p:sp>
+        <p:sp>
+          <p:nvSpPr>
+            <p:cNvPr id="420" name="Google Shape;420;p33"/>
+            <p:cNvSpPr/>
+            <p:nvPr/>
+          </p:nvSpPr>
+          <p:spPr>
+            <a:xfrm>
+              <a:off x="8144025" y="2858225"/>
+              <a:ext cx="920275" cy="9925"/>
+            </a:xfrm>
+            <a:custGeom>
+              <a:avLst/>
+              <a:gdLst/>
+              <a:ahLst/>
+              <a:cxnLst/>
+              <a:rect l="l" t="t" r="r" b="b"/>
+              <a:pathLst>
+                <a:path w="36811" h="397" extrusionOk="0">
+                  <a:moveTo>
+                    <a:pt x="1" y="1"/>
+                  </a:moveTo>
+                  <a:lnTo>
+                    <a:pt x="36810" y="1"/>
+                  </a:lnTo>
+                  <a:lnTo>
+                    <a:pt x="36810" y="396"/>
+                  </a:lnTo>
+                  <a:lnTo>
+                    <a:pt x="1" y="396"/>
+                  </a:lnTo>
+                  <a:close/>
+                </a:path>
+              </a:pathLst>
+            </a:custGeom>
+            <a:solidFill>
+              <a:schemeClr val="dk2"/>
+            </a:solidFill>
+            <a:ln w="9525" cap="flat" cmpd="sng">
+              <a:solidFill>
+                <a:schemeClr val="dk2"/>
+              </a:solidFill>
+              <a:prstDash val="solid"/>
+              <a:round/>
+              <a:headEnd type="none" w="sm" len="sm"/>
+              <a:tailEnd type="none" w="sm" len="sm"/>
+            </a:ln>
+          </p:spPr>
+          <p:txBody>
+            <a:bodyPr spcFirstLastPara="1" wrap="square" lIns="91425" tIns="91425" rIns="91425" bIns="91425" anchor="ctr" anchorCtr="0">
+              <a:noAutofit/>
+            </a:bodyPr>
+            <a:lstStyle/>
+            <a:p>
+              <a:pPr marL="0" lvl="0" indent="0" algn="l" rtl="0">
+                <a:spcBef>
+                  <a:spcPts val="0"/>
+                </a:spcBef>
+                <a:spcAft>
+                  <a:spcPts val="0"/>
+                </a:spcAft>
+                <a:buNone/>
+              </a:pPr>
+              <a:endParaRPr/>
+            </a:p>
+          </p:txBody>
+        </p:sp>
+        <p:sp>
+          <p:nvSpPr>
+            <p:cNvPr id="421" name="Google Shape;421;p33"/>
+            <p:cNvSpPr/>
+            <p:nvPr/>
+          </p:nvSpPr>
+          <p:spPr>
+            <a:xfrm>
+              <a:off x="8201025" y="2789850"/>
+              <a:ext cx="804000" cy="9900"/>
+            </a:xfrm>
+            <a:custGeom>
+              <a:avLst/>
+              <a:gdLst/>
+              <a:ahLst/>
+              <a:cxnLst/>
+              <a:rect l="l" t="t" r="r" b="b"/>
+              <a:pathLst>
+                <a:path w="32160" h="396" extrusionOk="0">
+                  <a:moveTo>
+                    <a:pt x="1" y="0"/>
+                  </a:moveTo>
+                  <a:lnTo>
+                    <a:pt x="32159" y="0"/>
+                  </a:lnTo>
+                  <a:lnTo>
+                    <a:pt x="32159" y="395"/>
+                  </a:lnTo>
+                  <a:lnTo>
+                    <a:pt x="1" y="395"/>
+                  </a:lnTo>
+                  <a:close/>
+                </a:path>
+              </a:pathLst>
+            </a:custGeom>
+            <a:solidFill>
+              <a:schemeClr val="dk2"/>
+            </a:solidFill>
+            <a:ln w="9525" cap="flat" cmpd="sng">
+              <a:solidFill>
+                <a:schemeClr val="dk2"/>
+              </a:solidFill>
+              <a:prstDash val="solid"/>
+              <a:round/>
+              <a:headEnd type="none" w="sm" len="sm"/>
+              <a:tailEnd type="none" w="sm" len="sm"/>
+            </a:ln>
+          </p:spPr>
+          <p:txBody>
+            <a:bodyPr spcFirstLastPara="1" wrap="square" lIns="91425" tIns="91425" rIns="91425" bIns="91425" anchor="ctr" anchorCtr="0">
+              <a:noAutofit/>
+            </a:bodyPr>
+            <a:lstStyle/>
+            <a:p>
+              <a:pPr marL="0" lvl="0" indent="0" algn="l" rtl="0">
+                <a:spcBef>
+                  <a:spcPts val="0"/>
+                </a:spcBef>
+                <a:spcAft>
+                  <a:spcPts val="0"/>
+                </a:spcAft>
+                <a:buNone/>
+              </a:pPr>
+              <a:endParaRPr/>
+            </a:p>
+          </p:txBody>
+        </p:sp>
+        <p:sp>
+          <p:nvSpPr>
+            <p:cNvPr id="422" name="Google Shape;422;p33"/>
+            <p:cNvSpPr/>
+            <p:nvPr/>
+          </p:nvSpPr>
+          <p:spPr>
+            <a:xfrm>
+              <a:off x="8270925" y="2728300"/>
+              <a:ext cx="663425" cy="9900"/>
+            </a:xfrm>
+            <a:custGeom>
+              <a:avLst/>
+              <a:gdLst/>
+              <a:ahLst/>
+              <a:cxnLst/>
+              <a:rect l="l" t="t" r="r" b="b"/>
+              <a:pathLst>
+                <a:path w="26537" h="396" extrusionOk="0">
+                  <a:moveTo>
+                    <a:pt x="1" y="0"/>
+                  </a:moveTo>
+                  <a:lnTo>
+                    <a:pt x="26536" y="0"/>
+                  </a:lnTo>
+                  <a:lnTo>
+                    <a:pt x="26536" y="395"/>
+                  </a:lnTo>
+                  <a:lnTo>
+                    <a:pt x="1" y="395"/>
+                  </a:lnTo>
+                  <a:close/>
+                </a:path>
+              </a:pathLst>
+            </a:custGeom>
+            <a:solidFill>
+              <a:schemeClr val="dk2"/>
+            </a:solidFill>
+            <a:ln w="9525" cap="flat" cmpd="sng">
+              <a:solidFill>
+                <a:schemeClr val="dk2"/>
+              </a:solidFill>
+              <a:prstDash val="solid"/>
+              <a:round/>
+              <a:headEnd type="none" w="sm" len="sm"/>
+              <a:tailEnd type="none" w="sm" len="sm"/>
+            </a:ln>
+          </p:spPr>
+          <p:txBody>
+            <a:bodyPr spcFirstLastPara="1" wrap="square" lIns="91425" tIns="91425" rIns="91425" bIns="91425" anchor="ctr" anchorCtr="0">
+              <a:noAutofit/>
+            </a:bodyPr>
+            <a:lstStyle/>
+            <a:p>
+              <a:pPr marL="0" lvl="0" indent="0" algn="l" rtl="0">
+                <a:spcBef>
+                  <a:spcPts val="0"/>
+                </a:spcBef>
+                <a:spcAft>
+                  <a:spcPts val="0"/>
+                </a:spcAft>
+                <a:buNone/>
+              </a:pPr>
+              <a:endParaRPr/>
+            </a:p>
+          </p:txBody>
+        </p:sp>
+        <p:sp>
+          <p:nvSpPr>
+            <p:cNvPr id="423" name="Google Shape;423;p33"/>
+            <p:cNvSpPr/>
+            <p:nvPr/>
+          </p:nvSpPr>
+          <p:spPr>
+            <a:xfrm>
+              <a:off x="8349200" y="2681175"/>
+              <a:ext cx="509150" cy="9150"/>
+            </a:xfrm>
+            <a:custGeom>
+              <a:avLst/>
+              <a:gdLst/>
+              <a:ahLst/>
+              <a:cxnLst/>
+              <a:rect l="l" t="t" r="r" b="b"/>
+              <a:pathLst>
+                <a:path w="20366" h="366" extrusionOk="0">
+                  <a:moveTo>
+                    <a:pt x="1" y="1"/>
+                  </a:moveTo>
+                  <a:lnTo>
+                    <a:pt x="20366" y="1"/>
+                  </a:lnTo>
+                  <a:lnTo>
+                    <a:pt x="20366" y="365"/>
+                  </a:lnTo>
+                  <a:lnTo>
+                    <a:pt x="1" y="365"/>
+                  </a:lnTo>
+                  <a:close/>
+                </a:path>
+              </a:pathLst>
+            </a:custGeom>
+            <a:solidFill>
+              <a:schemeClr val="dk2"/>
+            </a:solidFill>
+            <a:ln w="9525" cap="flat" cmpd="sng">
+              <a:solidFill>
+                <a:schemeClr val="dk2"/>
+              </a:solidFill>
+              <a:prstDash val="solid"/>
+              <a:round/>
+              <a:headEnd type="none" w="sm" len="sm"/>
+              <a:tailEnd type="none" w="sm" len="sm"/>
+            </a:ln>
+          </p:spPr>
+          <p:txBody>
+            <a:bodyPr spcFirstLastPara="1" wrap="square" lIns="91425" tIns="91425" rIns="91425" bIns="91425" anchor="ctr" anchorCtr="0">
+              <a:noAutofit/>
+            </a:bodyPr>
+            <a:lstStyle/>
+            <a:p>
+              <a:pPr marL="0" lvl="0" indent="0" algn="l" rtl="0">
+                <a:spcBef>
+                  <a:spcPts val="0"/>
+                </a:spcBef>
+                <a:spcAft>
+                  <a:spcPts val="0"/>
+                </a:spcAft>
+                <a:buNone/>
+              </a:pPr>
+              <a:endParaRPr/>
+            </a:p>
+          </p:txBody>
+        </p:sp>
+      </p:grpSp>
+      <p:sp>
+        <p:nvSpPr>
+          <p:cNvPr id="424" name="Google Shape;424;p33"/>
+          <p:cNvSpPr/>
+          <p:nvPr/>
+        </p:nvSpPr>
+        <p:spPr>
+          <a:xfrm>
+            <a:off x="5216513" y="3898775"/>
+            <a:ext cx="301828" cy="338622"/>
+          </a:xfrm>
+          <a:custGeom>
+            <a:avLst/>
+            <a:gdLst/>
+            <a:ahLst/>
+            <a:cxnLst/>
+            <a:rect l="l" t="t" r="r" b="b"/>
+            <a:pathLst>
+              <a:path w="22575" h="25327" extrusionOk="0">
+                <a:moveTo>
+                  <a:pt x="10186" y="0"/>
+                </a:moveTo>
+                <a:lnTo>
+                  <a:pt x="8259" y="1927"/>
+                </a:lnTo>
+                <a:lnTo>
+                  <a:pt x="17344" y="11012"/>
+                </a:lnTo>
+                <a:lnTo>
+                  <a:pt x="0" y="11012"/>
+                </a:lnTo>
+                <a:lnTo>
+                  <a:pt x="0" y="13764"/>
+                </a:lnTo>
+                <a:lnTo>
+                  <a:pt x="17344" y="13764"/>
+                </a:lnTo>
+                <a:lnTo>
+                  <a:pt x="8259" y="23124"/>
+                </a:lnTo>
+                <a:lnTo>
+                  <a:pt x="10186" y="25327"/>
+                </a:lnTo>
+                <a:lnTo>
+                  <a:pt x="22574" y="12388"/>
+                </a:lnTo>
+                <a:lnTo>
+                  <a:pt x="10186" y="0"/>
+                </a:lnTo>
+                <a:close/>
+              </a:path>
+            </a:pathLst>
+          </a:custGeom>
+          <a:solidFill>
+            <a:schemeClr val="dk2"/>
+          </a:solidFill>
+          <a:ln>
+            <a:noFill/>
+          </a:ln>
+        </p:spPr>
+        <p:txBody>
+          <a:bodyPr spcFirstLastPara="1" wrap="square" lIns="91425" tIns="91425" rIns="91425" bIns="91425" anchor="ctr" anchorCtr="0">
+            <a:noAutofit/>
+          </a:bodyPr>
+          <a:lstStyle/>
+          <a:p>
+            <a:pPr marL="0" lvl="0" indent="0" algn="l" rtl="0">
+              <a:spcBef>
+                <a:spcPts val="0"/>
+              </a:spcBef>
+              <a:spcAft>
+                <a:spcPts val="0"/>
+              </a:spcAft>
+              <a:buNone/>
+            </a:pPr>
+            <a:endParaRPr/>
+          </a:p>
+        </p:txBody>
+      </p:sp>
+    </p:spTree>
+  </p:cSld>
+  <p:clrMapOvr>
+    <a:masterClrMapping/>
+  </p:clrMapOvr>
+</p:sldLayout>
+</file>
+
 <file path=ppt/slideMasters/slideMaster1.xml><?xml version="1.0" encoding="utf-8"?>
 <p:sldMaster xmlns:a="http://schemas.openxmlformats.org/drawingml/2006/main" xmlns:r="http://schemas.openxmlformats.org/officeDocument/2006/relationships" xmlns:p="http://schemas.openxmlformats.org/presentationml/2006/main">
   <p:cSld name="simple-light-2">
@@ -15662,11 +15053,10 @@
     <p:sldLayoutId id="2147483658" r:id="rId4"/>
     <p:sldLayoutId id="2147483660" r:id="rId5"/>
     <p:sldLayoutId id="2147483664" r:id="rId6"/>
-    <p:sldLayoutId id="2147483666" r:id="rId7"/>
-    <p:sldLayoutId id="2147483668" r:id="rId8"/>
-    <p:sldLayoutId id="2147483678" r:id="rId9"/>
-    <p:sldLayoutId id="2147483679" r:id="rId10"/>
-    <p:sldLayoutId id="2147483680" r:id="rId11"/>
+    <p:sldLayoutId id="2147483668" r:id="rId7"/>
+    <p:sldLayoutId id="2147483678" r:id="rId8"/>
+    <p:sldLayoutId id="2147483679" r:id="rId9"/>
+    <p:sldLayoutId id="2147483680" r:id="rId10"/>
   </p:sldLayoutIdLst>
   <p:hf hdr="0" ftr="0" dt="0"/>
   <p:txStyles>
@@ -20512,13 +19902,13 @@
   <p:clrMapOvr>
     <a:masterClrMapping/>
   </p:clrMapOvr>
-  <mc:AlternateContent xmlns:mc="http://schemas.openxmlformats.org/markup-compatibility/2006">
-    <mc:Choice xmlns:p159="http://schemas.microsoft.com/office/powerpoint/2015/09/main" Requires="p159">
+  <mc:AlternateContent xmlns:mc="http://schemas.openxmlformats.org/markup-compatibility/2006" xmlns:p159="http://schemas.microsoft.com/office/powerpoint/2015/09/main">
+    <mc:Choice Requires="p159">
       <p:transition xmlns:p14="http://schemas.microsoft.com/office/powerpoint/2010/main" spd="slow" p14:dur="2000">
         <p159:morph option="byObject"/>
       </p:transition>
     </mc:Choice>
-    <mc:Fallback>
+    <mc:Fallback xmlns="">
       <p:transition spd="slow">
         <p:fade/>
       </p:transition>
@@ -21984,13 +21374,13 @@
   <p:clrMapOvr>
     <a:masterClrMapping/>
   </p:clrMapOvr>
-  <mc:AlternateContent xmlns:mc="http://schemas.openxmlformats.org/markup-compatibility/2006">
-    <mc:Choice xmlns:p159="http://schemas.microsoft.com/office/powerpoint/2015/09/main" Requires="p159">
+  <mc:AlternateContent xmlns:mc="http://schemas.openxmlformats.org/markup-compatibility/2006" xmlns:p159="http://schemas.microsoft.com/office/powerpoint/2015/09/main">
+    <mc:Choice Requires="p159">
       <p:transition xmlns:p14="http://schemas.microsoft.com/office/powerpoint/2010/main" spd="slow" p14:dur="2000">
         <p159:morph option="byObject"/>
       </p:transition>
     </mc:Choice>
-    <mc:Fallback>
+    <mc:Fallback xmlns="">
       <p:transition spd="slow">
         <p:fade/>
       </p:transition>
@@ -23859,13 +23249,13 @@
   <p:clrMapOvr>
     <a:masterClrMapping/>
   </p:clrMapOvr>
-  <mc:AlternateContent xmlns:mc="http://schemas.openxmlformats.org/markup-compatibility/2006">
-    <mc:Choice xmlns:p159="http://schemas.microsoft.com/office/powerpoint/2015/09/main" Requires="p159">
+  <mc:AlternateContent xmlns:mc="http://schemas.openxmlformats.org/markup-compatibility/2006" xmlns:p159="http://schemas.microsoft.com/office/powerpoint/2015/09/main">
+    <mc:Choice Requires="p159">
       <p:transition xmlns:p14="http://schemas.microsoft.com/office/powerpoint/2010/main" spd="slow" p14:dur="2000">
         <p159:morph option="byObject"/>
       </p:transition>
     </mc:Choice>
-    <mc:Fallback>
+    <mc:Fallback xmlns="">
       <p:transition spd="slow">
         <p:fade/>
       </p:transition>
@@ -25783,13 +25173,13 @@
   <p:clrMapOvr>
     <a:masterClrMapping/>
   </p:clrMapOvr>
-  <mc:AlternateContent xmlns:mc="http://schemas.openxmlformats.org/markup-compatibility/2006">
-    <mc:Choice xmlns:p159="http://schemas.microsoft.com/office/powerpoint/2015/09/main" Requires="p159">
+  <mc:AlternateContent xmlns:mc="http://schemas.openxmlformats.org/markup-compatibility/2006" xmlns:p159="http://schemas.microsoft.com/office/powerpoint/2015/09/main">
+    <mc:Choice Requires="p159">
       <p:transition xmlns:p14="http://schemas.microsoft.com/office/powerpoint/2010/main" spd="slow" p14:dur="2000">
         <p159:morph option="byObject"/>
       </p:transition>
     </mc:Choice>
-    <mc:Fallback>
+    <mc:Fallback xmlns="">
       <p:transition spd="slow">
         <p:fade/>
       </p:transition>
@@ -27645,13 +27035,13 @@
   <p:clrMapOvr>
     <a:masterClrMapping/>
   </p:clrMapOvr>
-  <mc:AlternateContent xmlns:mc="http://schemas.openxmlformats.org/markup-compatibility/2006">
-    <mc:Choice xmlns:p159="http://schemas.microsoft.com/office/powerpoint/2015/09/main" Requires="p159">
+  <mc:AlternateContent xmlns:mc="http://schemas.openxmlformats.org/markup-compatibility/2006" xmlns:p159="http://schemas.microsoft.com/office/powerpoint/2015/09/main">
+    <mc:Choice Requires="p159">
       <p:transition xmlns:p14="http://schemas.microsoft.com/office/powerpoint/2010/main" spd="slow" p14:dur="2000">
         <p159:morph option="byObject"/>
       </p:transition>
     </mc:Choice>
-    <mc:Fallback>
+    <mc:Fallback xmlns="">
       <p:transition spd="slow">
         <p:fade/>
       </p:transition>
@@ -29023,13 +28413,13 @@
   <p:clrMapOvr>
     <a:masterClrMapping/>
   </p:clrMapOvr>
-  <mc:AlternateContent xmlns:mc="http://schemas.openxmlformats.org/markup-compatibility/2006">
-    <mc:Choice xmlns:p159="http://schemas.microsoft.com/office/powerpoint/2015/09/main" Requires="p159">
+  <mc:AlternateContent xmlns:mc="http://schemas.openxmlformats.org/markup-compatibility/2006" xmlns:p159="http://schemas.microsoft.com/office/powerpoint/2015/09/main">
+    <mc:Choice Requires="p159">
       <p:transition xmlns:p14="http://schemas.microsoft.com/office/powerpoint/2010/main" spd="slow" p14:dur="2000">
         <p159:morph option="byObject"/>
       </p:transition>
     </mc:Choice>
-    <mc:Fallback>
+    <mc:Fallback xmlns="">
       <p:transition spd="slow">
         <p:fade/>
       </p:transition>
@@ -30633,13 +30023,13 @@
   <p:clrMapOvr>
     <a:masterClrMapping/>
   </p:clrMapOvr>
-  <mc:AlternateContent xmlns:mc="http://schemas.openxmlformats.org/markup-compatibility/2006">
-    <mc:Choice xmlns:p159="http://schemas.microsoft.com/office/powerpoint/2015/09/main" Requires="p159">
+  <mc:AlternateContent xmlns:mc="http://schemas.openxmlformats.org/markup-compatibility/2006" xmlns:p159="http://schemas.microsoft.com/office/powerpoint/2015/09/main">
+    <mc:Choice Requires="p159">
       <p:transition xmlns:p14="http://schemas.microsoft.com/office/powerpoint/2010/main" spd="slow" p14:dur="2000">
         <p159:morph option="byObject"/>
       </p:transition>
     </mc:Choice>
-    <mc:Fallback>
+    <mc:Fallback xmlns="">
       <p:transition spd="slow">
         <p:fade/>
       </p:transition>
@@ -31973,13 +31363,13 @@
   <p:clrMapOvr>
     <a:masterClrMapping/>
   </p:clrMapOvr>
-  <mc:AlternateContent xmlns:mc="http://schemas.openxmlformats.org/markup-compatibility/2006">
-    <mc:Choice xmlns:p159="http://schemas.microsoft.com/office/powerpoint/2015/09/main" Requires="p159">
+  <mc:AlternateContent xmlns:mc="http://schemas.openxmlformats.org/markup-compatibility/2006" xmlns:p159="http://schemas.microsoft.com/office/powerpoint/2015/09/main">
+    <mc:Choice Requires="p159">
       <p:transition xmlns:p14="http://schemas.microsoft.com/office/powerpoint/2010/main" spd="slow" p14:dur="2000">
         <p159:morph option="byObject"/>
       </p:transition>
     </mc:Choice>
-    <mc:Fallback>
+    <mc:Fallback xmlns="">
       <p:transition spd="slow">
         <p:fade/>
       </p:transition>
@@ -32823,13 +32213,13 @@
   <p:clrMapOvr>
     <a:masterClrMapping/>
   </p:clrMapOvr>
-  <mc:AlternateContent xmlns:mc="http://schemas.openxmlformats.org/markup-compatibility/2006">
-    <mc:Choice xmlns:p159="http://schemas.microsoft.com/office/powerpoint/2015/09/main" Requires="p159">
+  <mc:AlternateContent xmlns:mc="http://schemas.openxmlformats.org/markup-compatibility/2006" xmlns:p159="http://schemas.microsoft.com/office/powerpoint/2015/09/main">
+    <mc:Choice Requires="p159">
       <p:transition xmlns:p14="http://schemas.microsoft.com/office/powerpoint/2010/main" spd="slow" p14:dur="2000">
         <p159:morph option="byObject"/>
       </p:transition>
     </mc:Choice>
-    <mc:Fallback>
+    <mc:Fallback xmlns="">
       <p:transition spd="slow">
         <p:fade/>
       </p:transition>
@@ -33137,10 +32527,10 @@
               <a:buNone/>
             </a:pPr>
             <a:r>
-              <a:rPr lang="en"/>
-              <a:t>Ferramentas</a:t>
+              <a:rPr lang="en" dirty="0"/>
+              <a:t>DataSets</a:t>
             </a:r>
-            <a:endParaRPr>
+            <a:endParaRPr dirty="0">
               <a:solidFill>
                 <a:schemeClr val="lt1"/>
               </a:solidFill>
@@ -33160,8 +32550,8 @@
         </p:nvSpPr>
         <p:spPr>
           <a:xfrm>
-            <a:off x="3819893" y="1166825"/>
-            <a:ext cx="1504200" cy="841800"/>
+            <a:off x="3762977" y="1166825"/>
+            <a:ext cx="1618016" cy="841800"/>
           </a:xfrm>
           <a:prstGeom prst="rect">
             <a:avLst/>
@@ -33183,10 +32573,10 @@
               <a:buNone/>
             </a:pPr>
             <a:r>
-              <a:rPr lang="en"/>
-              <a:t>04</a:t>
+              <a:rPr lang="en" dirty="0"/>
+              <a:t>03</a:t>
             </a:r>
-            <a:endParaRPr/>
+            <a:endParaRPr dirty="0"/>
           </a:p>
         </p:txBody>
       </p:sp>
@@ -33225,14 +32615,14 @@
               <a:buNone/>
             </a:pPr>
             <a:r>
-              <a:rPr lang="en" sz="1100">
+              <a:rPr lang="en" sz="1100" dirty="0">
                 <a:solidFill>
                   <a:schemeClr val="lt1"/>
                 </a:solidFill>
               </a:rPr>
-              <a:t>Ferramentas comuns em projetos de CRISP-DM</a:t>
+              <a:t>DataSets</a:t>
             </a:r>
-            <a:endParaRPr sz="1100">
+            <a:endParaRPr sz="1100" dirty="0">
               <a:solidFill>
                 <a:schemeClr val="lt1"/>
               </a:solidFill>
@@ -33435,13 +32825,13 @@
   <p:clrMapOvr>
     <a:masterClrMapping/>
   </p:clrMapOvr>
-  <mc:AlternateContent xmlns:mc="http://schemas.openxmlformats.org/markup-compatibility/2006">
-    <mc:Choice xmlns:p159="http://schemas.microsoft.com/office/powerpoint/2015/09/main" Requires="p159">
+  <mc:AlternateContent xmlns:mc="http://schemas.openxmlformats.org/markup-compatibility/2006" xmlns:p159="http://schemas.microsoft.com/office/powerpoint/2015/09/main">
+    <mc:Choice Requires="p159">
       <p:transition xmlns:p14="http://schemas.microsoft.com/office/powerpoint/2010/main" spd="slow" p14:dur="2000">
         <p159:morph option="byObject"/>
       </p:transition>
     </mc:Choice>
-    <mc:Fallback>
+    <mc:Fallback xmlns="">
       <p:transition spd="slow">
         <p:fade/>
       </p:transition>
@@ -33467,156 +32857,12 @@
           <a:chExt cx="0" cy="0"/>
         </a:xfrm>
       </p:grpSpPr>
-      <p:pic>
-        <p:nvPicPr>
-          <p:cNvPr id="7170" name="Picture 2">
+      <p:sp>
+        <p:nvSpPr>
+          <p:cNvPr id="4" name="Google Shape;1041;p60">
             <a:extLst>
               <a:ext uri="{FF2B5EF4-FFF2-40B4-BE49-F238E27FC236}">
-                <a16:creationId xmlns:a16="http://schemas.microsoft.com/office/drawing/2014/main" id="{707071D3-AA78-08B1-E807-48DB6148FA1B}"/>
-              </a:ext>
-            </a:extLst>
-          </p:cNvPr>
-          <p:cNvPicPr>
-            <a:picLocks noChangeAspect="1" noChangeArrowheads="1"/>
-          </p:cNvPicPr>
-          <p:nvPr/>
-        </p:nvPicPr>
-        <p:blipFill rotWithShape="1">
-          <a:blip r:embed="rId2">
-            <a:extLst>
-              <a:ext uri="{28A0092B-C50C-407E-A947-70E740481C1C}">
-                <a14:useLocalDpi xmlns:a14="http://schemas.microsoft.com/office/drawing/2010/main" val="0"/>
-              </a:ext>
-            </a:extLst>
-          </a:blip>
-          <a:srcRect r="7840" b="13726"/>
-          <a:stretch/>
-        </p:blipFill>
-        <p:spPr bwMode="auto">
-          <a:xfrm>
-            <a:off x="1285836" y="1727004"/>
-            <a:ext cx="525565" cy="540000"/>
-          </a:xfrm>
-          <a:prstGeom prst="rect">
-            <a:avLst/>
-          </a:prstGeom>
-          <a:noFill/>
-          <a:extLst>
-            <a:ext uri="{909E8E84-426E-40DD-AFC4-6F175D3DCCD1}">
-              <a14:hiddenFill xmlns:a14="http://schemas.microsoft.com/office/drawing/2010/main">
-                <a:solidFill>
-                  <a:srgbClr val="FFFFFF"/>
-                </a:solidFill>
-              </a14:hiddenFill>
-            </a:ext>
-          </a:extLst>
-        </p:spPr>
-      </p:pic>
-      <p:pic>
-        <p:nvPicPr>
-          <p:cNvPr id="7172" name="Picture 4" descr="R (linguagem de programação) – Wikipédia, a enciclopédia livre">
-            <a:extLst>
-              <a:ext uri="{FF2B5EF4-FFF2-40B4-BE49-F238E27FC236}">
-                <a16:creationId xmlns:a16="http://schemas.microsoft.com/office/drawing/2014/main" id="{C349F3F2-3742-E909-56E7-8204239E5900}"/>
-              </a:ext>
-            </a:extLst>
-          </p:cNvPr>
-          <p:cNvPicPr>
-            <a:picLocks noChangeAspect="1" noChangeArrowheads="1"/>
-          </p:cNvPicPr>
-          <p:nvPr/>
-        </p:nvPicPr>
-        <p:blipFill>
-          <a:blip r:embed="rId3">
-            <a:extLst>
-              <a:ext uri="{28A0092B-C50C-407E-A947-70E740481C1C}">
-                <a14:useLocalDpi xmlns:a14="http://schemas.microsoft.com/office/drawing/2010/main" val="0"/>
-              </a:ext>
-            </a:extLst>
-          </a:blip>
-          <a:srcRect/>
-          <a:stretch>
-            <a:fillRect/>
-          </a:stretch>
-        </p:blipFill>
-        <p:spPr bwMode="auto">
-          <a:xfrm>
-            <a:off x="2211081" y="1695322"/>
-            <a:ext cx="696833" cy="540000"/>
-          </a:xfrm>
-          <a:prstGeom prst="rect">
-            <a:avLst/>
-          </a:prstGeom>
-          <a:noFill/>
-          <a:extLst>
-            <a:ext uri="{909E8E84-426E-40DD-AFC4-6F175D3DCCD1}">
-              <a14:hiddenFill xmlns:a14="http://schemas.microsoft.com/office/drawing/2010/main">
-                <a:solidFill>
-                  <a:srgbClr val="FFFFFF"/>
-                </a:solidFill>
-              </a14:hiddenFill>
-            </a:ext>
-          </a:extLst>
-        </p:spPr>
-      </p:pic>
-      <p:sp>
-        <p:nvSpPr>
-          <p:cNvPr id="7" name="Google Shape;593;p45">
-            <a:extLst>
-              <a:ext uri="{FF2B5EF4-FFF2-40B4-BE49-F238E27FC236}">
-                <a16:creationId xmlns:a16="http://schemas.microsoft.com/office/drawing/2014/main" id="{EDA39C3B-08AD-0945-B496-351642B0E9C5}"/>
-              </a:ext>
-            </a:extLst>
-          </p:cNvPr>
-          <p:cNvSpPr/>
-          <p:nvPr/>
-        </p:nvSpPr>
-        <p:spPr>
-          <a:xfrm>
-            <a:off x="1071465" y="1578051"/>
-            <a:ext cx="2047705" cy="754382"/>
-          </a:xfrm>
-          <a:prstGeom prst="roundRect">
-            <a:avLst>
-              <a:gd name="adj" fmla="val 16667"/>
-            </a:avLst>
-          </a:prstGeom>
-          <a:noFill/>
-          <a:ln w="28575" cap="flat" cmpd="sng">
-            <a:solidFill>
-              <a:schemeClr val="lt2"/>
-            </a:solidFill>
-            <a:prstDash val="solid"/>
-            <a:round/>
-            <a:headEnd type="none" w="sm" len="sm"/>
-            <a:tailEnd type="none" w="sm" len="sm"/>
-          </a:ln>
-        </p:spPr>
-        <p:txBody>
-          <a:bodyPr spcFirstLastPara="1" wrap="square" lIns="91425" tIns="91425" rIns="91425" bIns="91425" anchor="ctr" anchorCtr="0">
-            <a:noAutofit/>
-          </a:bodyPr>
-          <a:lstStyle/>
-          <a:p>
-            <a:pPr marL="0" lvl="0" indent="0" algn="l" rtl="0">
-              <a:spcBef>
-                <a:spcPts val="0"/>
-              </a:spcBef>
-              <a:spcAft>
-                <a:spcPts val="0"/>
-              </a:spcAft>
-              <a:buNone/>
-            </a:pPr>
-            <a:endParaRPr sz="1100"/>
-          </a:p>
-        </p:txBody>
-      </p:sp>
-      <p:sp>
-        <p:nvSpPr>
-          <p:cNvPr id="8" name="Google Shape;599;p45">
-            <a:extLst>
-              <a:ext uri="{FF2B5EF4-FFF2-40B4-BE49-F238E27FC236}">
-                <a16:creationId xmlns:a16="http://schemas.microsoft.com/office/drawing/2014/main" id="{790B3415-83C8-D14A-40AD-64A9864A586D}"/>
+                <a16:creationId xmlns:a16="http://schemas.microsoft.com/office/drawing/2014/main" id="{457426FA-6B3F-DC24-F2BB-6F5A7ED15814}"/>
               </a:ext>
             </a:extLst>
           </p:cNvPr>
@@ -33627,8 +32873,8 @@
         </p:nvSpPr>
         <p:spPr>
           <a:xfrm>
-            <a:off x="824700" y="1073745"/>
-            <a:ext cx="2663666" cy="527700"/>
+            <a:off x="2871226" y="2301899"/>
+            <a:ext cx="3401547" cy="539702"/>
           </a:xfrm>
           <a:prstGeom prst="rect">
             <a:avLst/>
@@ -33870,869 +33116,41 @@
           <a:p>
             <a:pPr algn="ctr"/>
             <a:r>
-              <a:rPr lang="pt-PT" sz="1100" b="1">
-                <a:solidFill>
-                  <a:srgbClr val="E84987"/>
-                </a:solidFill>
+              <a:rPr lang="pt-PT" sz="4000" b="1">
                 <a:latin typeface="Orbitron" panose="020B0604020202020204" charset="0"/>
               </a:rPr>
-              <a:t>Linguagens de Programação mais utilizadas</a:t>
-            </a:r>
-          </a:p>
-        </p:txBody>
-      </p:sp>
-      <p:sp>
-        <p:nvSpPr>
-          <p:cNvPr id="14" name="Arrow: Right 13">
-            <a:extLst>
-              <a:ext uri="{FF2B5EF4-FFF2-40B4-BE49-F238E27FC236}">
-                <a16:creationId xmlns:a16="http://schemas.microsoft.com/office/drawing/2014/main" id="{54EF14DE-31F7-8F42-7B77-9747488B3E3B}"/>
-              </a:ext>
-            </a:extLst>
-          </p:cNvPr>
-          <p:cNvSpPr/>
-          <p:nvPr/>
-        </p:nvSpPr>
-        <p:spPr>
-          <a:xfrm>
-            <a:off x="3457388" y="1660347"/>
-            <a:ext cx="985194" cy="589790"/>
-          </a:xfrm>
-          <a:prstGeom prst="rightArrow">
-            <a:avLst/>
-          </a:prstGeom>
-        </p:spPr>
-        <p:style>
-          <a:lnRef idx="2">
-            <a:schemeClr val="accent4"/>
-          </a:lnRef>
-          <a:fillRef idx="1">
-            <a:schemeClr val="lt1"/>
-          </a:fillRef>
-          <a:effectRef idx="0">
-            <a:schemeClr val="accent4"/>
-          </a:effectRef>
-          <a:fontRef idx="minor">
-            <a:schemeClr val="dk1"/>
-          </a:fontRef>
-        </p:style>
-        <p:txBody>
-          <a:bodyPr rtlCol="0" anchor="ctr"/>
-          <a:lstStyle/>
-          <a:p>
-            <a:pPr algn="ctr"/>
-            <a:endParaRPr lang="en-US" sz="1100"/>
-          </a:p>
-        </p:txBody>
-      </p:sp>
-      <p:pic>
-        <p:nvPicPr>
-          <p:cNvPr id="7174" name="Picture 6" descr="Projeto Jupyter – Wikipédia, a enciclopédia livre">
-            <a:extLst>
-              <a:ext uri="{FF2B5EF4-FFF2-40B4-BE49-F238E27FC236}">
-                <a16:creationId xmlns:a16="http://schemas.microsoft.com/office/drawing/2014/main" id="{7B3B74E9-2FDB-4D58-4C91-1F58F3E2CA48}"/>
-              </a:ext>
-            </a:extLst>
-          </p:cNvPr>
-          <p:cNvPicPr>
-            <a:picLocks noChangeAspect="1" noChangeArrowheads="1"/>
-          </p:cNvPicPr>
-          <p:nvPr/>
-        </p:nvPicPr>
-        <p:blipFill>
-          <a:blip r:embed="rId4">
-            <a:extLst>
-              <a:ext uri="{28A0092B-C50C-407E-A947-70E740481C1C}">
-                <a14:useLocalDpi xmlns:a14="http://schemas.microsoft.com/office/drawing/2010/main" val="0"/>
-              </a:ext>
-            </a:extLst>
-          </a:blip>
-          <a:srcRect/>
-          <a:stretch>
-            <a:fillRect/>
-          </a:stretch>
-        </p:blipFill>
-        <p:spPr bwMode="auto">
-          <a:xfrm>
-            <a:off x="4780800" y="1642267"/>
-            <a:ext cx="621111" cy="720000"/>
-          </a:xfrm>
-          <a:prstGeom prst="rect">
-            <a:avLst/>
-          </a:prstGeom>
-          <a:noFill/>
-          <a:extLst>
-            <a:ext uri="{909E8E84-426E-40DD-AFC4-6F175D3DCCD1}">
-              <a14:hiddenFill xmlns:a14="http://schemas.microsoft.com/office/drawing/2010/main">
-                <a:solidFill>
-                  <a:srgbClr val="FFFFFF"/>
-                </a:solidFill>
-              </a14:hiddenFill>
-            </a:ext>
-          </a:extLst>
-        </p:spPr>
-      </p:pic>
-      <p:pic>
-        <p:nvPicPr>
-          <p:cNvPr id="7178" name="Picture 10">
-            <a:extLst>
-              <a:ext uri="{FF2B5EF4-FFF2-40B4-BE49-F238E27FC236}">
-                <a16:creationId xmlns:a16="http://schemas.microsoft.com/office/drawing/2014/main" id="{D0BF3D91-F48A-E105-6795-2091E8926413}"/>
-              </a:ext>
-            </a:extLst>
-          </p:cNvPr>
-          <p:cNvPicPr>
-            <a:picLocks noChangeAspect="1" noChangeArrowheads="1"/>
-          </p:cNvPicPr>
-          <p:nvPr/>
-        </p:nvPicPr>
-        <p:blipFill>
-          <a:blip r:embed="rId5">
-            <a:extLst>
-              <a:ext uri="{28A0092B-C50C-407E-A947-70E740481C1C}">
-                <a14:useLocalDpi xmlns:a14="http://schemas.microsoft.com/office/drawing/2010/main" val="0"/>
-              </a:ext>
-            </a:extLst>
-          </a:blip>
-          <a:srcRect/>
-          <a:stretch>
-            <a:fillRect/>
-          </a:stretch>
-        </p:blipFill>
-        <p:spPr bwMode="auto">
-          <a:xfrm>
-            <a:off x="724687" y="4005053"/>
-            <a:ext cx="1155853" cy="540000"/>
-          </a:xfrm>
-          <a:prstGeom prst="rect">
-            <a:avLst/>
-          </a:prstGeom>
-          <a:noFill/>
-          <a:extLst>
-            <a:ext uri="{909E8E84-426E-40DD-AFC4-6F175D3DCCD1}">
-              <a14:hiddenFill xmlns:a14="http://schemas.microsoft.com/office/drawing/2010/main">
-                <a:solidFill>
-                  <a:srgbClr val="FFFFFF"/>
-                </a:solidFill>
-              </a14:hiddenFill>
-            </a:ext>
-          </a:extLst>
-        </p:spPr>
-      </p:pic>
-      <p:sp>
-        <p:nvSpPr>
-          <p:cNvPr id="17" name="Google Shape;593;p45">
-            <a:extLst>
-              <a:ext uri="{FF2B5EF4-FFF2-40B4-BE49-F238E27FC236}">
-                <a16:creationId xmlns:a16="http://schemas.microsoft.com/office/drawing/2014/main" id="{C9C54EF7-7AEE-2571-1B81-A6D75EF03505}"/>
-              </a:ext>
-            </a:extLst>
-          </p:cNvPr>
-          <p:cNvSpPr/>
-          <p:nvPr/>
-        </p:nvSpPr>
-        <p:spPr>
-          <a:xfrm>
-            <a:off x="632428" y="3897862"/>
-            <a:ext cx="2925783" cy="754382"/>
-          </a:xfrm>
-          <a:prstGeom prst="roundRect">
-            <a:avLst>
-              <a:gd name="adj" fmla="val 16667"/>
-            </a:avLst>
-          </a:prstGeom>
-          <a:noFill/>
-          <a:ln w="28575" cap="flat" cmpd="sng">
-            <a:solidFill>
-              <a:schemeClr val="lt2"/>
-            </a:solidFill>
-            <a:prstDash val="solid"/>
-            <a:round/>
-            <a:headEnd type="none" w="sm" len="sm"/>
-            <a:tailEnd type="none" w="sm" len="sm"/>
-          </a:ln>
-        </p:spPr>
-        <p:txBody>
-          <a:bodyPr spcFirstLastPara="1" wrap="square" lIns="91425" tIns="91425" rIns="91425" bIns="91425" anchor="ctr" anchorCtr="0">
-            <a:noAutofit/>
-          </a:bodyPr>
-          <a:lstStyle/>
-          <a:p>
-            <a:pPr marL="0" lvl="0" indent="0" algn="l" rtl="0">
-              <a:spcBef>
-                <a:spcPts val="0"/>
-              </a:spcBef>
-              <a:spcAft>
-                <a:spcPts val="0"/>
-              </a:spcAft>
-              <a:buNone/>
-            </a:pPr>
-            <a:endParaRPr sz="1100"/>
-          </a:p>
-        </p:txBody>
-      </p:sp>
-      <p:sp>
-        <p:nvSpPr>
-          <p:cNvPr id="18" name="Arrow: Right 17">
-            <a:extLst>
-              <a:ext uri="{FF2B5EF4-FFF2-40B4-BE49-F238E27FC236}">
-                <a16:creationId xmlns:a16="http://schemas.microsoft.com/office/drawing/2014/main" id="{7C93514E-8500-E1A2-9010-64A8D13EFDC0}"/>
-              </a:ext>
-            </a:extLst>
-          </p:cNvPr>
-          <p:cNvSpPr/>
-          <p:nvPr/>
-        </p:nvSpPr>
-        <p:spPr>
-          <a:xfrm rot="16200000">
-            <a:off x="1575657" y="2798947"/>
-            <a:ext cx="1044184" cy="589790"/>
-          </a:xfrm>
-          <a:prstGeom prst="rightArrow">
-            <a:avLst/>
-          </a:prstGeom>
-        </p:spPr>
-        <p:style>
-          <a:lnRef idx="2">
-            <a:schemeClr val="accent4"/>
-          </a:lnRef>
-          <a:fillRef idx="1">
-            <a:schemeClr val="lt1"/>
-          </a:fillRef>
-          <a:effectRef idx="0">
-            <a:schemeClr val="accent4"/>
-          </a:effectRef>
-          <a:fontRef idx="minor">
-            <a:schemeClr val="dk1"/>
-          </a:fontRef>
-        </p:style>
-        <p:txBody>
-          <a:bodyPr rtlCol="0" anchor="ctr"/>
-          <a:lstStyle/>
-          <a:p>
-            <a:pPr algn="ctr"/>
-            <a:endParaRPr lang="en-US" sz="1100"/>
-          </a:p>
-        </p:txBody>
-      </p:sp>
-      <p:sp>
-        <p:nvSpPr>
-          <p:cNvPr id="19" name="Google Shape;599;p45">
-            <a:extLst>
-              <a:ext uri="{FF2B5EF4-FFF2-40B4-BE49-F238E27FC236}">
-                <a16:creationId xmlns:a16="http://schemas.microsoft.com/office/drawing/2014/main" id="{F76E1A8B-0648-291D-5D26-F3BC6DCF8637}"/>
-              </a:ext>
-            </a:extLst>
-          </p:cNvPr>
-          <p:cNvSpPr txBox="1">
-            <a:spLocks/>
-          </p:cNvSpPr>
-          <p:nvPr/>
-        </p:nvSpPr>
-        <p:spPr>
-          <a:xfrm>
-            <a:off x="3457387" y="3979249"/>
-            <a:ext cx="1809955" cy="712354"/>
-          </a:xfrm>
-          <a:prstGeom prst="rect">
-            <a:avLst/>
-          </a:prstGeom>
-        </p:spPr>
-        <p:txBody>
-          <a:bodyPr spcFirstLastPara="1" wrap="square" lIns="91425" tIns="91425" rIns="91425" bIns="91425" anchor="ctr" anchorCtr="0">
-            <a:noAutofit/>
-          </a:bodyPr>
-          <a:lstStyle>
-            <a:defPPr marR="0" lvl="0" algn="l" rtl="0">
-              <a:lnSpc>
-                <a:spcPct val="100000"/>
-              </a:lnSpc>
-              <a:spcBef>
-                <a:spcPts val="0"/>
-              </a:spcBef>
-              <a:spcAft>
-                <a:spcPts val="0"/>
-              </a:spcAft>
-            </a:defPPr>
-            <a:lvl1pPr marR="0" lvl="0" algn="l" rtl="0">
-              <a:lnSpc>
-                <a:spcPct val="100000"/>
-              </a:lnSpc>
-              <a:spcBef>
-                <a:spcPts val="0"/>
-              </a:spcBef>
-              <a:spcAft>
-                <a:spcPts val="0"/>
-              </a:spcAft>
-              <a:buClr>
-                <a:srgbClr val="000000"/>
-              </a:buClr>
-              <a:buFont typeface="Arial"/>
-              <a:defRPr sz="1400" b="0" i="0" u="none" strike="noStrike" cap="none">
-                <a:solidFill>
-                  <a:srgbClr val="000000"/>
-                </a:solidFill>
-                <a:latin typeface="Arial"/>
-                <a:ea typeface="Arial"/>
-                <a:cs typeface="Arial"/>
-                <a:sym typeface="Arial"/>
-              </a:defRPr>
-            </a:lvl1pPr>
-            <a:lvl2pPr marR="0" lvl="1" algn="l" rtl="0">
-              <a:lnSpc>
-                <a:spcPct val="100000"/>
-              </a:lnSpc>
-              <a:spcBef>
-                <a:spcPts val="0"/>
-              </a:spcBef>
-              <a:spcAft>
-                <a:spcPts val="0"/>
-              </a:spcAft>
-              <a:buClr>
-                <a:srgbClr val="000000"/>
-              </a:buClr>
-              <a:buFont typeface="Arial"/>
-              <a:defRPr sz="1400" b="0" i="0" u="none" strike="noStrike" cap="none">
-                <a:solidFill>
-                  <a:srgbClr val="000000"/>
-                </a:solidFill>
-                <a:latin typeface="Arial"/>
-                <a:ea typeface="Arial"/>
-                <a:cs typeface="Arial"/>
-                <a:sym typeface="Arial"/>
-              </a:defRPr>
-            </a:lvl2pPr>
-            <a:lvl3pPr marR="0" lvl="2" algn="l" rtl="0">
-              <a:lnSpc>
-                <a:spcPct val="100000"/>
-              </a:lnSpc>
-              <a:spcBef>
-                <a:spcPts val="0"/>
-              </a:spcBef>
-              <a:spcAft>
-                <a:spcPts val="0"/>
-              </a:spcAft>
-              <a:buClr>
-                <a:srgbClr val="000000"/>
-              </a:buClr>
-              <a:buFont typeface="Arial"/>
-              <a:defRPr sz="1400" b="0" i="0" u="none" strike="noStrike" cap="none">
-                <a:solidFill>
-                  <a:srgbClr val="000000"/>
-                </a:solidFill>
-                <a:latin typeface="Arial"/>
-                <a:ea typeface="Arial"/>
-                <a:cs typeface="Arial"/>
-                <a:sym typeface="Arial"/>
-              </a:defRPr>
-            </a:lvl3pPr>
-            <a:lvl4pPr marR="0" lvl="3" algn="l" rtl="0">
-              <a:lnSpc>
-                <a:spcPct val="100000"/>
-              </a:lnSpc>
-              <a:spcBef>
-                <a:spcPts val="0"/>
-              </a:spcBef>
-              <a:spcAft>
-                <a:spcPts val="0"/>
-              </a:spcAft>
-              <a:buClr>
-                <a:srgbClr val="000000"/>
-              </a:buClr>
-              <a:buFont typeface="Arial"/>
-              <a:defRPr sz="1400" b="0" i="0" u="none" strike="noStrike" cap="none">
-                <a:solidFill>
-                  <a:srgbClr val="000000"/>
-                </a:solidFill>
-                <a:latin typeface="Arial"/>
-                <a:ea typeface="Arial"/>
-                <a:cs typeface="Arial"/>
-                <a:sym typeface="Arial"/>
-              </a:defRPr>
-            </a:lvl4pPr>
-            <a:lvl5pPr marR="0" lvl="4" algn="l" rtl="0">
-              <a:lnSpc>
-                <a:spcPct val="100000"/>
-              </a:lnSpc>
-              <a:spcBef>
-                <a:spcPts val="0"/>
-              </a:spcBef>
-              <a:spcAft>
-                <a:spcPts val="0"/>
-              </a:spcAft>
-              <a:buClr>
-                <a:srgbClr val="000000"/>
-              </a:buClr>
-              <a:buFont typeface="Arial"/>
-              <a:defRPr sz="1400" b="0" i="0" u="none" strike="noStrike" cap="none">
-                <a:solidFill>
-                  <a:srgbClr val="000000"/>
-                </a:solidFill>
-                <a:latin typeface="Arial"/>
-                <a:ea typeface="Arial"/>
-                <a:cs typeface="Arial"/>
-                <a:sym typeface="Arial"/>
-              </a:defRPr>
-            </a:lvl5pPr>
-            <a:lvl6pPr marR="0" lvl="5" algn="l" rtl="0">
-              <a:lnSpc>
-                <a:spcPct val="100000"/>
-              </a:lnSpc>
-              <a:spcBef>
-                <a:spcPts val="0"/>
-              </a:spcBef>
-              <a:spcAft>
-                <a:spcPts val="0"/>
-              </a:spcAft>
-              <a:buClr>
-                <a:srgbClr val="000000"/>
-              </a:buClr>
-              <a:buFont typeface="Arial"/>
-              <a:defRPr sz="1400" b="0" i="0" u="none" strike="noStrike" cap="none">
-                <a:solidFill>
-                  <a:srgbClr val="000000"/>
-                </a:solidFill>
-                <a:latin typeface="Arial"/>
-                <a:ea typeface="Arial"/>
-                <a:cs typeface="Arial"/>
-                <a:sym typeface="Arial"/>
-              </a:defRPr>
-            </a:lvl6pPr>
-            <a:lvl7pPr marR="0" lvl="6" algn="l" rtl="0">
-              <a:lnSpc>
-                <a:spcPct val="100000"/>
-              </a:lnSpc>
-              <a:spcBef>
-                <a:spcPts val="0"/>
-              </a:spcBef>
-              <a:spcAft>
-                <a:spcPts val="0"/>
-              </a:spcAft>
-              <a:buClr>
-                <a:srgbClr val="000000"/>
-              </a:buClr>
-              <a:buFont typeface="Arial"/>
-              <a:defRPr sz="1400" b="0" i="0" u="none" strike="noStrike" cap="none">
-                <a:solidFill>
-                  <a:srgbClr val="000000"/>
-                </a:solidFill>
-                <a:latin typeface="Arial"/>
-                <a:ea typeface="Arial"/>
-                <a:cs typeface="Arial"/>
-                <a:sym typeface="Arial"/>
-              </a:defRPr>
-            </a:lvl7pPr>
-            <a:lvl8pPr marR="0" lvl="7" algn="l" rtl="0">
-              <a:lnSpc>
-                <a:spcPct val="100000"/>
-              </a:lnSpc>
-              <a:spcBef>
-                <a:spcPts val="0"/>
-              </a:spcBef>
-              <a:spcAft>
-                <a:spcPts val="0"/>
-              </a:spcAft>
-              <a:buClr>
-                <a:srgbClr val="000000"/>
-              </a:buClr>
-              <a:buFont typeface="Arial"/>
-              <a:defRPr sz="1400" b="0" i="0" u="none" strike="noStrike" cap="none">
-                <a:solidFill>
-                  <a:srgbClr val="000000"/>
-                </a:solidFill>
-                <a:latin typeface="Arial"/>
-                <a:ea typeface="Arial"/>
-                <a:cs typeface="Arial"/>
-                <a:sym typeface="Arial"/>
-              </a:defRPr>
-            </a:lvl8pPr>
-            <a:lvl9pPr marR="0" lvl="8" algn="l" rtl="0">
-              <a:lnSpc>
-                <a:spcPct val="100000"/>
-              </a:lnSpc>
-              <a:spcBef>
-                <a:spcPts val="0"/>
-              </a:spcBef>
-              <a:spcAft>
-                <a:spcPts val="0"/>
-              </a:spcAft>
-              <a:buClr>
-                <a:srgbClr val="000000"/>
-              </a:buClr>
-              <a:buFont typeface="Arial"/>
-              <a:defRPr sz="1400" b="0" i="0" u="none" strike="noStrike" cap="none">
-                <a:solidFill>
-                  <a:srgbClr val="000000"/>
-                </a:solidFill>
-                <a:latin typeface="Arial"/>
-                <a:ea typeface="Arial"/>
-                <a:cs typeface="Arial"/>
-                <a:sym typeface="Arial"/>
-              </a:defRPr>
-            </a:lvl9pPr>
-          </a:lstStyle>
-          <a:p>
-            <a:pPr algn="ctr"/>
-            <a:r>
-              <a:rPr lang="pt-PT" sz="1100" b="1">
-                <a:solidFill>
-                  <a:srgbClr val="E84987"/>
-                </a:solidFill>
-                <a:latin typeface="Orbitron" panose="020B0604020202020204" charset="0"/>
-              </a:rPr>
-              <a:t>Base de dados (</a:t>
+              <a:t>Obrigado </a:t>
             </a:r>
             <a:r>
-              <a:rPr lang="pt-PT" sz="1100" b="1" err="1">
-                <a:solidFill>
-                  <a:srgbClr val="E84987"/>
-                </a:solidFill>
+              <a:rPr lang="pt-PT" sz="4000" b="1">
                 <a:latin typeface="Orbitron" panose="020B0604020202020204" charset="0"/>
+                <a:sym typeface="Wingdings" panose="05000000000000000000" pitchFamily="2" charset="2"/>
               </a:rPr>
-              <a:t>Sql</a:t>
+              <a:t></a:t>
             </a:r>
-            <a:r>
-              <a:rPr lang="pt-PT" sz="1100" b="1">
-                <a:solidFill>
-                  <a:srgbClr val="E84987"/>
-                </a:solidFill>
-                <a:latin typeface="Orbitron" panose="020B0604020202020204" charset="0"/>
-              </a:rPr>
-              <a:t> ou </a:t>
-            </a:r>
-            <a:r>
-              <a:rPr lang="pt-PT" sz="1100" b="1" err="1">
-                <a:solidFill>
-                  <a:srgbClr val="E84987"/>
-                </a:solidFill>
-                <a:latin typeface="Orbitron" panose="020B0604020202020204" charset="0"/>
-              </a:rPr>
-              <a:t>NoSql</a:t>
-            </a:r>
-            <a:r>
-              <a:rPr lang="pt-PT" sz="1100" b="1">
-                <a:solidFill>
-                  <a:srgbClr val="E84987"/>
-                </a:solidFill>
-                <a:latin typeface="Orbitron" panose="020B0604020202020204" charset="0"/>
-              </a:rPr>
-              <a:t>)</a:t>
-            </a:r>
-          </a:p>
-        </p:txBody>
-      </p:sp>
-      <p:pic>
-        <p:nvPicPr>
-          <p:cNvPr id="7180" name="Picture 12" descr="GitHub Logo, symbol, meaning, history, PNG, brand">
-            <a:extLst>
-              <a:ext uri="{FF2B5EF4-FFF2-40B4-BE49-F238E27FC236}">
-                <a16:creationId xmlns:a16="http://schemas.microsoft.com/office/drawing/2014/main" id="{3A225153-8C32-611F-90D3-874EDC1C7F0E}"/>
-              </a:ext>
-            </a:extLst>
-          </p:cNvPr>
-          <p:cNvPicPr>
-            <a:picLocks noChangeAspect="1" noChangeArrowheads="1"/>
-          </p:cNvPicPr>
-          <p:nvPr/>
-        </p:nvPicPr>
-        <p:blipFill>
-          <a:blip r:embed="rId6">
-            <a:duotone>
-              <a:schemeClr val="bg2">
-                <a:shade val="45000"/>
-                <a:satMod val="135000"/>
-              </a:schemeClr>
-              <a:prstClr val="white"/>
-            </a:duotone>
-            <a:extLst>
-              <a:ext uri="{28A0092B-C50C-407E-A947-70E740481C1C}">
-                <a14:useLocalDpi xmlns:a14="http://schemas.microsoft.com/office/drawing/2010/main" val="0"/>
-              </a:ext>
-            </a:extLst>
-          </a:blip>
-          <a:srcRect/>
-          <a:stretch>
-            <a:fillRect/>
-          </a:stretch>
-        </p:blipFill>
-        <p:spPr bwMode="auto">
-          <a:xfrm>
-            <a:off x="6989618" y="2733841"/>
-            <a:ext cx="1280000" cy="720000"/>
-          </a:xfrm>
-          <a:prstGeom prst="rect">
-            <a:avLst/>
-          </a:prstGeom>
-          <a:noFill/>
-          <a:extLst>
-            <a:ext uri="{909E8E84-426E-40DD-AFC4-6F175D3DCCD1}">
-              <a14:hiddenFill xmlns:a14="http://schemas.microsoft.com/office/drawing/2010/main">
-                <a:solidFill>
-                  <a:srgbClr val="FFFFFF"/>
-                </a:solidFill>
-              </a14:hiddenFill>
-            </a:ext>
-          </a:extLst>
-        </p:spPr>
-      </p:pic>
-      <p:pic>
-        <p:nvPicPr>
-          <p:cNvPr id="7182" name="Picture 14">
-            <a:extLst>
-              <a:ext uri="{FF2B5EF4-FFF2-40B4-BE49-F238E27FC236}">
-                <a16:creationId xmlns:a16="http://schemas.microsoft.com/office/drawing/2014/main" id="{0ED5F3E2-DDF3-64A6-D33A-BB99E3DD05BE}"/>
-              </a:ext>
-            </a:extLst>
-          </p:cNvPr>
-          <p:cNvPicPr>
-            <a:picLocks noChangeAspect="1" noChangeArrowheads="1"/>
-          </p:cNvPicPr>
-          <p:nvPr/>
-        </p:nvPicPr>
-        <p:blipFill>
-          <a:blip r:embed="rId7">
-            <a:extLst>
-              <a:ext uri="{28A0092B-C50C-407E-A947-70E740481C1C}">
-                <a14:useLocalDpi xmlns:a14="http://schemas.microsoft.com/office/drawing/2010/main" val="0"/>
-              </a:ext>
-            </a:extLst>
-          </a:blip>
-          <a:srcRect/>
-          <a:stretch>
-            <a:fillRect/>
-          </a:stretch>
-        </p:blipFill>
-        <p:spPr bwMode="auto">
-          <a:xfrm>
-            <a:off x="6347624" y="1695322"/>
-            <a:ext cx="1866987" cy="540000"/>
-          </a:xfrm>
-          <a:prstGeom prst="rect">
-            <a:avLst/>
-          </a:prstGeom>
-          <a:noFill/>
-          <a:extLst>
-            <a:ext uri="{909E8E84-426E-40DD-AFC4-6F175D3DCCD1}">
-              <a14:hiddenFill xmlns:a14="http://schemas.microsoft.com/office/drawing/2010/main">
-                <a:solidFill>
-                  <a:srgbClr val="FFFFFF"/>
-                </a:solidFill>
-              </a14:hiddenFill>
-            </a:ext>
-          </a:extLst>
-        </p:spPr>
-      </p:pic>
-      <p:sp>
-        <p:nvSpPr>
-          <p:cNvPr id="20" name="Plus Sign 19">
-            <a:extLst>
-              <a:ext uri="{FF2B5EF4-FFF2-40B4-BE49-F238E27FC236}">
-                <a16:creationId xmlns:a16="http://schemas.microsoft.com/office/drawing/2014/main" id="{FAB838CC-5AF9-85DE-D160-1935936D50BC}"/>
-              </a:ext>
-            </a:extLst>
-          </p:cNvPr>
-          <p:cNvSpPr/>
-          <p:nvPr/>
-        </p:nvSpPr>
-        <p:spPr>
-          <a:xfrm>
-            <a:off x="5564212" y="1727004"/>
-            <a:ext cx="540000" cy="540000"/>
-          </a:xfrm>
-          <a:prstGeom prst="mathPlus">
-            <a:avLst/>
-          </a:prstGeom>
-        </p:spPr>
-        <p:style>
-          <a:lnRef idx="2">
-            <a:schemeClr val="accent1"/>
-          </a:lnRef>
-          <a:fillRef idx="1">
-            <a:schemeClr val="lt1"/>
-          </a:fillRef>
-          <a:effectRef idx="0">
-            <a:schemeClr val="accent1"/>
-          </a:effectRef>
-          <a:fontRef idx="minor">
-            <a:schemeClr val="dk1"/>
-          </a:fontRef>
-        </p:style>
-        <p:txBody>
-          <a:bodyPr rtlCol="0" anchor="ctr"/>
-          <a:lstStyle/>
-          <a:p>
-            <a:pPr algn="ctr"/>
-            <a:endParaRPr lang="en-US" sz="1100"/>
-          </a:p>
-        </p:txBody>
-      </p:sp>
-      <p:sp>
-        <p:nvSpPr>
-          <p:cNvPr id="23" name="Arrow: Bent 22">
-            <a:extLst>
-              <a:ext uri="{FF2B5EF4-FFF2-40B4-BE49-F238E27FC236}">
-                <a16:creationId xmlns:a16="http://schemas.microsoft.com/office/drawing/2014/main" id="{B8C943D6-6C21-5E0F-8B63-51B16DBD7142}"/>
-              </a:ext>
-            </a:extLst>
-          </p:cNvPr>
-          <p:cNvSpPr/>
-          <p:nvPr/>
-        </p:nvSpPr>
-        <p:spPr>
-          <a:xfrm rot="10800000" flipH="1">
-            <a:off x="5015344" y="2494069"/>
-            <a:ext cx="1974273" cy="761747"/>
-          </a:xfrm>
-          <a:prstGeom prst="bentArrow">
-            <a:avLst/>
-          </a:prstGeom>
-        </p:spPr>
-        <p:style>
-          <a:lnRef idx="2">
-            <a:schemeClr val="dk1"/>
-          </a:lnRef>
-          <a:fillRef idx="1">
-            <a:schemeClr val="lt1"/>
-          </a:fillRef>
-          <a:effectRef idx="0">
-            <a:schemeClr val="dk1"/>
-          </a:effectRef>
-          <a:fontRef idx="minor">
-            <a:schemeClr val="dk1"/>
-          </a:fontRef>
-        </p:style>
-        <p:txBody>
-          <a:bodyPr rtlCol="0" anchor="ctr"/>
-          <a:lstStyle/>
-          <a:p>
-            <a:pPr algn="ctr"/>
-            <a:endParaRPr lang="en-US" sz="1100">
-              <a:solidFill>
-                <a:schemeClr val="tx1"/>
-              </a:solidFill>
+            <a:endParaRPr lang="pt-PT" sz="4000" b="1">
+              <a:latin typeface="Orbitron" panose="020B0604020202020204" charset="0"/>
             </a:endParaRPr>
           </a:p>
         </p:txBody>
       </p:sp>
-      <p:sp>
-        <p:nvSpPr>
-          <p:cNvPr id="4" name="Google Shape;1041;p60">
-            <a:extLst>
-              <a:ext uri="{FF2B5EF4-FFF2-40B4-BE49-F238E27FC236}">
-                <a16:creationId xmlns:a16="http://schemas.microsoft.com/office/drawing/2014/main" id="{DFDB463F-2865-1592-7F83-FC0FA14E5DFF}"/>
-              </a:ext>
-            </a:extLst>
-          </p:cNvPr>
-          <p:cNvSpPr txBox="1">
-            <a:spLocks noGrp="1"/>
-          </p:cNvSpPr>
-          <p:nvPr>
-            <p:ph type="title"/>
-          </p:nvPr>
-        </p:nvSpPr>
-        <p:spPr>
-          <a:xfrm>
-            <a:off x="2156533" y="289916"/>
-            <a:ext cx="4723867" cy="583873"/>
-          </a:xfrm>
-          <a:prstGeom prst="rect">
-            <a:avLst/>
-          </a:prstGeom>
-          <a:ln>
-            <a:noFill/>
-          </a:ln>
-        </p:spPr>
-        <p:txBody>
-          <a:bodyPr spcFirstLastPara="1" wrap="square" lIns="91425" tIns="91425" rIns="91425" bIns="91425" anchor="ctr" anchorCtr="0">
-            <a:noAutofit/>
-          </a:bodyPr>
-          <a:lstStyle/>
-          <a:p>
-            <a:pPr marL="0" lvl="0" indent="0" algn="ctr" rtl="0">
-              <a:spcBef>
-                <a:spcPts val="0"/>
-              </a:spcBef>
-              <a:spcAft>
-                <a:spcPts val="0"/>
-              </a:spcAft>
-              <a:buNone/>
-            </a:pPr>
-            <a:r>
-              <a:rPr lang="en"/>
-              <a:t>Ferramentas úteis</a:t>
-            </a:r>
-            <a:endParaRPr>
-              <a:solidFill>
-                <a:schemeClr val="lt1"/>
-              </a:solidFill>
-            </a:endParaRPr>
-          </a:p>
-        </p:txBody>
-      </p:sp>
-      <p:pic>
-        <p:nvPicPr>
-          <p:cNvPr id="1026" name="Picture 2">
-            <a:extLst>
-              <a:ext uri="{FF2B5EF4-FFF2-40B4-BE49-F238E27FC236}">
-                <a16:creationId xmlns:a16="http://schemas.microsoft.com/office/drawing/2014/main" id="{E729B96E-28B1-F19D-0327-85727E82660A}"/>
-              </a:ext>
-            </a:extLst>
-          </p:cNvPr>
-          <p:cNvPicPr>
-            <a:picLocks noChangeAspect="1" noChangeArrowheads="1"/>
-          </p:cNvPicPr>
-          <p:nvPr/>
-        </p:nvPicPr>
-        <p:blipFill>
-          <a:blip r:embed="rId8">
-            <a:extLst>
-              <a:ext uri="{28A0092B-C50C-407E-A947-70E740481C1C}">
-                <a14:useLocalDpi xmlns:a14="http://schemas.microsoft.com/office/drawing/2010/main" val="0"/>
-              </a:ext>
-            </a:extLst>
-          </a:blip>
-          <a:srcRect/>
-          <a:stretch>
-            <a:fillRect/>
-          </a:stretch>
-        </p:blipFill>
-        <p:spPr bwMode="auto">
-          <a:xfrm>
-            <a:off x="1837387" y="4026974"/>
-            <a:ext cx="1620000" cy="540000"/>
-          </a:xfrm>
-          <a:prstGeom prst="rect">
-            <a:avLst/>
-          </a:prstGeom>
-          <a:noFill/>
-          <a:extLst>
-            <a:ext uri="{909E8E84-426E-40DD-AFC4-6F175D3DCCD1}">
-              <a14:hiddenFill xmlns:a14="http://schemas.microsoft.com/office/drawing/2010/main">
-                <a:solidFill>
-                  <a:srgbClr val="FFFFFF"/>
-                </a:solidFill>
-              </a14:hiddenFill>
-            </a:ext>
-          </a:extLst>
-        </p:spPr>
-      </p:pic>
     </p:spTree>
     <p:extLst>
       <p:ext uri="{BB962C8B-B14F-4D97-AF65-F5344CB8AC3E}">
-        <p14:creationId xmlns:p14="http://schemas.microsoft.com/office/powerpoint/2010/main" val="2291675387"/>
+        <p14:creationId xmlns:p14="http://schemas.microsoft.com/office/powerpoint/2010/main" val="1341508492"/>
       </p:ext>
     </p:extLst>
   </p:cSld>
   <p:clrMapOvr>
     <a:masterClrMapping/>
   </p:clrMapOvr>
-  <mc:AlternateContent xmlns:mc="http://schemas.openxmlformats.org/markup-compatibility/2006">
-    <mc:Choice xmlns:p159="http://schemas.microsoft.com/office/powerpoint/2015/09/main" Requires="p159">
+  <mc:AlternateContent xmlns:mc="http://schemas.openxmlformats.org/markup-compatibility/2006" xmlns:p159="http://schemas.microsoft.com/office/powerpoint/2015/09/main">
+    <mc:Choice Requires="p159">
       <p:transition xmlns:p14="http://schemas.microsoft.com/office/powerpoint/2010/main" spd="slow" p14:dur="2000">
         <p159:morph option="byObject"/>
       </p:transition>
     </mc:Choice>
-    <mc:Fallback>
+    <mc:Fallback xmlns="">
       <p:transition spd="slow">
         <p:fade/>
       </p:transition>
@@ -36737,332 +35155,13 @@
   <p:clrMapOvr>
     <a:masterClrMapping/>
   </p:clrMapOvr>
-  <mc:AlternateContent xmlns:mc="http://schemas.openxmlformats.org/markup-compatibility/2006">
-    <mc:Choice xmlns:p159="http://schemas.microsoft.com/office/powerpoint/2015/09/main" Requires="p159">
+  <mc:AlternateContent xmlns:mc="http://schemas.openxmlformats.org/markup-compatibility/2006" xmlns:p159="http://schemas.microsoft.com/office/powerpoint/2015/09/main">
+    <mc:Choice Requires="p159">
       <p:transition xmlns:p14="http://schemas.microsoft.com/office/powerpoint/2010/main" spd="slow" p14:dur="2000">
         <p159:morph option="byObject"/>
       </p:transition>
     </mc:Choice>
-    <mc:Fallback>
-      <p:transition spd="slow">
-        <p:fade/>
-      </p:transition>
-    </mc:Fallback>
-  </mc:AlternateContent>
-</p:sld>
-</file>
-
-<file path=ppt/slides/slide20.xml><?xml version="1.0" encoding="utf-8"?>
-<p:sld xmlns:a="http://schemas.openxmlformats.org/drawingml/2006/main" xmlns:r="http://schemas.openxmlformats.org/officeDocument/2006/relationships" xmlns:p="http://schemas.openxmlformats.org/presentationml/2006/main">
-  <p:cSld>
-    <p:spTree>
-      <p:nvGrpSpPr>
-        <p:cNvPr id="1" name=""/>
-        <p:cNvGrpSpPr/>
-        <p:nvPr/>
-      </p:nvGrpSpPr>
-      <p:grpSpPr>
-        <a:xfrm>
-          <a:off x="0" y="0"/>
-          <a:ext cx="0" cy="0"/>
-          <a:chOff x="0" y="0"/>
-          <a:chExt cx="0" cy="0"/>
-        </a:xfrm>
-      </p:grpSpPr>
-      <p:sp>
-        <p:nvSpPr>
-          <p:cNvPr id="4" name="Google Shape;1041;p60">
-            <a:extLst>
-              <a:ext uri="{FF2B5EF4-FFF2-40B4-BE49-F238E27FC236}">
-                <a16:creationId xmlns:a16="http://schemas.microsoft.com/office/drawing/2014/main" id="{457426FA-6B3F-DC24-F2BB-6F5A7ED15814}"/>
-              </a:ext>
-            </a:extLst>
-          </p:cNvPr>
-          <p:cNvSpPr txBox="1">
-            <a:spLocks/>
-          </p:cNvSpPr>
-          <p:nvPr/>
-        </p:nvSpPr>
-        <p:spPr>
-          <a:xfrm>
-            <a:off x="2871226" y="2301899"/>
-            <a:ext cx="3401547" cy="539702"/>
-          </a:xfrm>
-          <a:prstGeom prst="rect">
-            <a:avLst/>
-          </a:prstGeom>
-        </p:spPr>
-        <p:txBody>
-          <a:bodyPr spcFirstLastPara="1" wrap="square" lIns="91425" tIns="91425" rIns="91425" bIns="91425" anchor="ctr" anchorCtr="0">
-            <a:noAutofit/>
-          </a:bodyPr>
-          <a:lstStyle>
-            <a:defPPr marR="0" lvl="0" algn="l" rtl="0">
-              <a:lnSpc>
-                <a:spcPct val="100000"/>
-              </a:lnSpc>
-              <a:spcBef>
-                <a:spcPts val="0"/>
-              </a:spcBef>
-              <a:spcAft>
-                <a:spcPts val="0"/>
-              </a:spcAft>
-            </a:defPPr>
-            <a:lvl1pPr marR="0" lvl="0" algn="l" rtl="0">
-              <a:lnSpc>
-                <a:spcPct val="100000"/>
-              </a:lnSpc>
-              <a:spcBef>
-                <a:spcPts val="0"/>
-              </a:spcBef>
-              <a:spcAft>
-                <a:spcPts val="0"/>
-              </a:spcAft>
-              <a:buClr>
-                <a:srgbClr val="000000"/>
-              </a:buClr>
-              <a:buFont typeface="Arial"/>
-              <a:defRPr sz="1400" b="0" i="0" u="none" strike="noStrike" cap="none">
-                <a:solidFill>
-                  <a:srgbClr val="000000"/>
-                </a:solidFill>
-                <a:latin typeface="Arial"/>
-                <a:ea typeface="Arial"/>
-                <a:cs typeface="Arial"/>
-                <a:sym typeface="Arial"/>
-              </a:defRPr>
-            </a:lvl1pPr>
-            <a:lvl2pPr marR="0" lvl="1" algn="l" rtl="0">
-              <a:lnSpc>
-                <a:spcPct val="100000"/>
-              </a:lnSpc>
-              <a:spcBef>
-                <a:spcPts val="0"/>
-              </a:spcBef>
-              <a:spcAft>
-                <a:spcPts val="0"/>
-              </a:spcAft>
-              <a:buClr>
-                <a:srgbClr val="000000"/>
-              </a:buClr>
-              <a:buFont typeface="Arial"/>
-              <a:defRPr sz="1400" b="0" i="0" u="none" strike="noStrike" cap="none">
-                <a:solidFill>
-                  <a:srgbClr val="000000"/>
-                </a:solidFill>
-                <a:latin typeface="Arial"/>
-                <a:ea typeface="Arial"/>
-                <a:cs typeface="Arial"/>
-                <a:sym typeface="Arial"/>
-              </a:defRPr>
-            </a:lvl2pPr>
-            <a:lvl3pPr marR="0" lvl="2" algn="l" rtl="0">
-              <a:lnSpc>
-                <a:spcPct val="100000"/>
-              </a:lnSpc>
-              <a:spcBef>
-                <a:spcPts val="0"/>
-              </a:spcBef>
-              <a:spcAft>
-                <a:spcPts val="0"/>
-              </a:spcAft>
-              <a:buClr>
-                <a:srgbClr val="000000"/>
-              </a:buClr>
-              <a:buFont typeface="Arial"/>
-              <a:defRPr sz="1400" b="0" i="0" u="none" strike="noStrike" cap="none">
-                <a:solidFill>
-                  <a:srgbClr val="000000"/>
-                </a:solidFill>
-                <a:latin typeface="Arial"/>
-                <a:ea typeface="Arial"/>
-                <a:cs typeface="Arial"/>
-                <a:sym typeface="Arial"/>
-              </a:defRPr>
-            </a:lvl3pPr>
-            <a:lvl4pPr marR="0" lvl="3" algn="l" rtl="0">
-              <a:lnSpc>
-                <a:spcPct val="100000"/>
-              </a:lnSpc>
-              <a:spcBef>
-                <a:spcPts val="0"/>
-              </a:spcBef>
-              <a:spcAft>
-                <a:spcPts val="0"/>
-              </a:spcAft>
-              <a:buClr>
-                <a:srgbClr val="000000"/>
-              </a:buClr>
-              <a:buFont typeface="Arial"/>
-              <a:defRPr sz="1400" b="0" i="0" u="none" strike="noStrike" cap="none">
-                <a:solidFill>
-                  <a:srgbClr val="000000"/>
-                </a:solidFill>
-                <a:latin typeface="Arial"/>
-                <a:ea typeface="Arial"/>
-                <a:cs typeface="Arial"/>
-                <a:sym typeface="Arial"/>
-              </a:defRPr>
-            </a:lvl4pPr>
-            <a:lvl5pPr marR="0" lvl="4" algn="l" rtl="0">
-              <a:lnSpc>
-                <a:spcPct val="100000"/>
-              </a:lnSpc>
-              <a:spcBef>
-                <a:spcPts val="0"/>
-              </a:spcBef>
-              <a:spcAft>
-                <a:spcPts val="0"/>
-              </a:spcAft>
-              <a:buClr>
-                <a:srgbClr val="000000"/>
-              </a:buClr>
-              <a:buFont typeface="Arial"/>
-              <a:defRPr sz="1400" b="0" i="0" u="none" strike="noStrike" cap="none">
-                <a:solidFill>
-                  <a:srgbClr val="000000"/>
-                </a:solidFill>
-                <a:latin typeface="Arial"/>
-                <a:ea typeface="Arial"/>
-                <a:cs typeface="Arial"/>
-                <a:sym typeface="Arial"/>
-              </a:defRPr>
-            </a:lvl5pPr>
-            <a:lvl6pPr marR="0" lvl="5" algn="l" rtl="0">
-              <a:lnSpc>
-                <a:spcPct val="100000"/>
-              </a:lnSpc>
-              <a:spcBef>
-                <a:spcPts val="0"/>
-              </a:spcBef>
-              <a:spcAft>
-                <a:spcPts val="0"/>
-              </a:spcAft>
-              <a:buClr>
-                <a:srgbClr val="000000"/>
-              </a:buClr>
-              <a:buFont typeface="Arial"/>
-              <a:defRPr sz="1400" b="0" i="0" u="none" strike="noStrike" cap="none">
-                <a:solidFill>
-                  <a:srgbClr val="000000"/>
-                </a:solidFill>
-                <a:latin typeface="Arial"/>
-                <a:ea typeface="Arial"/>
-                <a:cs typeface="Arial"/>
-                <a:sym typeface="Arial"/>
-              </a:defRPr>
-            </a:lvl6pPr>
-            <a:lvl7pPr marR="0" lvl="6" algn="l" rtl="0">
-              <a:lnSpc>
-                <a:spcPct val="100000"/>
-              </a:lnSpc>
-              <a:spcBef>
-                <a:spcPts val="0"/>
-              </a:spcBef>
-              <a:spcAft>
-                <a:spcPts val="0"/>
-              </a:spcAft>
-              <a:buClr>
-                <a:srgbClr val="000000"/>
-              </a:buClr>
-              <a:buFont typeface="Arial"/>
-              <a:defRPr sz="1400" b="0" i="0" u="none" strike="noStrike" cap="none">
-                <a:solidFill>
-                  <a:srgbClr val="000000"/>
-                </a:solidFill>
-                <a:latin typeface="Arial"/>
-                <a:ea typeface="Arial"/>
-                <a:cs typeface="Arial"/>
-                <a:sym typeface="Arial"/>
-              </a:defRPr>
-            </a:lvl7pPr>
-            <a:lvl8pPr marR="0" lvl="7" algn="l" rtl="0">
-              <a:lnSpc>
-                <a:spcPct val="100000"/>
-              </a:lnSpc>
-              <a:spcBef>
-                <a:spcPts val="0"/>
-              </a:spcBef>
-              <a:spcAft>
-                <a:spcPts val="0"/>
-              </a:spcAft>
-              <a:buClr>
-                <a:srgbClr val="000000"/>
-              </a:buClr>
-              <a:buFont typeface="Arial"/>
-              <a:defRPr sz="1400" b="0" i="0" u="none" strike="noStrike" cap="none">
-                <a:solidFill>
-                  <a:srgbClr val="000000"/>
-                </a:solidFill>
-                <a:latin typeface="Arial"/>
-                <a:ea typeface="Arial"/>
-                <a:cs typeface="Arial"/>
-                <a:sym typeface="Arial"/>
-              </a:defRPr>
-            </a:lvl8pPr>
-            <a:lvl9pPr marR="0" lvl="8" algn="l" rtl="0">
-              <a:lnSpc>
-                <a:spcPct val="100000"/>
-              </a:lnSpc>
-              <a:spcBef>
-                <a:spcPts val="0"/>
-              </a:spcBef>
-              <a:spcAft>
-                <a:spcPts val="0"/>
-              </a:spcAft>
-              <a:buClr>
-                <a:srgbClr val="000000"/>
-              </a:buClr>
-              <a:buFont typeface="Arial"/>
-              <a:defRPr sz="1400" b="0" i="0" u="none" strike="noStrike" cap="none">
-                <a:solidFill>
-                  <a:srgbClr val="000000"/>
-                </a:solidFill>
-                <a:latin typeface="Arial"/>
-                <a:ea typeface="Arial"/>
-                <a:cs typeface="Arial"/>
-                <a:sym typeface="Arial"/>
-              </a:defRPr>
-            </a:lvl9pPr>
-          </a:lstStyle>
-          <a:p>
-            <a:pPr algn="ctr"/>
-            <a:r>
-              <a:rPr lang="pt-PT" sz="4000" b="1">
-                <a:latin typeface="Orbitron" panose="020B0604020202020204" charset="0"/>
-              </a:rPr>
-              <a:t>Obrigado </a:t>
-            </a:r>
-            <a:r>
-              <a:rPr lang="pt-PT" sz="4000" b="1">
-                <a:latin typeface="Orbitron" panose="020B0604020202020204" charset="0"/>
-                <a:sym typeface="Wingdings" panose="05000000000000000000" pitchFamily="2" charset="2"/>
-              </a:rPr>
-              <a:t></a:t>
-            </a:r>
-            <a:endParaRPr lang="pt-PT" sz="4000" b="1">
-              <a:latin typeface="Orbitron" panose="020B0604020202020204" charset="0"/>
-            </a:endParaRPr>
-          </a:p>
-        </p:txBody>
-      </p:sp>
-    </p:spTree>
-    <p:extLst>
-      <p:ext uri="{BB962C8B-B14F-4D97-AF65-F5344CB8AC3E}">
-        <p14:creationId xmlns:p14="http://schemas.microsoft.com/office/powerpoint/2010/main" val="1341508492"/>
-      </p:ext>
-    </p:extLst>
-  </p:cSld>
-  <p:clrMapOvr>
-    <a:masterClrMapping/>
-  </p:clrMapOvr>
-  <mc:AlternateContent xmlns:mc="http://schemas.openxmlformats.org/markup-compatibility/2006">
-    <mc:Choice xmlns:p159="http://schemas.microsoft.com/office/powerpoint/2015/09/main" Requires="p159">
-      <p:transition xmlns:p14="http://schemas.microsoft.com/office/powerpoint/2010/main" spd="slow" p14:dur="2000">
-        <p159:morph option="byObject"/>
-      </p:transition>
-    </mc:Choice>
-    <mc:Fallback>
+    <mc:Fallback xmlns="">
       <p:transition spd="slow">
         <p:fade/>
       </p:transition>
@@ -37614,13 +35713,13 @@
   <p:clrMapOvr>
     <a:masterClrMapping/>
   </p:clrMapOvr>
-  <mc:AlternateContent xmlns:mc="http://schemas.openxmlformats.org/markup-compatibility/2006">
-    <mc:Choice xmlns:p159="http://schemas.microsoft.com/office/powerpoint/2015/09/main" Requires="p159">
+  <mc:AlternateContent xmlns:mc="http://schemas.openxmlformats.org/markup-compatibility/2006" xmlns:p159="http://schemas.microsoft.com/office/powerpoint/2015/09/main">
+    <mc:Choice Requires="p159">
       <p:transition xmlns:p14="http://schemas.microsoft.com/office/powerpoint/2010/main" spd="slow" p14:dur="2000">
         <p159:morph option="byObject"/>
       </p:transition>
     </mc:Choice>
-    <mc:Fallback>
+    <mc:Fallback xmlns="">
       <p:transition spd="slow">
         <p:fade/>
       </p:transition>
@@ -40176,13 +38275,13 @@
   <p:clrMapOvr>
     <a:masterClrMapping/>
   </p:clrMapOvr>
-  <mc:AlternateContent xmlns:mc="http://schemas.openxmlformats.org/markup-compatibility/2006">
-    <mc:Choice xmlns:p159="http://schemas.microsoft.com/office/powerpoint/2015/09/main" Requires="p159">
+  <mc:AlternateContent xmlns:mc="http://schemas.openxmlformats.org/markup-compatibility/2006" xmlns:p159="http://schemas.microsoft.com/office/powerpoint/2015/09/main">
+    <mc:Choice Requires="p159">
       <p:transition xmlns:p14="http://schemas.microsoft.com/office/powerpoint/2010/main" spd="slow" p14:dur="2000">
         <p159:morph option="byObject"/>
       </p:transition>
     </mc:Choice>
-    <mc:Fallback>
+    <mc:Fallback xmlns="">
       <p:transition spd="slow">
         <p:fade/>
       </p:transition>
@@ -40325,13 +38424,13 @@
   <p:clrMapOvr>
     <a:masterClrMapping/>
   </p:clrMapOvr>
-  <mc:AlternateContent xmlns:mc="http://schemas.openxmlformats.org/markup-compatibility/2006">
-    <mc:Choice xmlns:p159="http://schemas.microsoft.com/office/powerpoint/2015/09/main" Requires="p159">
+  <mc:AlternateContent xmlns:mc="http://schemas.openxmlformats.org/markup-compatibility/2006" xmlns:p159="http://schemas.microsoft.com/office/powerpoint/2015/09/main">
+    <mc:Choice Requires="p159">
       <p:transition xmlns:p14="http://schemas.microsoft.com/office/powerpoint/2010/main" spd="slow" p14:dur="2000">
         <p159:morph option="byObject"/>
       </p:transition>
     </mc:Choice>
-    <mc:Fallback>
+    <mc:Fallback xmlns="">
       <p:transition spd="slow">
         <p:fade/>
       </p:transition>
@@ -40926,13 +39025,13 @@
   <p:clrMapOvr>
     <a:masterClrMapping/>
   </p:clrMapOvr>
-  <mc:AlternateContent xmlns:mc="http://schemas.openxmlformats.org/markup-compatibility/2006">
-    <mc:Choice xmlns:p159="http://schemas.microsoft.com/office/powerpoint/2015/09/main" Requires="p159">
+  <mc:AlternateContent xmlns:mc="http://schemas.openxmlformats.org/markup-compatibility/2006" xmlns:p159="http://schemas.microsoft.com/office/powerpoint/2015/09/main">
+    <mc:Choice Requires="p159">
       <p:transition xmlns:p14="http://schemas.microsoft.com/office/powerpoint/2010/main" spd="slow" p14:dur="2000">
         <p159:morph option="byObject"/>
       </p:transition>
     </mc:Choice>
-    <mc:Fallback>
+    <mc:Fallback xmlns="">
       <p:transition spd="slow">
         <p:fade/>
       </p:transition>
@@ -42384,13 +40483,13 @@
   <p:clrMapOvr>
     <a:masterClrMapping/>
   </p:clrMapOvr>
-  <mc:AlternateContent xmlns:mc="http://schemas.openxmlformats.org/markup-compatibility/2006">
-    <mc:Choice xmlns:p159="http://schemas.microsoft.com/office/powerpoint/2015/09/main" Requires="p159">
+  <mc:AlternateContent xmlns:mc="http://schemas.openxmlformats.org/markup-compatibility/2006" xmlns:p159="http://schemas.microsoft.com/office/powerpoint/2015/09/main">
+    <mc:Choice Requires="p159">
       <p:transition xmlns:p14="http://schemas.microsoft.com/office/powerpoint/2010/main" spd="slow" p14:dur="2000">
         <p159:morph option="byObject"/>
       </p:transition>
     </mc:Choice>
-    <mc:Fallback>
+    <mc:Fallback xmlns="">
       <p:transition spd="slow">
         <p:fade/>
       </p:transition>
@@ -43684,13 +41783,13 @@
   <p:clrMapOvr>
     <a:masterClrMapping/>
   </p:clrMapOvr>
-  <mc:AlternateContent xmlns:mc="http://schemas.openxmlformats.org/markup-compatibility/2006">
-    <mc:Choice xmlns:p159="http://schemas.microsoft.com/office/powerpoint/2015/09/main" Requires="p159">
+  <mc:AlternateContent xmlns:mc="http://schemas.openxmlformats.org/markup-compatibility/2006" xmlns:p159="http://schemas.microsoft.com/office/powerpoint/2015/09/main">
+    <mc:Choice Requires="p159">
       <p:transition xmlns:p14="http://schemas.microsoft.com/office/powerpoint/2010/main" spd="slow" p14:dur="2000">
         <p159:morph option="byObject"/>
       </p:transition>
     </mc:Choice>
-    <mc:Fallback>
+    <mc:Fallback xmlns="">
       <p:transition spd="slow">
         <p:fade/>
       </p:transition>
@@ -44992,13 +43091,13 @@
   <p:clrMapOvr>
     <a:masterClrMapping/>
   </p:clrMapOvr>
-  <mc:AlternateContent xmlns:mc="http://schemas.openxmlformats.org/markup-compatibility/2006">
-    <mc:Choice xmlns:p159="http://schemas.microsoft.com/office/powerpoint/2015/09/main" Requires="p159">
+  <mc:AlternateContent xmlns:mc="http://schemas.openxmlformats.org/markup-compatibility/2006" xmlns:p159="http://schemas.microsoft.com/office/powerpoint/2015/09/main">
+    <mc:Choice Requires="p159">
       <p:transition xmlns:p14="http://schemas.microsoft.com/office/powerpoint/2010/main" spd="slow" p14:dur="2000">
         <p159:morph option="byObject"/>
       </p:transition>
     </mc:Choice>
-    <mc:Fallback>
+    <mc:Fallback xmlns="">
       <p:transition spd="slow">
         <p:fade/>
       </p:transition>
@@ -45831,6 +43930,23 @@
 </file>
 
 <file path=customXml/item1.xml><?xml version="1.0" encoding="utf-8"?>
+<?mso-contentType ?>
+<FormTemplates xmlns="http://schemas.microsoft.com/sharepoint/v3/contenttype/forms">
+  <Display>DocumentLibraryForm</Display>
+  <Edit>DocumentLibraryForm</Edit>
+  <New>DocumentLibraryForm</New>
+</FormTemplates>
+</file>
+
+<file path=customXml/item2.xml><?xml version="1.0" encoding="utf-8"?>
+<p:properties xmlns:p="http://schemas.microsoft.com/office/2006/metadata/properties" xmlns:xsi="http://www.w3.org/2001/XMLSchema-instance" xmlns:pc="http://schemas.microsoft.com/office/infopath/2007/PartnerControls">
+  <documentManagement>
+    <_activity xmlns="e5320658-45b1-444d-b7a9-3efd9c437958" xsi:nil="true"/>
+  </documentManagement>
+</p:properties>
+</file>
+
+<file path=customXml/item3.xml><?xml version="1.0" encoding="utf-8"?>
 <ct:contentTypeSchema xmlns:ct="http://schemas.microsoft.com/office/2006/metadata/contentType" xmlns:ma="http://schemas.microsoft.com/office/2006/metadata/properties/metaAttributes" ct:_="" ma:_="" ma:contentTypeName="Documento" ma:contentTypeID="0x0101005B65209DBFF0BD4CA334E984111739BD" ma:contentTypeVersion="17" ma:contentTypeDescription="Criar um novo documento." ma:contentTypeScope="" ma:versionID="dd185fb4eb22abfba1bbf1df215db036">
   <xsd:schema xmlns:xsd="http://www.w3.org/2001/XMLSchema" xmlns:xs="http://www.w3.org/2001/XMLSchema" xmlns:p="http://schemas.microsoft.com/office/2006/metadata/properties" xmlns:ns3="e5320658-45b1-444d-b7a9-3efd9c437958" xmlns:ns4="3f59f02c-74f8-4e70-b149-5783d454d21b" targetNamespace="http://schemas.microsoft.com/office/2006/metadata/properties" ma:root="true" ma:fieldsID="a7806ad5a617df065cd1e22143199572" ns3:_="" ns4:_="">
     <xsd:import namespace="e5320658-45b1-444d-b7a9-3efd9c437958"/>
@@ -46077,38 +44193,10 @@
 </ct:contentTypeSchema>
 </file>
 
-<file path=customXml/item2.xml><?xml version="1.0" encoding="utf-8"?>
-<p:properties xmlns:p="http://schemas.microsoft.com/office/2006/metadata/properties" xmlns:xsi="http://www.w3.org/2001/XMLSchema-instance" xmlns:pc="http://schemas.microsoft.com/office/infopath/2007/PartnerControls">
-  <documentManagement>
-    <_activity xmlns="e5320658-45b1-444d-b7a9-3efd9c437958" xsi:nil="true"/>
-  </documentManagement>
-</p:properties>
-</file>
-
-<file path=customXml/item3.xml><?xml version="1.0" encoding="utf-8"?>
-<?mso-contentType ?>
-<FormTemplates xmlns="http://schemas.microsoft.com/sharepoint/v3/contenttype/forms">
-  <Display>DocumentLibraryForm</Display>
-  <Edit>DocumentLibraryForm</Edit>
-  <New>DocumentLibraryForm</New>
-</FormTemplates>
-</file>
-
 <file path=customXml/itemProps1.xml><?xml version="1.0" encoding="utf-8"?>
-<ds:datastoreItem xmlns:ds="http://schemas.openxmlformats.org/officeDocument/2006/customXml" ds:itemID="{AE87C926-6CF3-4705-8CA0-BBB019A4D072}">
+<ds:datastoreItem xmlns:ds="http://schemas.openxmlformats.org/officeDocument/2006/customXml" ds:itemID="{EC89D118-3070-4028-9A0B-F5A311099D76}">
   <ds:schemaRefs>
-    <ds:schemaRef ds:uri="3f59f02c-74f8-4e70-b149-5783d454d21b"/>
-    <ds:schemaRef ds:uri="e5320658-45b1-444d-b7a9-3efd9c437958"/>
-    <ds:schemaRef ds:uri="http://purl.org/dc/elements/1.1/"/>
-    <ds:schemaRef ds:uri="http://purl.org/dc/terms/"/>
-    <ds:schemaRef ds:uri="http://schemas.microsoft.com/internal/obd"/>
-    <ds:schemaRef ds:uri="http://schemas.microsoft.com/office/2006/documentManagement/types"/>
-    <ds:schemaRef ds:uri="http://schemas.microsoft.com/office/2006/metadata/contentType"/>
-    <ds:schemaRef ds:uri="http://schemas.microsoft.com/office/2006/metadata/properties"/>
-    <ds:schemaRef ds:uri="http://schemas.microsoft.com/office/2006/metadata/properties/metaAttributes"/>
-    <ds:schemaRef ds:uri="http://schemas.microsoft.com/office/infopath/2007/PartnerControls"/>
-    <ds:schemaRef ds:uri="http://schemas.openxmlformats.org/package/2006/metadata/core-properties"/>
-    <ds:schemaRef ds:uri="http://www.w3.org/2001/XMLSchema"/>
+    <ds:schemaRef ds:uri="http://schemas.microsoft.com/sharepoint/v3/contenttype/forms"/>
   </ds:schemaRefs>
 </ds:datastoreItem>
 </file>
@@ -46131,9 +44219,20 @@
 </file>
 
 <file path=customXml/itemProps3.xml><?xml version="1.0" encoding="utf-8"?>
-<ds:datastoreItem xmlns:ds="http://schemas.openxmlformats.org/officeDocument/2006/customXml" ds:itemID="{EC89D118-3070-4028-9A0B-F5A311099D76}">
+<ds:datastoreItem xmlns:ds="http://schemas.openxmlformats.org/officeDocument/2006/customXml" ds:itemID="{AE87C926-6CF3-4705-8CA0-BBB019A4D072}">
   <ds:schemaRefs>
-    <ds:schemaRef ds:uri="http://schemas.microsoft.com/sharepoint/v3/contenttype/forms"/>
+    <ds:schemaRef ds:uri="3f59f02c-74f8-4e70-b149-5783d454d21b"/>
+    <ds:schemaRef ds:uri="e5320658-45b1-444d-b7a9-3efd9c437958"/>
+    <ds:schemaRef ds:uri="http://purl.org/dc/elements/1.1/"/>
+    <ds:schemaRef ds:uri="http://purl.org/dc/terms/"/>
+    <ds:schemaRef ds:uri="http://schemas.microsoft.com/internal/obd"/>
+    <ds:schemaRef ds:uri="http://schemas.microsoft.com/office/2006/documentManagement/types"/>
+    <ds:schemaRef ds:uri="http://schemas.microsoft.com/office/2006/metadata/contentType"/>
+    <ds:schemaRef ds:uri="http://schemas.microsoft.com/office/2006/metadata/properties"/>
+    <ds:schemaRef ds:uri="http://schemas.microsoft.com/office/2006/metadata/properties/metaAttributes"/>
+    <ds:schemaRef ds:uri="http://schemas.microsoft.com/office/infopath/2007/PartnerControls"/>
+    <ds:schemaRef ds:uri="http://schemas.openxmlformats.org/package/2006/metadata/core-properties"/>
+    <ds:schemaRef ds:uri="http://www.w3.org/2001/XMLSchema"/>
   </ds:schemaRefs>
 </ds:datastoreItem>
 </file>